--- a/Rota de Estudo - Requisitos e Escopo.pptx
+++ b/Rota de Estudo - Requisitos e Escopo.pptx
@@ -18,10 +18,6 @@
     <p:sldId id="266" r:id="rId12"/>
     <p:sldId id="267" r:id="rId13"/>
     <p:sldId id="268" r:id="rId14"/>
-    <p:sldId id="269" r:id="rId15"/>
-    <p:sldId id="270" r:id="rId16"/>
-    <p:sldId id="271" r:id="rId17"/>
-    <p:sldId id="272" r:id="rId18"/>
   </p:sldIdLst>
   <p:notesMasterIdLst>
     <p:notesMasterId r:id="rId19"/>
@@ -894,358 +890,6 @@
             <a:fld id="{F7021451-1387-4CA6-816F-3879F97B5CBC}" type="slidenum">
               <a:rPr lang="en-US"/>
               <a:t>13</a:t>
-            </a:fld>
-            <a:endParaRPr lang="en-US"/>
-          </a:p>
-        </p:txBody>
-      </p:sp>
-    </p:spTree>
-    <p:extLst>
-      <p:ext uri="{BB962C8B-B14F-4D97-AF65-F5344CB8AC3E}">
-        <p14:creationId xmlns:p14="http://schemas.microsoft.com/office/powerpoint/2010/main" val="1024086991"/>
-      </p:ext>
-    </p:extLst>
-  </p:cSld>
-  <p:clrMapOvr>
-    <a:masterClrMapping/>
-  </p:clrMapOvr>
-</p:notes>
-</file>
-
-<file path=ppt/notesSlides/notesSlide14.xml><?xml version="1.0" encoding="utf-8"?>
-<p:notes xmlns:a="http://schemas.openxmlformats.org/drawingml/2006/main" xmlns:r="http://schemas.openxmlformats.org/officeDocument/2006/relationships" xmlns:p="http://schemas.openxmlformats.org/presentationml/2006/main">
-  <p:cSld>
-    <p:spTree>
-      <p:nvGrpSpPr>
-        <p:cNvPr id="1" name=""/>
-        <p:cNvGrpSpPr/>
-        <p:nvPr/>
-      </p:nvGrpSpPr>
-      <p:grpSpPr>
-        <a:xfrm>
-          <a:off x="0" y="0"/>
-          <a:ext cx="0" cy="0"/>
-          <a:chOff x="0" y="0"/>
-          <a:chExt cx="0" cy="0"/>
-        </a:xfrm>
-      </p:grpSpPr>
-      <p:sp>
-        <p:nvSpPr>
-          <p:cNvPr id="2" name="Slide Image Placeholder 1"/>
-          <p:cNvSpPr>
-            <a:spLocks noGrp="1" noRot="1" noChangeAspect="1"/>
-          </p:cNvSpPr>
-          <p:nvPr>
-            <p:ph type="sldImg"/>
-          </p:nvPr>
-        </p:nvSpPr>
-        <p:spPr/>
-      </p:sp>
-      <p:sp>
-        <p:nvSpPr>
-          <p:cNvPr id="3" name="Notes Placeholder 2"/>
-          <p:cNvSpPr>
-            <a:spLocks noGrp="1"/>
-          </p:cNvSpPr>
-          <p:nvPr>
-            <p:ph type="body" idx="1"/>
-          </p:nvPr>
-        </p:nvSpPr>
-        <p:spPr/>
-        <p:txBody>
-          <a:bodyPr/>
-          <a:lstStyle/>
-          <a:p>
-            <a:r>
-              <a:rPr lang="en-US" dirty="0"/>
-              <a:t>As datas vêm do cronograma da disciplina. O que entra em cada marco é a nossa proposta e será ajustado a cada status report, que é justamente o objetivo dele.</a:t>
-            </a:r>
-            <a:endParaRPr lang="en-US" dirty="0"/>
-          </a:p>
-        </p:txBody>
-      </p:sp>
-      <p:sp>
-        <p:nvSpPr>
-          <p:cNvPr id="4" name="Slide Number Placeholder 3"/>
-          <p:cNvSpPr>
-            <a:spLocks noGrp="1"/>
-          </p:cNvSpPr>
-          <p:nvPr>
-            <p:ph type="sldNum" sz="quarter" idx="10"/>
-          </p:nvPr>
-        </p:nvSpPr>
-        <p:spPr/>
-        <p:txBody>
-          <a:bodyPr/>
-          <a:lstStyle/>
-          <a:p>
-            <a:fld id="{F7021451-1387-4CA6-816F-3879F97B5CBC}" type="slidenum">
-              <a:rPr lang="en-US"/>
-              <a:t>14</a:t>
-            </a:fld>
-            <a:endParaRPr lang="en-US"/>
-          </a:p>
-        </p:txBody>
-      </p:sp>
-    </p:spTree>
-    <p:extLst>
-      <p:ext uri="{BB962C8B-B14F-4D97-AF65-F5344CB8AC3E}">
-        <p14:creationId xmlns:p14="http://schemas.microsoft.com/office/powerpoint/2010/main" val="1024086991"/>
-      </p:ext>
-    </p:extLst>
-  </p:cSld>
-  <p:clrMapOvr>
-    <a:masterClrMapping/>
-  </p:clrMapOvr>
-</p:notes>
-</file>
-
-<file path=ppt/notesSlides/notesSlide15.xml><?xml version="1.0" encoding="utf-8"?>
-<p:notes xmlns:a="http://schemas.openxmlformats.org/drawingml/2006/main" xmlns:r="http://schemas.openxmlformats.org/officeDocument/2006/relationships" xmlns:p="http://schemas.openxmlformats.org/presentationml/2006/main">
-  <p:cSld>
-    <p:spTree>
-      <p:nvGrpSpPr>
-        <p:cNvPr id="1" name=""/>
-        <p:cNvGrpSpPr/>
-        <p:nvPr/>
-      </p:nvGrpSpPr>
-      <p:grpSpPr>
-        <a:xfrm>
-          <a:off x="0" y="0"/>
-          <a:ext cx="0" cy="0"/>
-          <a:chOff x="0" y="0"/>
-          <a:chExt cx="0" cy="0"/>
-        </a:xfrm>
-      </p:grpSpPr>
-      <p:sp>
-        <p:nvSpPr>
-          <p:cNvPr id="2" name="Slide Image Placeholder 1"/>
-          <p:cNvSpPr>
-            <a:spLocks noGrp="1" noRot="1" noChangeAspect="1"/>
-          </p:cNvSpPr>
-          <p:nvPr>
-            <p:ph type="sldImg"/>
-          </p:nvPr>
-        </p:nvSpPr>
-        <p:spPr/>
-      </p:sp>
-      <p:sp>
-        <p:nvSpPr>
-          <p:cNvPr id="3" name="Notes Placeholder 2"/>
-          <p:cNvSpPr>
-            <a:spLocks noGrp="1"/>
-          </p:cNvSpPr>
-          <p:nvPr>
-            <p:ph type="body" idx="1"/>
-          </p:nvPr>
-        </p:nvSpPr>
-        <p:spPr/>
-        <p:txBody>
-          <a:bodyPr/>
-          <a:lstStyle/>
-          <a:p>
-            <a:r>
-              <a:rPr lang="en-US" dirty="0"/>
-              <a:t>Números conferidos no repositório: 18 caminhos no openapi.yaml, 8 tabelas na V1__create_core_schema.sql, 5 ADRs em docs/adr. Não houve deploy nem dados de usuário ainda.</a:t>
-            </a:r>
-            <a:endParaRPr lang="en-US" dirty="0"/>
-          </a:p>
-        </p:txBody>
-      </p:sp>
-      <p:sp>
-        <p:nvSpPr>
-          <p:cNvPr id="4" name="Slide Number Placeholder 3"/>
-          <p:cNvSpPr>
-            <a:spLocks noGrp="1"/>
-          </p:cNvSpPr>
-          <p:nvPr>
-            <p:ph type="sldNum" sz="quarter" idx="10"/>
-          </p:nvPr>
-        </p:nvSpPr>
-        <p:spPr/>
-        <p:txBody>
-          <a:bodyPr/>
-          <a:lstStyle/>
-          <a:p>
-            <a:fld id="{F7021451-1387-4CA6-816F-3879F97B5CBC}" type="slidenum">
-              <a:rPr lang="en-US"/>
-              <a:t>15</a:t>
-            </a:fld>
-            <a:endParaRPr lang="en-US"/>
-          </a:p>
-        </p:txBody>
-      </p:sp>
-    </p:spTree>
-    <p:extLst>
-      <p:ext uri="{BB962C8B-B14F-4D97-AF65-F5344CB8AC3E}">
-        <p14:creationId xmlns:p14="http://schemas.microsoft.com/office/powerpoint/2010/main" val="1024086991"/>
-      </p:ext>
-    </p:extLst>
-  </p:cSld>
-  <p:clrMapOvr>
-    <a:masterClrMapping/>
-  </p:clrMapOvr>
-</p:notes>
-</file>
-
-<file path=ppt/notesSlides/notesSlide16.xml><?xml version="1.0" encoding="utf-8"?>
-<p:notes xmlns:a="http://schemas.openxmlformats.org/drawingml/2006/main" xmlns:r="http://schemas.openxmlformats.org/officeDocument/2006/relationships" xmlns:p="http://schemas.openxmlformats.org/presentationml/2006/main">
-  <p:cSld>
-    <p:spTree>
-      <p:nvGrpSpPr>
-        <p:cNvPr id="1" name=""/>
-        <p:cNvGrpSpPr/>
-        <p:nvPr/>
-      </p:nvGrpSpPr>
-      <p:grpSpPr>
-        <a:xfrm>
-          <a:off x="0" y="0"/>
-          <a:ext cx="0" cy="0"/>
-          <a:chOff x="0" y="0"/>
-          <a:chExt cx="0" cy="0"/>
-        </a:xfrm>
-      </p:grpSpPr>
-      <p:sp>
-        <p:nvSpPr>
-          <p:cNvPr id="2" name="Slide Image Placeholder 1"/>
-          <p:cNvSpPr>
-            <a:spLocks noGrp="1" noRot="1" noChangeAspect="1"/>
-          </p:cNvSpPr>
-          <p:nvPr>
-            <p:ph type="sldImg"/>
-          </p:nvPr>
-        </p:nvSpPr>
-        <p:spPr/>
-      </p:sp>
-      <p:sp>
-        <p:nvSpPr>
-          <p:cNvPr id="3" name="Notes Placeholder 2"/>
-          <p:cNvSpPr>
-            <a:spLocks noGrp="1"/>
-          </p:cNvSpPr>
-          <p:nvPr>
-            <p:ph type="body" idx="1"/>
-          </p:nvPr>
-        </p:nvSpPr>
-        <p:spPr/>
-        <p:txBody>
-          <a:bodyPr/>
-          <a:lstStyle/>
-          <a:p>
-            <a:r>
-              <a:rPr lang="en-US" dirty="0"/>
-              <a:t>Riscos com mitigação concreta. A lista da direita é o que decidimos não fazer no V1, para o escopo não crescer.</a:t>
-            </a:r>
-            <a:endParaRPr lang="en-US" dirty="0"/>
-          </a:p>
-        </p:txBody>
-      </p:sp>
-      <p:sp>
-        <p:nvSpPr>
-          <p:cNvPr id="4" name="Slide Number Placeholder 3"/>
-          <p:cNvSpPr>
-            <a:spLocks noGrp="1"/>
-          </p:cNvSpPr>
-          <p:nvPr>
-            <p:ph type="sldNum" sz="quarter" idx="10"/>
-          </p:nvPr>
-        </p:nvSpPr>
-        <p:spPr/>
-        <p:txBody>
-          <a:bodyPr/>
-          <a:lstStyle/>
-          <a:p>
-            <a:fld id="{F7021451-1387-4CA6-816F-3879F97B5CBC}" type="slidenum">
-              <a:rPr lang="en-US"/>
-              <a:t>16</a:t>
-            </a:fld>
-            <a:endParaRPr lang="en-US"/>
-          </a:p>
-        </p:txBody>
-      </p:sp>
-    </p:spTree>
-    <p:extLst>
-      <p:ext uri="{BB962C8B-B14F-4D97-AF65-F5344CB8AC3E}">
-        <p14:creationId xmlns:p14="http://schemas.microsoft.com/office/powerpoint/2010/main" val="1024086991"/>
-      </p:ext>
-    </p:extLst>
-  </p:cSld>
-  <p:clrMapOvr>
-    <a:masterClrMapping/>
-  </p:clrMapOvr>
-</p:notes>
-</file>
-
-<file path=ppt/notesSlides/notesSlide17.xml><?xml version="1.0" encoding="utf-8"?>
-<p:notes xmlns:a="http://schemas.openxmlformats.org/drawingml/2006/main" xmlns:r="http://schemas.openxmlformats.org/officeDocument/2006/relationships" xmlns:p="http://schemas.openxmlformats.org/presentationml/2006/main">
-  <p:cSld>
-    <p:spTree>
-      <p:nvGrpSpPr>
-        <p:cNvPr id="1" name=""/>
-        <p:cNvGrpSpPr/>
-        <p:nvPr/>
-      </p:nvGrpSpPr>
-      <p:grpSpPr>
-        <a:xfrm>
-          <a:off x="0" y="0"/>
-          <a:ext cx="0" cy="0"/>
-          <a:chOff x="0" y="0"/>
-          <a:chExt cx="0" cy="0"/>
-        </a:xfrm>
-      </p:grpSpPr>
-      <p:sp>
-        <p:nvSpPr>
-          <p:cNvPr id="2" name="Slide Image Placeholder 1"/>
-          <p:cNvSpPr>
-            <a:spLocks noGrp="1" noRot="1" noChangeAspect="1"/>
-          </p:cNvSpPr>
-          <p:nvPr>
-            <p:ph type="sldImg"/>
-          </p:nvPr>
-        </p:nvSpPr>
-        <p:spPr/>
-      </p:sp>
-      <p:sp>
-        <p:nvSpPr>
-          <p:cNvPr id="3" name="Notes Placeholder 2"/>
-          <p:cNvSpPr>
-            <a:spLocks noGrp="1"/>
-          </p:cNvSpPr>
-          <p:nvPr>
-            <p:ph type="body" idx="1"/>
-          </p:nvPr>
-        </p:nvSpPr>
-        <p:spPr/>
-        <p:txBody>
-          <a:bodyPr/>
-          <a:lstStyle/>
-          <a:p>
-            <a:r>
-              <a:rPr lang="en-US" dirty="0"/>
-              <a:t>Critério de sucesso do MVP: a fatia vertical completa rodando localmente. Lembretes e gamificação são o diferencial da P3. Cada história só conta como pronta se passar nos três critérios da definição de pronto.</a:t>
-            </a:r>
-            <a:endParaRPr lang="en-US" dirty="0"/>
-          </a:p>
-        </p:txBody>
-      </p:sp>
-      <p:sp>
-        <p:nvSpPr>
-          <p:cNvPr id="4" name="Slide Number Placeholder 3"/>
-          <p:cNvSpPr>
-            <a:spLocks noGrp="1"/>
-          </p:cNvSpPr>
-          <p:nvPr>
-            <p:ph type="sldNum" sz="quarter" idx="10"/>
-          </p:nvPr>
-        </p:nvSpPr>
-        <p:spPr/>
-        <p:txBody>
-          <a:bodyPr/>
-          <a:lstStyle/>
-          <a:p>
-            <a:fld id="{F7021451-1387-4CA6-816F-3879F97B5CBC}" type="slidenum">
-              <a:rPr lang="en-US"/>
-              <a:t>17</a:t>
             </a:fld>
             <a:endParaRPr lang="en-US"/>
           </a:p>
@@ -2323,6 +1967,10 @@
             <a:prstDash val="solid"/>
           </a:ln>
         </p:spPr>
+        <p:txBody>
+          <a:bodyPr/>
+          <a:p/>
+        </p:txBody>
       </p:sp>
       <p:sp>
         <p:nvSpPr>
@@ -2591,6 +2239,10 @@
             </a:outerShdw>
           </a:effectLst>
         </p:spPr>
+        <p:txBody>
+          <a:bodyPr/>
+          <a:p/>
+        </p:txBody>
       </p:sp>
       <p:sp>
         <p:nvSpPr>
@@ -2696,6 +2348,10 @@
             <a:prstDash val="solid"/>
           </a:ln>
         </p:spPr>
+        <p:txBody>
+          <a:bodyPr/>
+          <a:p/>
+        </p:txBody>
       </p:sp>
       <p:pic>
         <p:nvPicPr>
@@ -2786,6 +2442,10 @@
             <a:prstDash val="solid"/>
           </a:ln>
         </p:spPr>
+        <p:txBody>
+          <a:bodyPr/>
+          <a:p/>
+        </p:txBody>
       </p:sp>
       <p:sp>
         <p:nvSpPr>
@@ -2813,6 +2473,10 @@
             <a:prstDash val="solid"/>
           </a:ln>
         </p:spPr>
+        <p:txBody>
+          <a:bodyPr/>
+          <a:p/>
+        </p:txBody>
       </p:sp>
       <p:sp>
         <p:nvSpPr>
@@ -2925,7 +2589,7 @@
                 <a:ea typeface="Calibri" pitchFamily="34" charset="-122"/>
                 <a:cs typeface="Calibri" pitchFamily="34" charset="-120"/>
               </a:rPr>
-              <a:t>em 3 dias · peso 40%</a:t>
+              <a:t>em 3 dias</a:t>
             </a:r>
             <a:endParaRPr lang="en-US" sz="1050" dirty="0"/>
           </a:p>
@@ -2957,6 +2621,10 @@
             <a:prstDash val="solid"/>
           </a:ln>
         </p:spPr>
+        <p:txBody>
+          <a:bodyPr/>
+          <a:p/>
+        </p:txBody>
       </p:sp>
       <p:sp>
         <p:nvSpPr>
@@ -2984,6 +2652,10 @@
             <a:prstDash val="solid"/>
           </a:ln>
         </p:spPr>
+        <p:txBody>
+          <a:bodyPr/>
+          <a:p/>
+        </p:txBody>
       </p:sp>
       <p:sp>
         <p:nvSpPr>
@@ -3128,6 +2800,10 @@
             <a:prstDash val="solid"/>
           </a:ln>
         </p:spPr>
+        <p:txBody>
+          <a:bodyPr/>
+          <a:p/>
+        </p:txBody>
       </p:sp>
       <p:sp>
         <p:nvSpPr>
@@ -3155,6 +2831,10 @@
             <a:prstDash val="solid"/>
           </a:ln>
         </p:spPr>
+        <p:txBody>
+          <a:bodyPr/>
+          <a:p/>
+        </p:txBody>
       </p:sp>
       <p:sp>
         <p:nvSpPr>
@@ -3299,6 +2979,10 @@
             <a:prstDash val="solid"/>
           </a:ln>
         </p:spPr>
+        <p:txBody>
+          <a:bodyPr/>
+          <a:p/>
+        </p:txBody>
       </p:sp>
       <p:sp>
         <p:nvSpPr>
@@ -3326,6 +3010,10 @@
             <a:prstDash val="solid"/>
           </a:ln>
         </p:spPr>
+        <p:txBody>
+          <a:bodyPr/>
+          <a:p/>
+        </p:txBody>
       </p:sp>
       <p:sp>
         <p:nvSpPr>
@@ -3500,6 +3188,10 @@
             <a:prstDash val="solid"/>
           </a:ln>
         </p:spPr>
+        <p:txBody>
+          <a:bodyPr/>
+          <a:p/>
+        </p:txBody>
       </p:sp>
       <p:sp>
         <p:nvSpPr>
@@ -3573,7 +3265,7 @@
                 <a:ea typeface="Calibri" pitchFamily="34" charset="-122"/>
                 <a:cs typeface="Calibri" pitchFamily="34" charset="-120"/>
               </a:rPr>
-              <a:t>Requisitos não funcionais com critério verificável</a:t>
+              <a:t>Dois requisitos, e só os que dão para testar antes da apresentação</a:t>
             </a:r>
             <a:endParaRPr lang="en-US" sz="3200" dirty="0"/>
           </a:p>
@@ -3620,53 +3312,14 @@
       </p:sp>
       <p:sp>
         <p:nvSpPr>
-          <p:cNvPr id="6" name="Text 4"/>
-          <p:cNvSpPr txBox="1"/>
-          <p:nvPr/>
-        </p:nvSpPr>
-        <p:spPr>
-          <a:xfrm>
-            <a:off x="10271455" y="6473952"/>
-            <a:ext cx="1371600" cy="228600"/>
-          </a:xfrm>
-          <a:prstGeom prst="rect">
-            <a:avLst/>
-          </a:prstGeom>
-          <a:noFill/>
-          <a:ln/>
-        </p:spPr>
-        <p:txBody>
-          <a:bodyPr wrap="square" lIns="0" tIns="0" rIns="0" bIns="0" rtlCol="0" anchor="t"/>
-          <a:lstStyle/>
-          <a:p>
-            <a:pPr algn="r" indent="0" marL="0">
-              <a:buNone/>
-            </a:pPr>
-            <a:r>
-              <a:rPr lang="en-US" sz="900" dirty="0">
-                <a:solidFill>
-                  <a:srgbClr val="7B8C82"/>
-                </a:solidFill>
-                <a:latin typeface="Calibri" pitchFamily="34" charset="0"/>
-                <a:ea typeface="Calibri" pitchFamily="34" charset="-122"/>
-                <a:cs typeface="Calibri" pitchFamily="34" charset="-120"/>
-              </a:rPr>
-              <a:t>10 / 17</a:t>
-            </a:r>
-            <a:endParaRPr lang="en-US" sz="900" dirty="0"/>
-          </a:p>
-        </p:txBody>
-      </p:sp>
-      <p:sp>
-        <p:nvSpPr>
           <p:cNvPr id="7" name="Shape 5"/>
           <p:cNvSpPr/>
           <p:nvPr/>
         </p:nvSpPr>
         <p:spPr>
           <a:xfrm>
-            <a:off x="548640" y="1600200"/>
-            <a:ext cx="2567864" cy="4572000"/>
+            <a:off x="1522476" y="1600200"/>
+            <a:ext cx="4206240" cy="4572000"/>
           </a:xfrm>
           <a:prstGeom prst="roundRect">
             <a:avLst>
@@ -3683,6 +3336,10 @@
             <a:prstDash val="solid"/>
           </a:ln>
         </p:spPr>
+        <p:txBody>
+          <a:bodyPr/>
+          <a:p/>
+        </p:txBody>
       </p:sp>
       <p:sp>
         <p:nvSpPr>
@@ -3692,7 +3349,7 @@
         </p:nvSpPr>
         <p:spPr>
           <a:xfrm>
-            <a:off x="822960" y="1874520"/>
+            <a:off x="1796795" y="1874519"/>
             <a:ext cx="640080" cy="640080"/>
           </a:xfrm>
           <a:prstGeom prst="ellipse">
@@ -3708,6 +3365,10 @@
             <a:prstDash val="solid"/>
           </a:ln>
         </p:spPr>
+        <p:txBody>
+          <a:bodyPr/>
+          <a:p/>
+        </p:txBody>
       </p:sp>
       <p:pic>
         <p:nvPicPr>
@@ -3725,7 +3386,7 @@
         </p:blipFill>
         <p:spPr>
           <a:xfrm>
-            <a:off x="1014984" y="2066544"/>
+            <a:off x="1988819" y="2066543"/>
             <a:ext cx="256032" cy="256032"/>
           </a:xfrm>
           <a:prstGeom prst="rect">
@@ -3741,7 +3402,7 @@
         </p:nvSpPr>
         <p:spPr>
           <a:xfrm>
-            <a:off x="1600200" y="1920240"/>
+            <a:off x="2574036" y="1920240"/>
             <a:ext cx="1379144" cy="256032"/>
           </a:xfrm>
           <a:prstGeom prst="rect">
@@ -3780,7 +3441,7 @@
         </p:nvSpPr>
         <p:spPr>
           <a:xfrm>
-            <a:off x="1600200" y="2167128"/>
+            <a:off x="2574036" y="2167128"/>
             <a:ext cx="1379144" cy="320040"/>
           </a:xfrm>
           <a:prstGeom prst="rect">
@@ -3819,8 +3480,8 @@
         </p:nvSpPr>
         <p:spPr>
           <a:xfrm>
-            <a:off x="822960" y="2788920"/>
-            <a:ext cx="2019224" cy="822960"/>
+            <a:off x="1796795" y="2788920"/>
+            <a:ext cx="3657599" cy="822960"/>
           </a:xfrm>
           <a:prstGeom prst="rect">
             <a:avLst/>
@@ -3858,8 +3519,8 @@
         </p:nvSpPr>
         <p:spPr>
           <a:xfrm>
-            <a:off x="822960" y="3657600"/>
-            <a:ext cx="2019224" cy="1554480"/>
+            <a:off x="1796795" y="3657600"/>
+            <a:ext cx="3657599" cy="1554480"/>
           </a:xfrm>
           <a:prstGeom prst="rect">
             <a:avLst/>
@@ -3883,7 +3544,7 @@
                 <a:ea typeface="Calibri" pitchFamily="34" charset="-122"/>
                 <a:cs typeface="Calibri" pitchFamily="34" charset="-120"/>
               </a:rPr>
-              <a:t>Operável só com toque de 360 a 2560 px de largura, sem depender de hover, instalável como PWA.</a:t>
+              <a:t>Interface operável só com toque, de 360 a 2560 px de largura, sem depender de hover.</a:t>
             </a:r>
             <a:endParaRPr lang="en-US" sz="1250" dirty="0"/>
           </a:p>
@@ -3897,8 +3558,8 @@
         </p:nvSpPr>
         <p:spPr>
           <a:xfrm>
-            <a:off x="731520" y="5257800"/>
-            <a:ext cx="2202104" cy="777240"/>
+            <a:off x="1705356" y="5257800"/>
+            <a:ext cx="3840479" cy="777240"/>
           </a:xfrm>
           <a:prstGeom prst="roundRect">
             <a:avLst>
@@ -3915,6 +3576,10 @@
             <a:prstDash val="solid"/>
           </a:ln>
         </p:spPr>
+        <p:txBody>
+          <a:bodyPr/>
+          <a:p/>
+        </p:txBody>
       </p:sp>
       <p:sp>
         <p:nvSpPr>
@@ -3924,8 +3589,8 @@
         </p:nvSpPr>
         <p:spPr>
           <a:xfrm>
-            <a:off x="868680" y="5330952"/>
-            <a:ext cx="1927784" cy="658368"/>
+            <a:off x="1842515" y="5330952"/>
+            <a:ext cx="3566159" cy="658368"/>
           </a:xfrm>
           <a:prstGeom prst="rect">
             <a:avLst/>
@@ -3966,7 +3631,7 @@
                 <a:ea typeface="Calibri" pitchFamily="34" charset="-122"/>
                 <a:cs typeface="Calibri" pitchFamily="34" charset="-120"/>
               </a:rPr>
-              <a:t>Teste E2E no Playwright com tela de 360 px.</a:t>
+              <a:t>Playwright: tela de 360 px operável só por toque.</a:t>
             </a:r>
             <a:endParaRPr lang="en-US" sz="1100" dirty="0"/>
           </a:p>
@@ -3980,8 +3645,8 @@
         </p:nvSpPr>
         <p:spPr>
           <a:xfrm>
-            <a:off x="3390824" y="1600200"/>
-            <a:ext cx="2567864" cy="4572000"/>
+            <a:off x="6460236" y="1600200"/>
+            <a:ext cx="4206240" cy="4572000"/>
           </a:xfrm>
           <a:prstGeom prst="roundRect">
             <a:avLst>
@@ -3998,16 +3663,44 @@
             <a:prstDash val="solid"/>
           </a:ln>
         </p:spPr>
-      </p:sp>
-      <p:sp>
-        <p:nvSpPr>
-          <p:cNvPr id="17" name="Shape 14"/>
+        <p:txBody>
+          <a:bodyPr/>
+          <a:p/>
+        </p:txBody>
+      </p:sp>
+      <p:pic>
+        <p:nvPicPr>
+          <p:cNvPr id="18" name="Image 1" descr="preencoded.png">    </p:cNvPr>
+          <p:cNvPicPr>
+            <a:picLocks noChangeAspect="1"/>
+          </p:cNvPicPr>
+          <p:nvPr/>
+        </p:nvPicPr>
+        <p:blipFill>
+          <a:blip r:embed="rId2"/>
+          <a:stretch>
+            <a:fillRect/>
+          </a:stretch>
+        </p:blipFill>
+        <p:spPr>
+          <a:xfrm>
+            <a:off x="6924980" y="2066543"/>
+            <a:ext cx="256032" cy="256032"/>
+          </a:xfrm>
+          <a:prstGeom prst="rect">
+            <a:avLst/>
+          </a:prstGeom>
+        </p:spPr>
+      </p:pic>
+      <p:sp>
+        <p:nvSpPr>
+          <p:cNvPr id="26" name="Shape 22"/>
           <p:cNvSpPr/>
           <p:nvPr/>
         </p:nvSpPr>
         <p:spPr>
           <a:xfrm>
-            <a:off x="3665144" y="1874520"/>
+            <a:off x="6731355" y="1874519"/>
             <a:ext cx="640080" cy="640080"/>
           </a:xfrm>
           <a:prstGeom prst="ellipse">
@@ -4023,40 +3716,20 @@
             <a:prstDash val="solid"/>
           </a:ln>
         </p:spPr>
-      </p:sp>
-      <p:pic>
-        <p:nvPicPr>
-          <p:cNvPr id="18" name="Image 1" descr="preencoded.png">    </p:cNvPr>
-          <p:cNvPicPr>
-            <a:picLocks noChangeAspect="1"/>
-          </p:cNvPicPr>
-          <p:nvPr/>
-        </p:nvPicPr>
-        <p:blipFill>
-          <a:blip r:embed="rId2"/>
-          <a:stretch>
-            <a:fillRect/>
-          </a:stretch>
-        </p:blipFill>
-        <p:spPr>
-          <a:xfrm>
-            <a:off x="3857168" y="2066544"/>
-            <a:ext cx="256032" cy="256032"/>
-          </a:xfrm>
-          <a:prstGeom prst="rect">
-            <a:avLst/>
-          </a:prstGeom>
-        </p:spPr>
-      </p:pic>
-      <p:sp>
-        <p:nvSpPr>
-          <p:cNvPr id="19" name="Text 15"/>
-          <p:cNvSpPr txBox="1"/>
-          <p:nvPr/>
-        </p:nvSpPr>
-        <p:spPr>
-          <a:xfrm>
-            <a:off x="4442384" y="1920240"/>
+        <p:txBody>
+          <a:bodyPr/>
+          <a:p/>
+        </p:txBody>
+      </p:sp>
+      <p:sp>
+        <p:nvSpPr>
+          <p:cNvPr id="28" name="Text 23"/>
+          <p:cNvSpPr txBox="1"/>
+          <p:nvPr/>
+        </p:nvSpPr>
+        <p:spPr>
+          <a:xfrm>
+            <a:off x="7508596" y="1920240"/>
             <a:ext cx="1379144" cy="256032"/>
           </a:xfrm>
           <a:prstGeom prst="rect">
@@ -4089,13 +3762,13 @@
       </p:sp>
       <p:sp>
         <p:nvSpPr>
-          <p:cNvPr id="20" name="Text 16"/>
-          <p:cNvSpPr txBox="1"/>
-          <p:nvPr/>
-        </p:nvSpPr>
-        <p:spPr>
-          <a:xfrm>
-            <a:off x="4442384" y="2167128"/>
+          <p:cNvPr id="29" name="Text 24"/>
+          <p:cNvSpPr txBox="1"/>
+          <p:nvPr/>
+        </p:nvSpPr>
+        <p:spPr>
+          <a:xfrm>
+            <a:off x="7508596" y="2167128"/>
             <a:ext cx="1379144" cy="320040"/>
           </a:xfrm>
           <a:prstGeom prst="rect">
@@ -4120,7 +3793,7 @@
                 <a:ea typeface="Calibri" pitchFamily="34" charset="-122"/>
                 <a:cs typeface="Calibri" pitchFamily="34" charset="-120"/>
               </a:rPr>
-              <a:t>Disponibilidade</a:t>
+              <a:t>Segurança</a:t>
             </a:r>
             <a:endParaRPr lang="en-US" sz="1500" dirty="0"/>
           </a:p>
@@ -4128,14 +3801,14 @@
       </p:sp>
       <p:sp>
         <p:nvSpPr>
-          <p:cNvPr id="21" name="Text 17"/>
-          <p:cNvSpPr txBox="1"/>
-          <p:nvPr/>
-        </p:nvSpPr>
-        <p:spPr>
-          <a:xfrm>
-            <a:off x="3665144" y="2788920"/>
-            <a:ext cx="2019224" cy="822960"/>
+          <p:cNvPr id="30" name="Text 25"/>
+          <p:cNvSpPr txBox="1"/>
+          <p:nvPr/>
+        </p:nvSpPr>
+        <p:spPr>
+          <a:xfrm>
+            <a:off x="6731355" y="2788920"/>
+            <a:ext cx="3657599" cy="822960"/>
           </a:xfrm>
           <a:prstGeom prst="rect">
             <a:avLst/>
@@ -4159,7 +3832,7 @@
                 <a:ea typeface="Calibri" pitchFamily="34" charset="-122"/>
                 <a:cs typeface="Calibri" pitchFamily="34" charset="-120"/>
               </a:rPr>
-              <a:t>99,5%</a:t>
+              <a:t>0 vazamentos</a:t>
             </a:r>
             <a:endParaRPr lang="en-US" sz="3800" dirty="0"/>
           </a:p>
@@ -4167,14 +3840,14 @@
       </p:sp>
       <p:sp>
         <p:nvSpPr>
-          <p:cNvPr id="22" name="Text 18"/>
-          <p:cNvSpPr txBox="1"/>
-          <p:nvPr/>
-        </p:nvSpPr>
-        <p:spPr>
-          <a:xfrm>
-            <a:off x="3665144" y="3657600"/>
-            <a:ext cx="2019224" cy="1554480"/>
+          <p:cNvPr id="31" name="Text 26"/>
+          <p:cNvSpPr txBox="1"/>
+          <p:nvPr/>
+        </p:nvSpPr>
+        <p:spPr>
+          <a:xfrm>
+            <a:off x="6731355" y="3657600"/>
+            <a:ext cx="3657599" cy="1554480"/>
           </a:xfrm>
           <a:prstGeom prst="rect">
             <a:avLst/>
@@ -4198,7 +3871,7 @@
                 <a:ea typeface="Calibri" pitchFamily="34" charset="-122"/>
                 <a:cs typeface="Calibri" pitchFamily="34" charset="-120"/>
               </a:rPr>
-              <a:t>Meta mensal em produção: restart automático, health checks, backup com restauração testada e monitor no Uptime Kuma.</a:t>
+              <a:t>Os dados de um aluno nunca aparecem para outro: autorização por dono em toda rota e sessão em cookie httpOnly.</a:t>
             </a:r>
             <a:endParaRPr lang="en-US" sz="1250" dirty="0"/>
           </a:p>
@@ -4206,14 +3879,14 @@
       </p:sp>
       <p:sp>
         <p:nvSpPr>
-          <p:cNvPr id="23" name="Shape 19"/>
+          <p:cNvPr id="32" name="Shape 27"/>
           <p:cNvSpPr/>
           <p:nvPr/>
         </p:nvSpPr>
         <p:spPr>
           <a:xfrm>
-            <a:off x="3573704" y="5257800"/>
-            <a:ext cx="2202104" cy="777240"/>
+            <a:off x="6639916" y="5257800"/>
+            <a:ext cx="3840479" cy="777240"/>
           </a:xfrm>
           <a:prstGeom prst="roundRect">
             <a:avLst>
@@ -4230,17 +3903,21 @@
             <a:prstDash val="solid"/>
           </a:ln>
         </p:spPr>
-      </p:sp>
-      <p:sp>
-        <p:nvSpPr>
-          <p:cNvPr id="24" name="Text 20"/>
-          <p:cNvSpPr txBox="1"/>
-          <p:nvPr/>
-        </p:nvSpPr>
-        <p:spPr>
-          <a:xfrm>
-            <a:off x="3710864" y="5330952"/>
-            <a:ext cx="1927784" cy="658368"/>
+        <p:txBody>
+          <a:bodyPr/>
+          <a:p/>
+        </p:txBody>
+      </p:sp>
+      <p:sp>
+        <p:nvSpPr>
+          <p:cNvPr id="33" name="Text 28"/>
+          <p:cNvSpPr txBox="1"/>
+          <p:nvPr/>
+        </p:nvSpPr>
+        <p:spPr>
+          <a:xfrm>
+            <a:off x="6777075" y="5330952"/>
+            <a:ext cx="3566159" cy="658368"/>
           </a:xfrm>
           <a:prstGeom prst="rect">
             <a:avLst/>
@@ -4281,7 +3958,7 @@
                 <a:ea typeface="Calibri" pitchFamily="34" charset="-122"/>
                 <a:cs typeface="Calibri" pitchFamily="34" charset="-120"/>
               </a:rPr>
-              <a:t>Relatório mensal do Uptime Kuma.</a:t>
+              <a:t>Teste de API: recurso de outra conta responde 404.</a:t>
             </a:r>
             <a:endParaRPr lang="en-US" sz="1100" dirty="0"/>
           </a:p>
@@ -4289,631 +3966,40 @@
       </p:sp>
       <p:sp>
         <p:nvSpPr>
-          <p:cNvPr id="25" name="Shape 21"/>
-          <p:cNvSpPr/>
-          <p:nvPr/>
-        </p:nvSpPr>
-        <p:spPr>
-          <a:xfrm>
-            <a:off x="6233008" y="1600200"/>
-            <a:ext cx="2567864" cy="4572000"/>
-          </a:xfrm>
-          <a:prstGeom prst="roundRect">
-            <a:avLst>
-              <a:gd name="adj" fmla="val 4273"/>
-            </a:avLst>
-          </a:prstGeom>
-          <a:solidFill>
-            <a:srgbClr val="FFFFFF"/>
-          </a:solidFill>
-          <a:ln w="9525">
-            <a:solidFill>
-              <a:srgbClr val="C9D8CE"/>
-            </a:solidFill>
-            <a:prstDash val="solid"/>
-          </a:ln>
-        </p:spPr>
-      </p:sp>
-      <p:sp>
-        <p:nvSpPr>
-          <p:cNvPr id="26" name="Shape 22"/>
-          <p:cNvSpPr/>
-          <p:nvPr/>
-        </p:nvSpPr>
-        <p:spPr>
-          <a:xfrm>
-            <a:off x="6507328" y="1874520"/>
-            <a:ext cx="640080" cy="640080"/>
-          </a:xfrm>
-          <a:prstGeom prst="ellipse">
-            <a:avLst/>
-          </a:prstGeom>
-          <a:solidFill>
-            <a:srgbClr val="E3EEE7"/>
-          </a:solidFill>
-          <a:ln w="12700">
-            <a:solidFill>
-              <a:srgbClr val="E3EEE7"/>
-            </a:solidFill>
-            <a:prstDash val="solid"/>
-          </a:ln>
-        </p:spPr>
-      </p:sp>
-      <p:pic>
-        <p:nvPicPr>
-          <p:cNvPr id="27" name="Image 2" descr="preencoded.png">    </p:cNvPr>
-          <p:cNvPicPr>
-            <a:picLocks noChangeAspect="1"/>
-          </p:cNvPicPr>
-          <p:nvPr/>
-        </p:nvPicPr>
-        <p:blipFill>
-          <a:blip r:embed="rId3"/>
-          <a:stretch>
-            <a:fillRect/>
-          </a:stretch>
-        </p:blipFill>
-        <p:spPr>
-          <a:xfrm>
-            <a:off x="6699352" y="2066544"/>
-            <a:ext cx="256032" cy="256032"/>
-          </a:xfrm>
-          <a:prstGeom prst="rect">
-            <a:avLst/>
-          </a:prstGeom>
-        </p:spPr>
-      </p:pic>
-      <p:sp>
-        <p:nvSpPr>
-          <p:cNvPr id="28" name="Text 23"/>
-          <p:cNvSpPr txBox="1"/>
-          <p:nvPr/>
-        </p:nvSpPr>
-        <p:spPr>
-          <a:xfrm>
-            <a:off x="7284568" y="1920240"/>
-            <a:ext cx="1379144" cy="256032"/>
-          </a:xfrm>
-          <a:prstGeom prst="rect">
-            <a:avLst/>
-          </a:prstGeom>
-          <a:noFill/>
-          <a:ln/>
-        </p:spPr>
-        <p:txBody>
-          <a:bodyPr wrap="square" lIns="0" tIns="0" rIns="0" bIns="0" rtlCol="0" anchor="t"/>
-          <a:lstStyle/>
-          <a:p>
-            <a:pPr indent="0" marL="0">
-              <a:buNone/>
-            </a:pPr>
-            <a:r>
-              <a:rPr lang="en-US" sz="1100" b="1" dirty="0">
-                <a:solidFill>
-                  <a:srgbClr val="2F6B4A"/>
-                </a:solidFill>
-                <a:latin typeface="Calibri" pitchFamily="34" charset="0"/>
-                <a:ea typeface="Calibri" pitchFamily="34" charset="-122"/>
-                <a:cs typeface="Calibri" pitchFamily="34" charset="-120"/>
-              </a:rPr>
-              <a:t>RNF03</a:t>
-            </a:r>
-            <a:endParaRPr lang="en-US" sz="1100" dirty="0"/>
-          </a:p>
-        </p:txBody>
-      </p:sp>
-      <p:sp>
-        <p:nvSpPr>
-          <p:cNvPr id="29" name="Text 24"/>
-          <p:cNvSpPr txBox="1"/>
-          <p:nvPr/>
-        </p:nvSpPr>
-        <p:spPr>
-          <a:xfrm>
-            <a:off x="7284568" y="2167128"/>
-            <a:ext cx="1379144" cy="320040"/>
-          </a:xfrm>
-          <a:prstGeom prst="rect">
-            <a:avLst/>
-          </a:prstGeom>
-          <a:noFill/>
-          <a:ln/>
-        </p:spPr>
-        <p:txBody>
-          <a:bodyPr wrap="square" lIns="0" tIns="0" rIns="0" bIns="0" rtlCol="0" anchor="t"/>
-          <a:lstStyle/>
-          <a:p>
-            <a:pPr indent="0" marL="0">
-              <a:buNone/>
-            </a:pPr>
-            <a:r>
-              <a:rPr lang="en-US" sz="1500" b="1" dirty="0">
-                <a:solidFill>
-                  <a:srgbClr val="0F1E18"/>
-                </a:solidFill>
-                <a:latin typeface="Calibri" pitchFamily="34" charset="0"/>
-                <a:ea typeface="Calibri" pitchFamily="34" charset="-122"/>
-                <a:cs typeface="Calibri" pitchFamily="34" charset="-120"/>
-              </a:rPr>
-              <a:t>Segurança</a:t>
-            </a:r>
-            <a:endParaRPr lang="en-US" sz="1500" dirty="0"/>
-          </a:p>
-        </p:txBody>
-      </p:sp>
-      <p:sp>
-        <p:nvSpPr>
-          <p:cNvPr id="30" name="Text 25"/>
-          <p:cNvSpPr txBox="1"/>
-          <p:nvPr/>
-        </p:nvSpPr>
-        <p:spPr>
-          <a:xfrm>
-            <a:off x="6507328" y="2788920"/>
-            <a:ext cx="2019224" cy="822960"/>
-          </a:xfrm>
-          <a:prstGeom prst="rect">
-            <a:avLst/>
-          </a:prstGeom>
-          <a:noFill/>
-          <a:ln/>
-        </p:spPr>
-        <p:txBody>
-          <a:bodyPr wrap="square" lIns="0" tIns="0" rIns="0" bIns="0" rtlCol="0" anchor="t"/>
-          <a:lstStyle/>
-          <a:p>
-            <a:pPr indent="0" marL="0">
-              <a:buNone/>
-            </a:pPr>
-            <a:r>
-              <a:rPr lang="en-US" sz="3800" b="1" dirty="0">
-                <a:solidFill>
-                  <a:srgbClr val="0F1E18"/>
-                </a:solidFill>
-                <a:latin typeface="Calibri" pitchFamily="34" charset="0"/>
-                <a:ea typeface="Calibri" pitchFamily="34" charset="-122"/>
-                <a:cs typeface="Calibri" pitchFamily="34" charset="-120"/>
-              </a:rPr>
-              <a:t>0 tokens</a:t>
-            </a:r>
-            <a:endParaRPr lang="en-US" sz="3800" dirty="0"/>
-          </a:p>
-        </p:txBody>
-      </p:sp>
-      <p:sp>
-        <p:nvSpPr>
-          <p:cNvPr id="31" name="Text 26"/>
-          <p:cNvSpPr txBox="1"/>
-          <p:nvPr/>
-        </p:nvSpPr>
-        <p:spPr>
-          <a:xfrm>
-            <a:off x="6507328" y="3657600"/>
-            <a:ext cx="2019224" cy="1554480"/>
-          </a:xfrm>
-          <a:prstGeom prst="rect">
-            <a:avLst/>
-          </a:prstGeom>
-          <a:noFill/>
-          <a:ln/>
-        </p:spPr>
-        <p:txBody>
-          <a:bodyPr wrap="square" lIns="0" tIns="0" rIns="0" bIns="0" rtlCol="0" anchor="t"/>
-          <a:lstStyle/>
-          <a:p>
-            <a:pPr indent="0" marL="0">
-              <a:buNone/>
-            </a:pPr>
-            <a:r>
-              <a:rPr lang="en-US" sz="1250" dirty="0">
-                <a:solidFill>
-                  <a:srgbClr val="3A4A42"/>
-                </a:solidFill>
-                <a:latin typeface="Calibri" pitchFamily="34" charset="0"/>
-                <a:ea typeface="Calibri" pitchFamily="34" charset="-122"/>
-                <a:cs typeface="Calibri" pitchFamily="34" charset="-120"/>
-              </a:rPr>
-              <a:t>no localStorage. Sessão em cookie httpOnly e SameSite=Lax, refresh rotativo, rate limit no login e autorização por dono em toda rota.</a:t>
-            </a:r>
-            <a:endParaRPr lang="en-US" sz="1250" dirty="0"/>
-          </a:p>
-        </p:txBody>
-      </p:sp>
-      <p:sp>
-        <p:nvSpPr>
-          <p:cNvPr id="32" name="Shape 27"/>
-          <p:cNvSpPr/>
-          <p:nvPr/>
-        </p:nvSpPr>
-        <p:spPr>
-          <a:xfrm>
-            <a:off x="6415888" y="5257800"/>
-            <a:ext cx="2202104" cy="777240"/>
-          </a:xfrm>
-          <a:prstGeom prst="roundRect">
-            <a:avLst>
-              <a:gd name="adj" fmla="val 9412"/>
-            </a:avLst>
-          </a:prstGeom>
-          <a:solidFill>
-            <a:srgbClr val="E3EEE7"/>
-          </a:solidFill>
-          <a:ln w="12700">
-            <a:solidFill>
-              <a:srgbClr val="E3EEE7"/>
-            </a:solidFill>
-            <a:prstDash val="solid"/>
-          </a:ln>
-        </p:spPr>
-      </p:sp>
-      <p:sp>
-        <p:nvSpPr>
-          <p:cNvPr id="33" name="Text 28"/>
-          <p:cNvSpPr txBox="1"/>
-          <p:nvPr/>
-        </p:nvSpPr>
-        <p:spPr>
-          <a:xfrm>
-            <a:off x="6553048" y="5330952"/>
-            <a:ext cx="1927784" cy="658368"/>
-          </a:xfrm>
-          <a:prstGeom prst="rect">
-            <a:avLst/>
-          </a:prstGeom>
-          <a:noFill/>
-          <a:ln/>
-        </p:spPr>
-        <p:txBody>
-          <a:bodyPr wrap="square" lIns="0" tIns="0" rIns="0" bIns="0" rtlCol="0" anchor="t"/>
-          <a:lstStyle/>
-          <a:p>
-            <a:pPr indent="0" marL="0">
-              <a:buNone/>
-            </a:pPr>
-            <a:r>
-              <a:rPr lang="en-US" sz="1100" b="1" dirty="0">
-                <a:solidFill>
-                  <a:srgbClr val="2F6B4A"/>
-                </a:solidFill>
-                <a:latin typeface="Calibri" pitchFamily="34" charset="0"/>
-                <a:ea typeface="Calibri" pitchFamily="34" charset="-122"/>
-                <a:cs typeface="Calibri" pitchFamily="34" charset="-120"/>
-              </a:rPr>
-              <a:t>Como verificar  </a:t>
-            </a:r>
-            <a:endParaRPr lang="en-US" sz="1100" dirty="0"/>
-          </a:p>
-          <a:p>
-            <a:pPr indent="0" marL="0">
-              <a:buNone/>
-            </a:pPr>
-            <a:r>
-              <a:rPr lang="en-US" sz="1100" dirty="0">
-                <a:solidFill>
-                  <a:srgbClr val="0F1E18"/>
-                </a:solidFill>
-                <a:latin typeface="Calibri" pitchFamily="34" charset="0"/>
-                <a:ea typeface="Calibri" pitchFamily="34" charset="-122"/>
-                <a:cs typeface="Calibri" pitchFamily="34" charset="-120"/>
-              </a:rPr>
-              <a:t>Teste de API: recurso de outra conta responde 404.</a:t>
-            </a:r>
-            <a:endParaRPr lang="en-US" sz="1100" dirty="0"/>
-          </a:p>
-        </p:txBody>
-      </p:sp>
-      <p:sp>
-        <p:nvSpPr>
-          <p:cNvPr id="34" name="Shape 29"/>
-          <p:cNvSpPr/>
-          <p:nvPr/>
-        </p:nvSpPr>
-        <p:spPr>
-          <a:xfrm>
-            <a:off x="9075191" y="1600200"/>
-            <a:ext cx="2567864" cy="4572000"/>
-          </a:xfrm>
-          <a:prstGeom prst="roundRect">
-            <a:avLst>
-              <a:gd name="adj" fmla="val 4273"/>
-            </a:avLst>
-          </a:prstGeom>
-          <a:solidFill>
-            <a:srgbClr val="FFFFFF"/>
-          </a:solidFill>
-          <a:ln w="9525">
-            <a:solidFill>
-              <a:srgbClr val="C9D8CE"/>
-            </a:solidFill>
-            <a:prstDash val="solid"/>
-          </a:ln>
-        </p:spPr>
-      </p:sp>
-      <p:sp>
-        <p:nvSpPr>
-          <p:cNvPr id="35" name="Shape 30"/>
-          <p:cNvSpPr/>
-          <p:nvPr/>
-        </p:nvSpPr>
-        <p:spPr>
-          <a:xfrm>
-            <a:off x="9349511" y="1874520"/>
-            <a:ext cx="640080" cy="640080"/>
-          </a:xfrm>
-          <a:prstGeom prst="ellipse">
-            <a:avLst/>
-          </a:prstGeom>
-          <a:solidFill>
-            <a:srgbClr val="E3EEE7"/>
-          </a:solidFill>
-          <a:ln w="12700">
-            <a:solidFill>
-              <a:srgbClr val="E3EEE7"/>
-            </a:solidFill>
-            <a:prstDash val="solid"/>
-          </a:ln>
-        </p:spPr>
-      </p:sp>
-      <p:pic>
-        <p:nvPicPr>
-          <p:cNvPr id="36" name="Image 3" descr="preencoded.png">    </p:cNvPr>
-          <p:cNvPicPr>
-            <a:picLocks noChangeAspect="1"/>
-          </p:cNvPicPr>
-          <p:nvPr/>
-        </p:nvPicPr>
-        <p:blipFill>
-          <a:blip r:embed="rId4"/>
-          <a:stretch>
-            <a:fillRect/>
-          </a:stretch>
-        </p:blipFill>
-        <p:spPr>
-          <a:xfrm>
-            <a:off x="9541535" y="2066544"/>
-            <a:ext cx="256032" cy="256032"/>
-          </a:xfrm>
-          <a:prstGeom prst="rect">
-            <a:avLst/>
-          </a:prstGeom>
-        </p:spPr>
-      </p:pic>
-      <p:sp>
-        <p:nvSpPr>
-          <p:cNvPr id="37" name="Text 31"/>
-          <p:cNvSpPr txBox="1"/>
-          <p:nvPr/>
-        </p:nvSpPr>
-        <p:spPr>
-          <a:xfrm>
-            <a:off x="10126751" y="1920240"/>
-            <a:ext cx="1379144" cy="256032"/>
-          </a:xfrm>
-          <a:prstGeom prst="rect">
-            <a:avLst/>
-          </a:prstGeom>
-          <a:noFill/>
-          <a:ln/>
-        </p:spPr>
-        <p:txBody>
-          <a:bodyPr wrap="square" lIns="0" tIns="0" rIns="0" bIns="0" rtlCol="0" anchor="t"/>
-          <a:lstStyle/>
-          <a:p>
-            <a:pPr indent="0" marL="0">
-              <a:buNone/>
-            </a:pPr>
-            <a:r>
-              <a:rPr lang="en-US" sz="1100" b="1" dirty="0">
-                <a:solidFill>
-                  <a:srgbClr val="2F6B4A"/>
-                </a:solidFill>
-                <a:latin typeface="Calibri" pitchFamily="34" charset="0"/>
-                <a:ea typeface="Calibri" pitchFamily="34" charset="-122"/>
-                <a:cs typeface="Calibri" pitchFamily="34" charset="-120"/>
-              </a:rPr>
-              <a:t>RNF04</a:t>
-            </a:r>
-            <a:endParaRPr lang="en-US" sz="1100" dirty="0"/>
-          </a:p>
-        </p:txBody>
-      </p:sp>
-      <p:sp>
-        <p:nvSpPr>
-          <p:cNvPr id="38" name="Text 32"/>
-          <p:cNvSpPr txBox="1"/>
-          <p:nvPr/>
-        </p:nvSpPr>
-        <p:spPr>
-          <a:xfrm>
-            <a:off x="10126751" y="2167128"/>
-            <a:ext cx="1379144" cy="320040"/>
-          </a:xfrm>
-          <a:prstGeom prst="rect">
-            <a:avLst/>
-          </a:prstGeom>
-          <a:noFill/>
-          <a:ln/>
-        </p:spPr>
-        <p:txBody>
-          <a:bodyPr wrap="square" lIns="0" tIns="0" rIns="0" bIns="0" rtlCol="0" anchor="t"/>
-          <a:lstStyle/>
-          <a:p>
-            <a:pPr indent="0" marL="0">
-              <a:buNone/>
-            </a:pPr>
-            <a:r>
-              <a:rPr lang="en-US" sz="1500" b="1" dirty="0">
-                <a:solidFill>
-                  <a:srgbClr val="0F1E18"/>
-                </a:solidFill>
-                <a:latin typeface="Calibri" pitchFamily="34" charset="0"/>
-                <a:ea typeface="Calibri" pitchFamily="34" charset="-122"/>
-                <a:cs typeface="Calibri" pitchFamily="34" charset="-120"/>
-              </a:rPr>
-              <a:t>Idioma e fuso</a:t>
-            </a:r>
-            <a:endParaRPr lang="en-US" sz="1500" dirty="0"/>
-          </a:p>
-        </p:txBody>
-      </p:sp>
-      <p:sp>
-        <p:nvSpPr>
-          <p:cNvPr id="39" name="Text 33"/>
-          <p:cNvSpPr txBox="1"/>
-          <p:nvPr/>
-        </p:nvSpPr>
-        <p:spPr>
-          <a:xfrm>
-            <a:off x="9349511" y="2788920"/>
-            <a:ext cx="2019224" cy="822960"/>
-          </a:xfrm>
-          <a:prstGeom prst="rect">
-            <a:avLst/>
-          </a:prstGeom>
-          <a:noFill/>
-          <a:ln/>
-        </p:spPr>
-        <p:txBody>
-          <a:bodyPr wrap="square" lIns="0" tIns="0" rIns="0" bIns="0" rtlCol="0" anchor="t"/>
-          <a:lstStyle/>
-          <a:p>
-            <a:pPr indent="0" marL="0">
-              <a:buNone/>
-            </a:pPr>
-            <a:r>
-              <a:rPr lang="en-US" sz="3800" b="1" dirty="0">
-                <a:solidFill>
-                  <a:srgbClr val="0F1E18"/>
-                </a:solidFill>
-                <a:latin typeface="Calibri" pitchFamily="34" charset="0"/>
-                <a:ea typeface="Calibri" pitchFamily="34" charset="-122"/>
-                <a:cs typeface="Calibri" pitchFamily="34" charset="-120"/>
-              </a:rPr>
-              <a:t>2 idiomas</a:t>
-            </a:r>
-            <a:endParaRPr lang="en-US" sz="3800" dirty="0"/>
-          </a:p>
-        </p:txBody>
-      </p:sp>
-      <p:sp>
-        <p:nvSpPr>
-          <p:cNvPr id="40" name="Text 34"/>
-          <p:cNvSpPr txBox="1"/>
-          <p:nvPr/>
-        </p:nvSpPr>
-        <p:spPr>
-          <a:xfrm>
-            <a:off x="9349511" y="3657600"/>
-            <a:ext cx="2019224" cy="1554480"/>
-          </a:xfrm>
-          <a:prstGeom prst="rect">
-            <a:avLst/>
-          </a:prstGeom>
-          <a:noFill/>
-          <a:ln/>
-        </p:spPr>
-        <p:txBody>
-          <a:bodyPr wrap="square" lIns="0" tIns="0" rIns="0" bIns="0" rtlCol="0" anchor="t"/>
-          <a:lstStyle/>
-          <a:p>
-            <a:pPr indent="0" marL="0">
-              <a:buNone/>
-            </a:pPr>
-            <a:r>
-              <a:rPr lang="en-US" sz="1250" dirty="0">
-                <a:solidFill>
-                  <a:srgbClr val="3A4A42"/>
-                </a:solidFill>
-                <a:latin typeface="Calibri" pitchFamily="34" charset="0"/>
-                <a:ea typeface="Calibri" pitchFamily="34" charset="-122"/>
-                <a:cs typeface="Calibri" pitchFamily="34" charset="-120"/>
-              </a:rPr>
-              <a:t>pt-BR ativo e inglês pronto desde o V1. Nenhum texto fixo no código; idioma e fuso por usuário.</a:t>
-            </a:r>
-            <a:endParaRPr lang="en-US" sz="1250" dirty="0"/>
-          </a:p>
-        </p:txBody>
-      </p:sp>
-      <p:sp>
-        <p:nvSpPr>
-          <p:cNvPr id="41" name="Shape 35"/>
-          <p:cNvSpPr/>
-          <p:nvPr/>
-        </p:nvSpPr>
-        <p:spPr>
-          <a:xfrm>
-            <a:off x="9258071" y="5257800"/>
-            <a:ext cx="2202104" cy="777240"/>
-          </a:xfrm>
-          <a:prstGeom prst="roundRect">
-            <a:avLst>
-              <a:gd name="adj" fmla="val 9412"/>
-            </a:avLst>
-          </a:prstGeom>
-          <a:solidFill>
-            <a:srgbClr val="E3EEE7"/>
-          </a:solidFill>
-          <a:ln w="12700">
-            <a:solidFill>
-              <a:srgbClr val="E3EEE7"/>
-            </a:solidFill>
-            <a:prstDash val="solid"/>
-          </a:ln>
-        </p:spPr>
-      </p:sp>
-      <p:sp>
-        <p:nvSpPr>
-          <p:cNvPr id="42" name="Text 36"/>
-          <p:cNvSpPr txBox="1"/>
-          <p:nvPr/>
-        </p:nvSpPr>
-        <p:spPr>
-          <a:xfrm>
-            <a:off x="9395231" y="5330952"/>
-            <a:ext cx="1927784" cy="658368"/>
-          </a:xfrm>
-          <a:prstGeom prst="rect">
-            <a:avLst/>
-          </a:prstGeom>
-          <a:noFill/>
-          <a:ln/>
-        </p:spPr>
-        <p:txBody>
-          <a:bodyPr wrap="square" lIns="0" tIns="0" rIns="0" bIns="0" rtlCol="0" anchor="t"/>
-          <a:lstStyle/>
-          <a:p>
-            <a:pPr indent="0" marL="0">
-              <a:buNone/>
-            </a:pPr>
-            <a:r>
-              <a:rPr lang="en-US" sz="1100" b="1" dirty="0">
-                <a:solidFill>
-                  <a:srgbClr val="2F6B4A"/>
-                </a:solidFill>
-                <a:latin typeface="Calibri" pitchFamily="34" charset="0"/>
-                <a:ea typeface="Calibri" pitchFamily="34" charset="-122"/>
-                <a:cs typeface="Calibri" pitchFamily="34" charset="-120"/>
-              </a:rPr>
-              <a:t>Como verificar  </a:t>
-            </a:r>
-            <a:endParaRPr lang="en-US" sz="1100" dirty="0"/>
-          </a:p>
-          <a:p>
-            <a:pPr indent="0" marL="0">
-              <a:buNone/>
-            </a:pPr>
-            <a:r>
-              <a:rPr lang="en-US" sz="1100" dirty="0">
-                <a:solidFill>
-                  <a:srgbClr val="0F1E18"/>
-                </a:solidFill>
-                <a:latin typeface="Calibri" pitchFamily="34" charset="0"/>
-                <a:ea typeface="Calibri" pitchFamily="34" charset="-122"/>
-                <a:cs typeface="Calibri" pitchFamily="34" charset="-120"/>
-              </a:rPr>
-              <a:t>Nenhuma string de interface fora do dicionário.</a:t>
-            </a:r>
-            <a:endParaRPr lang="en-US" sz="1100" dirty="0"/>
+          <p:cNvPr id="6" name="Text 4"/>
+          <p:cNvSpPr txBox="1"/>
+          <p:nvPr/>
+        </p:nvSpPr>
+        <p:spPr>
+          <a:xfrm>
+            <a:off x="10268712" y="6473952"/>
+            <a:ext cx="1371600" cy="228600"/>
+          </a:xfrm>
+          <a:prstGeom prst="rect">
+            <a:avLst/>
+          </a:prstGeom>
+          <a:noFill/>
+          <a:ln/>
+        </p:spPr>
+        <p:txBody>
+          <a:bodyPr wrap="square" lIns="0" tIns="0" rIns="0" bIns="0" rtlCol="0" anchor="t"/>
+          <a:lstStyle/>
+          <a:p>
+            <a:pPr algn="r" indent="0" marL="0">
+              <a:buNone/>
+            </a:pPr>
+            <a:r>
+              <a:rPr lang="en-US" sz="900" dirty="0">
+                <a:solidFill>
+                  <a:srgbClr val="7B8C82"/>
+                </a:solidFill>
+                <a:latin typeface="Calibri" pitchFamily="34" charset="0"/>
+                <a:ea typeface="Calibri" pitchFamily="34" charset="-122"/>
+                <a:cs typeface="Calibri" pitchFamily="34" charset="-120"/>
+              </a:rPr>
+              <a:t>10 / 13</a:t>
+            </a:r>
+            <a:endParaRPr lang="en-US" sz="900" dirty="0"/>
           </a:p>
         </p:txBody>
       </p:sp>
@@ -4973,6 +4059,10 @@
             <a:prstDash val="solid"/>
           </a:ln>
         </p:spPr>
+        <p:txBody>
+          <a:bodyPr/>
+          <a:p/>
+        </p:txBody>
       </p:sp>
       <p:sp>
         <p:nvSpPr>
@@ -5124,7 +4214,7 @@
                 <a:ea typeface="Calibri" pitchFamily="34" charset="-122"/>
                 <a:cs typeface="Calibri" pitchFamily="34" charset="-120"/>
               </a:rPr>
-              <a:t>11 / 17</a:t>
+              <a:t>11 / 13</a:t>
             </a:r>
             <a:endParaRPr lang="en-US" sz="900" dirty="0"/>
           </a:p>
@@ -5154,6 +4244,10 @@
             <a:prstDash val="solid"/>
           </a:ln>
         </p:spPr>
+        <p:txBody>
+          <a:bodyPr/>
+          <a:p/>
+        </p:txBody>
       </p:sp>
       <p:pic>
         <p:nvPicPr>
@@ -5244,6 +4338,10 @@
             <a:prstDash val="solid"/>
           </a:ln>
         </p:spPr>
+        <p:txBody>
+          <a:bodyPr/>
+          <a:p/>
+        </p:txBody>
       </p:sp>
       <p:sp>
         <p:nvSpPr>
@@ -5308,6 +4406,10 @@
             <a:prstDash val="solid"/>
           </a:ln>
         </p:spPr>
+        <p:txBody>
+          <a:bodyPr/>
+          <a:p/>
+        </p:txBody>
       </p:sp>
       <p:sp>
         <p:nvSpPr>
@@ -5389,6 +4491,10 @@
             <a:prstDash val="solid"/>
           </a:ln>
         </p:spPr>
+        <p:txBody>
+          <a:bodyPr/>
+          <a:p/>
+        </p:txBody>
       </p:sp>
       <p:sp>
         <p:nvSpPr>
@@ -5470,6 +4576,10 @@
             <a:prstDash val="solid"/>
           </a:ln>
         </p:spPr>
+        <p:txBody>
+          <a:bodyPr/>
+          <a:p/>
+        </p:txBody>
       </p:sp>
       <p:sp>
         <p:nvSpPr>
@@ -5551,6 +4661,10 @@
             <a:prstDash val="solid"/>
           </a:ln>
         </p:spPr>
+        <p:txBody>
+          <a:bodyPr/>
+          <a:p/>
+        </p:txBody>
       </p:sp>
       <p:sp>
         <p:nvSpPr>
@@ -5632,6 +4746,10 @@
             <a:prstDash val="solid"/>
           </a:ln>
         </p:spPr>
+        <p:txBody>
+          <a:bodyPr/>
+          <a:p/>
+        </p:txBody>
       </p:sp>
       <p:sp>
         <p:nvSpPr>
@@ -5713,6 +4831,10 @@
             <a:prstDash val="solid"/>
           </a:ln>
         </p:spPr>
+        <p:txBody>
+          <a:bodyPr/>
+          <a:p/>
+        </p:txBody>
       </p:sp>
       <p:sp>
         <p:nvSpPr>
@@ -5794,6 +4916,10 @@
             <a:prstDash val="solid"/>
           </a:ln>
         </p:spPr>
+        <p:txBody>
+          <a:bodyPr/>
+          <a:p/>
+        </p:txBody>
       </p:sp>
       <p:sp>
         <p:nvSpPr>
@@ -5875,6 +5001,10 @@
             <a:prstDash val="solid"/>
           </a:ln>
         </p:spPr>
+        <p:txBody>
+          <a:bodyPr/>
+          <a:p/>
+        </p:txBody>
       </p:sp>
       <p:sp>
         <p:nvSpPr>
@@ -5954,6 +5084,10 @@
             <a:prstDash val="solid"/>
           </a:ln>
         </p:spPr>
+        <p:txBody>
+          <a:bodyPr/>
+          <a:p/>
+        </p:txBody>
       </p:sp>
       <p:sp>
         <p:nvSpPr>
@@ -5977,6 +5111,10 @@
             <a:prstDash val="solid"/>
           </a:ln>
         </p:spPr>
+        <p:txBody>
+          <a:bodyPr/>
+          <a:p/>
+        </p:txBody>
       </p:sp>
       <p:sp>
         <p:nvSpPr>
@@ -6000,6 +5138,10 @@
             <a:prstDash val="solid"/>
           </a:ln>
         </p:spPr>
+        <p:txBody>
+          <a:bodyPr/>
+          <a:p/>
+        </p:txBody>
       </p:sp>
       <p:sp>
         <p:nvSpPr>
@@ -6023,6 +5165,10 @@
             <a:prstDash val="solid"/>
           </a:ln>
         </p:spPr>
+        <p:txBody>
+          <a:bodyPr/>
+          <a:p/>
+        </p:txBody>
       </p:sp>
       <p:sp>
         <p:nvSpPr>
@@ -6046,6 +5192,10 @@
             <a:prstDash val="solid"/>
           </a:ln>
         </p:spPr>
+        <p:txBody>
+          <a:bodyPr/>
+          <a:p/>
+        </p:txBody>
       </p:sp>
       <p:sp>
         <p:nvSpPr>
@@ -6070,6 +5220,10 @@
             <a:tailEnd type="open"/>
           </a:ln>
         </p:spPr>
+        <p:txBody>
+          <a:bodyPr/>
+          <a:p/>
+        </p:txBody>
       </p:sp>
       <p:sp>
         <p:nvSpPr>
@@ -6133,6 +5287,10 @@
             <a:tailEnd type="open"/>
           </a:ln>
         </p:spPr>
+        <p:txBody>
+          <a:bodyPr/>
+          <a:p/>
+        </p:txBody>
       </p:sp>
       <p:sp>
         <p:nvSpPr>
@@ -6196,6 +5354,10 @@
             <a:tailEnd type="open"/>
           </a:ln>
         </p:spPr>
+        <p:txBody>
+          <a:bodyPr/>
+          <a:p/>
+        </p:txBody>
       </p:sp>
       <p:sp>
         <p:nvSpPr>
@@ -6260,6 +5422,10 @@
             <a:prstDash val="solid"/>
           </a:ln>
         </p:spPr>
+        <p:txBody>
+          <a:bodyPr/>
+          <a:p/>
+        </p:txBody>
       </p:sp>
       <p:pic>
         <p:nvPicPr>
@@ -6348,6 +5514,10 @@
             <a:prstDash val="solid"/>
           </a:ln>
         </p:spPr>
+        <p:txBody>
+          <a:bodyPr/>
+          <a:p/>
+        </p:txBody>
       </p:sp>
       <p:pic>
         <p:nvPicPr>
@@ -6434,6 +5604,10 @@
             <a:prstDash val="solid"/>
           </a:ln>
         </p:spPr>
+        <p:txBody>
+          <a:bodyPr/>
+          <a:p/>
+        </p:txBody>
       </p:sp>
       <p:sp>
         <p:nvSpPr>
@@ -6457,6 +5631,10 @@
             <a:prstDash val="solid"/>
           </a:ln>
         </p:spPr>
+        <p:txBody>
+          <a:bodyPr/>
+          <a:p/>
+        </p:txBody>
       </p:sp>
     </p:spTree>
   </p:cSld>
@@ -6514,6 +5692,10 @@
             <a:prstDash val="solid"/>
           </a:ln>
         </p:spPr>
+        <p:txBody>
+          <a:bodyPr/>
+          <a:p/>
+        </p:txBody>
       </p:sp>
       <p:sp>
         <p:nvSpPr>
@@ -6665,7 +5847,7 @@
                 <a:ea typeface="Calibri" pitchFamily="34" charset="-122"/>
                 <a:cs typeface="Calibri" pitchFamily="34" charset="-120"/>
               </a:rPr>
-              <a:t>12 / 17</a:t>
+              <a:t>12 / 13</a:t>
             </a:r>
             <a:endParaRPr lang="en-US" sz="900" dirty="0"/>
           </a:p>
@@ -6697,6 +5879,10 @@
             <a:prstDash val="solid"/>
           </a:ln>
         </p:spPr>
+        <p:txBody>
+          <a:bodyPr/>
+          <a:p/>
+        </p:txBody>
       </p:sp>
       <p:sp>
         <p:nvSpPr>
@@ -7110,6 +6296,10 @@
             <a:prstDash val="dash"/>
           </a:ln>
         </p:spPr>
+        <p:txBody>
+          <a:bodyPr/>
+          <a:p/>
+        </p:txBody>
       </p:sp>
       <p:sp>
         <p:nvSpPr>
@@ -7135,6 +6325,10 @@
             <a:prstDash val="solid"/>
           </a:ln>
         </p:spPr>
+        <p:txBody>
+          <a:bodyPr/>
+          <a:p/>
+        </p:txBody>
       </p:sp>
       <p:sp>
         <p:nvSpPr>
@@ -7238,6 +6432,10 @@
             <a:prstDash val="solid"/>
           </a:ln>
         </p:spPr>
+        <p:txBody>
+          <a:bodyPr/>
+          <a:p/>
+        </p:txBody>
       </p:sp>
       <p:sp>
         <p:nvSpPr>
@@ -7341,6 +6539,10 @@
             <a:prstDash val="solid"/>
           </a:ln>
         </p:spPr>
+        <p:txBody>
+          <a:bodyPr/>
+          <a:p/>
+        </p:txBody>
       </p:sp>
       <p:sp>
         <p:nvSpPr>
@@ -7444,6 +6646,10 @@
             <a:prstDash val="solid"/>
           </a:ln>
         </p:spPr>
+        <p:txBody>
+          <a:bodyPr/>
+          <a:p/>
+        </p:txBody>
       </p:sp>
       <p:sp>
         <p:nvSpPr>
@@ -7547,6 +6753,10 @@
             <a:prstDash val="solid"/>
           </a:ln>
         </p:spPr>
+        <p:txBody>
+          <a:bodyPr/>
+          <a:p/>
+        </p:txBody>
       </p:sp>
       <p:sp>
         <p:nvSpPr>
@@ -7650,6 +6860,10 @@
             <a:prstDash val="solid"/>
           </a:ln>
         </p:spPr>
+        <p:txBody>
+          <a:bodyPr/>
+          <a:p/>
+        </p:txBody>
       </p:sp>
       <p:sp>
         <p:nvSpPr>
@@ -7755,6 +6969,10 @@
             <a:prstDash val="solid"/>
           </a:ln>
         </p:spPr>
+        <p:txBody>
+          <a:bodyPr/>
+          <a:p/>
+        </p:txBody>
       </p:sp>
       <p:sp>
         <p:nvSpPr>
@@ -7838,6 +7056,10 @@
             <a:prstDash val="solid"/>
           </a:ln>
         </p:spPr>
+        <p:txBody>
+          <a:bodyPr/>
+          <a:p/>
+        </p:txBody>
       </p:sp>
       <p:sp>
         <p:nvSpPr>
@@ -7951,6 +7173,10 @@
             <a:prstDash val="solid"/>
           </a:ln>
         </p:spPr>
+        <p:txBody>
+          <a:bodyPr/>
+          <a:p/>
+        </p:txBody>
       </p:sp>
       <p:sp>
         <p:nvSpPr>
@@ -8102,7 +7328,7 @@
                 <a:ea typeface="Calibri" pitchFamily="34" charset="-122"/>
                 <a:cs typeface="Calibri" pitchFamily="34" charset="-120"/>
               </a:rPr>
-              <a:t>13 / 17</a:t>
+              <a:t>13 / 13</a:t>
             </a:r>
             <a:endParaRPr lang="en-US" sz="900" dirty="0"/>
           </a:p>
@@ -8134,6 +7360,10 @@
             <a:prstDash val="solid"/>
           </a:ln>
         </p:spPr>
+        <p:txBody>
+          <a:bodyPr/>
+          <a:p/>
+        </p:txBody>
       </p:sp>
       <p:sp>
         <p:nvSpPr>
@@ -8159,6 +7389,10 @@
             <a:prstDash val="solid"/>
           </a:ln>
         </p:spPr>
+        <p:txBody>
+          <a:bodyPr/>
+          <a:p/>
+        </p:txBody>
       </p:sp>
       <p:pic>
         <p:nvPicPr>
@@ -8256,7 +7490,7 @@
                 <a:ea typeface="Calibri" pitchFamily="34" charset="-122"/>
                 <a:cs typeface="Calibri" pitchFamily="34" charset="-120"/>
               </a:rPr>
-              <a:t>React + Vite + TypeScript, Tailwind e shadcn/ui. Service worker para instalar e receber push.</a:t>
+              <a:t>React + Vite + TypeScript, Tailwind e shadcn/ui. O service worker (instalação e push) é da Fase 2.</a:t>
             </a:r>
             <a:endParaRPr lang="en-US" sz="1150" dirty="0"/>
           </a:p>
@@ -8288,6 +7522,10 @@
             <a:prstDash val="solid"/>
           </a:ln>
         </p:spPr>
+        <p:txBody>
+          <a:bodyPr/>
+          <a:p/>
+        </p:txBody>
       </p:sp>
       <p:sp>
         <p:nvSpPr>
@@ -8313,6 +7551,10 @@
             <a:prstDash val="solid"/>
           </a:ln>
         </p:spPr>
+        <p:txBody>
+          <a:bodyPr/>
+          <a:p/>
+        </p:txBody>
       </p:sp>
       <p:pic>
         <p:nvPicPr>
@@ -8442,6 +7684,10 @@
             <a:prstDash val="solid"/>
           </a:ln>
         </p:spPr>
+        <p:txBody>
+          <a:bodyPr/>
+          <a:p/>
+        </p:txBody>
       </p:sp>
       <p:sp>
         <p:nvSpPr>
@@ -8467,6 +7713,10 @@
             <a:prstDash val="solid"/>
           </a:ln>
         </p:spPr>
+        <p:txBody>
+          <a:bodyPr/>
+          <a:p/>
+        </p:txBody>
       </p:sp>
       <p:pic>
         <p:nvPicPr>
@@ -8596,6 +7846,10 @@
             <a:prstDash val="solid"/>
           </a:ln>
         </p:spPr>
+        <p:txBody>
+          <a:bodyPr/>
+          <a:p/>
+        </p:txBody>
       </p:sp>
       <p:sp>
         <p:nvSpPr>
@@ -8621,6 +7875,10 @@
             <a:prstDash val="solid"/>
           </a:ln>
         </p:spPr>
+        <p:txBody>
+          <a:bodyPr/>
+          <a:p/>
+        </p:txBody>
       </p:sp>
       <p:pic>
         <p:nvPicPr>
@@ -8750,6 +8008,10 @@
             <a:prstDash val="solid"/>
           </a:ln>
         </p:spPr>
+        <p:txBody>
+          <a:bodyPr/>
+          <a:p/>
+        </p:txBody>
       </p:sp>
       <p:sp>
         <p:nvSpPr>
@@ -8775,6 +8037,10 @@
             <a:prstDash val="solid"/>
           </a:ln>
         </p:spPr>
+        <p:txBody>
+          <a:bodyPr/>
+          <a:p/>
+        </p:txBody>
       </p:sp>
       <p:pic>
         <p:nvPicPr>
@@ -8902,6 +8168,10 @@
             <a:tailEnd type="triangle"/>
           </a:ln>
         </p:spPr>
+        <p:txBody>
+          <a:bodyPr/>
+          <a:p/>
+        </p:txBody>
       </p:sp>
       <p:sp>
         <p:nvSpPr>
@@ -8927,6 +8197,10 @@
             <a:tailEnd type="triangle"/>
           </a:ln>
         </p:spPr>
+        <p:txBody>
+          <a:bodyPr/>
+          <a:p/>
+        </p:txBody>
       </p:sp>
       <p:sp>
         <p:nvSpPr>
@@ -8952,6 +8226,10 @@
             <a:tailEnd type="triangle"/>
           </a:ln>
         </p:spPr>
+        <p:txBody>
+          <a:bodyPr/>
+          <a:p/>
+        </p:txBody>
       </p:sp>
       <p:sp>
         <p:nvSpPr>
@@ -8976,6 +8254,10 @@
             <a:tailEnd type="triangle"/>
           </a:ln>
         </p:spPr>
+        <p:txBody>
+          <a:bodyPr/>
+          <a:p/>
+        </p:txBody>
       </p:sp>
       <p:sp>
         <p:nvSpPr>
@@ -9000,6 +8282,10 @@
             <a:tailEnd type="triangle"/>
           </a:ln>
         </p:spPr>
+        <p:txBody>
+          <a:bodyPr/>
+          <a:p/>
+        </p:txBody>
       </p:sp>
       <p:sp>
         <p:nvSpPr>
@@ -9027,6 +8313,10 @@
             <a:prstDash val="solid"/>
           </a:ln>
         </p:spPr>
+        <p:txBody>
+          <a:bodyPr/>
+          <a:p/>
+        </p:txBody>
       </p:sp>
       <p:sp>
         <p:nvSpPr>
@@ -9173,3991 +8463,6 @@
               <a:t>O contrato docs/openapi.yaml gera os tipos TypeScript do front. Mudança incompatível passa por revisão do contrato antes do código.</a:t>
             </a:r>
             <a:endParaRPr lang="en-US" sz="1150" dirty="0"/>
-          </a:p>
-        </p:txBody>
-      </p:sp>
-    </p:spTree>
-  </p:cSld>
-  <p:clrMapOvr>
-    <a:masterClrMapping/>
-  </p:clrMapOvr>
-</p:sld>
-</file>
-
-<file path=ppt/slides/slide14.xml><?xml version="1.0" encoding="utf-8"?>
-<p:sld xmlns:a="http://schemas.openxmlformats.org/drawingml/2006/main" xmlns:r="http://schemas.openxmlformats.org/officeDocument/2006/relationships" xmlns:p="http://schemas.openxmlformats.org/presentationml/2006/main">
-  <p:cSld name="Slide 14">
-    <p:bg>
-      <p:bgPr>
-        <a:solidFill>
-          <a:srgbClr val="F4F7F5"/>
-        </a:solidFill>
-      </p:bgPr>
-    </p:bg>
-    <p:spTree>
-      <p:nvGrpSpPr>
-        <p:cNvPr id="1" name=""/>
-        <p:cNvGrpSpPr/>
-        <p:nvPr/>
-      </p:nvGrpSpPr>
-      <p:grpSpPr>
-        <a:xfrm>
-          <a:off x="0" y="0"/>
-          <a:ext cx="0" cy="0"/>
-          <a:chOff x="0" y="0"/>
-          <a:chExt cx="0" cy="0"/>
-        </a:xfrm>
-      </p:grpSpPr>
-      <p:sp>
-        <p:nvSpPr>
-          <p:cNvPr id="2" name="Shape 0"/>
-          <p:cNvSpPr/>
-          <p:nvPr/>
-        </p:nvSpPr>
-        <p:spPr>
-          <a:xfrm>
-            <a:off x="548640" y="475488"/>
-            <a:ext cx="118872" cy="118872"/>
-          </a:xfrm>
-          <a:prstGeom prst="ellipse">
-            <a:avLst/>
-          </a:prstGeom>
-          <a:solidFill>
-            <a:srgbClr val="E6B84D"/>
-          </a:solidFill>
-          <a:ln w="12700">
-            <a:solidFill>
-              <a:srgbClr val="E6B84D"/>
-            </a:solidFill>
-            <a:prstDash val="solid"/>
-          </a:ln>
-        </p:spPr>
-      </p:sp>
-      <p:sp>
-        <p:nvSpPr>
-          <p:cNvPr id="3" name="Text 1"/>
-          <p:cNvSpPr txBox="1"/>
-          <p:nvPr/>
-        </p:nvSpPr>
-        <p:spPr>
-          <a:xfrm>
-            <a:off x="777240" y="402336"/>
-            <a:ext cx="9144000" cy="274320"/>
-          </a:xfrm>
-          <a:prstGeom prst="rect">
-            <a:avLst/>
-          </a:prstGeom>
-          <a:noFill/>
-          <a:ln/>
-        </p:spPr>
-        <p:txBody>
-          <a:bodyPr wrap="square" lIns="0" tIns="0" rIns="0" bIns="0" rtlCol="0" anchor="t"/>
-          <a:lstStyle/>
-          <a:p>
-            <a:pPr indent="0" marL="0">
-              <a:buNone/>
-            </a:pPr>
-            <a:r>
-              <a:rPr lang="en-US" sz="1100" b="1" spc="200" kern="0" dirty="0">
-                <a:solidFill>
-                  <a:srgbClr val="2F6B4A"/>
-                </a:solidFill>
-                <a:latin typeface="Calibri" pitchFamily="34" charset="0"/>
-                <a:ea typeface="Calibri" pitchFamily="34" charset="-122"/>
-                <a:cs typeface="Calibri" pitchFamily="34" charset="-120"/>
-              </a:rPr>
-              <a:t>PLANO DE ENTREGAS</a:t>
-            </a:r>
-            <a:endParaRPr lang="en-US" sz="1100" dirty="0"/>
-          </a:p>
-        </p:txBody>
-      </p:sp>
-      <p:sp>
-        <p:nvSpPr>
-          <p:cNvPr id="4" name="Text 2"/>
-          <p:cNvSpPr txBox="1"/>
-          <p:nvPr/>
-        </p:nvSpPr>
-        <p:spPr>
-          <a:xfrm>
-            <a:off x="548640" y="713232"/>
-            <a:ext cx="11094415" cy="685800"/>
-          </a:xfrm>
-          <a:prstGeom prst="rect">
-            <a:avLst/>
-          </a:prstGeom>
-          <a:noFill/>
-          <a:ln/>
-        </p:spPr>
-        <p:txBody>
-          <a:bodyPr wrap="square" lIns="0" tIns="0" rIns="0" bIns="0" rtlCol="0" anchor="t"/>
-          <a:lstStyle/>
-          <a:p>
-            <a:pPr indent="0" marL="0">
-              <a:buNone/>
-            </a:pPr>
-            <a:r>
-              <a:rPr lang="en-US" sz="3200" b="1" dirty="0">
-                <a:solidFill>
-                  <a:srgbClr val="0F1E18"/>
-                </a:solidFill>
-                <a:latin typeface="Calibri" pitchFamily="34" charset="0"/>
-                <a:ea typeface="Calibri" pitchFamily="34" charset="-122"/>
-                <a:cs typeface="Calibri" pitchFamily="34" charset="-120"/>
-              </a:rPr>
-              <a:t>A rota até a apresentação final</a:t>
-            </a:r>
-            <a:endParaRPr lang="en-US" sz="3200" dirty="0"/>
-          </a:p>
-        </p:txBody>
-      </p:sp>
-      <p:sp>
-        <p:nvSpPr>
-          <p:cNvPr id="5" name="Text 3"/>
-          <p:cNvSpPr txBox="1"/>
-          <p:nvPr/>
-        </p:nvSpPr>
-        <p:spPr>
-          <a:xfrm>
-            <a:off x="548640" y="6473952"/>
-            <a:ext cx="5486400" cy="228600"/>
-          </a:xfrm>
-          <a:prstGeom prst="rect">
-            <a:avLst/>
-          </a:prstGeom>
-          <a:noFill/>
-          <a:ln/>
-        </p:spPr>
-        <p:txBody>
-          <a:bodyPr wrap="square" lIns="0" tIns="0" rIns="0" bIns="0" rtlCol="0" anchor="t"/>
-          <a:lstStyle/>
-          <a:p>
-            <a:pPr indent="0" marL="0">
-              <a:buNone/>
-            </a:pPr>
-            <a:r>
-              <a:rPr lang="en-US" sz="900" dirty="0">
-                <a:solidFill>
-                  <a:srgbClr val="7B8C82"/>
-                </a:solidFill>
-                <a:latin typeface="Calibri" pitchFamily="34" charset="0"/>
-                <a:ea typeface="Calibri" pitchFamily="34" charset="-122"/>
-                <a:cs typeface="Calibri" pitchFamily="34" charset="-120"/>
-              </a:rPr>
-              <a:t>Rota de Estudo · Documento de Visão</a:t>
-            </a:r>
-            <a:endParaRPr lang="en-US" sz="900" dirty="0"/>
-          </a:p>
-        </p:txBody>
-      </p:sp>
-      <p:sp>
-        <p:nvSpPr>
-          <p:cNvPr id="6" name="Text 4"/>
-          <p:cNvSpPr txBox="1"/>
-          <p:nvPr/>
-        </p:nvSpPr>
-        <p:spPr>
-          <a:xfrm>
-            <a:off x="10271455" y="6473952"/>
-            <a:ext cx="1371600" cy="228600"/>
-          </a:xfrm>
-          <a:prstGeom prst="rect">
-            <a:avLst/>
-          </a:prstGeom>
-          <a:noFill/>
-          <a:ln/>
-        </p:spPr>
-        <p:txBody>
-          <a:bodyPr wrap="square" lIns="0" tIns="0" rIns="0" bIns="0" rtlCol="0" anchor="t"/>
-          <a:lstStyle/>
-          <a:p>
-            <a:pPr algn="r" indent="0" marL="0">
-              <a:buNone/>
-            </a:pPr>
-            <a:r>
-              <a:rPr lang="en-US" sz="900" dirty="0">
-                <a:solidFill>
-                  <a:srgbClr val="7B8C82"/>
-                </a:solidFill>
-                <a:latin typeface="Calibri" pitchFamily="34" charset="0"/>
-                <a:ea typeface="Calibri" pitchFamily="34" charset="-122"/>
-                <a:cs typeface="Calibri" pitchFamily="34" charset="-120"/>
-              </a:rPr>
-              <a:t>14 / 17</a:t>
-            </a:r>
-            <a:endParaRPr lang="en-US" sz="900" dirty="0"/>
-          </a:p>
-        </p:txBody>
-      </p:sp>
-      <p:sp>
-        <p:nvSpPr>
-          <p:cNvPr id="7" name="Shape 5"/>
-          <p:cNvSpPr/>
-          <p:nvPr/>
-        </p:nvSpPr>
-        <p:spPr>
-          <a:xfrm>
-            <a:off x="1600200" y="3017520"/>
-            <a:ext cx="8988552" cy="91"/>
-          </a:xfrm>
-          <a:prstGeom prst="line">
-            <a:avLst/>
-          </a:prstGeom>
-          <a:noFill/>
-          <a:ln w="38100">
-            <a:solidFill>
-              <a:srgbClr val="93C7A6"/>
-            </a:solidFill>
-            <a:prstDash val="dash"/>
-          </a:ln>
-        </p:spPr>
-      </p:sp>
-      <p:sp>
-        <p:nvSpPr>
-          <p:cNvPr id="8" name="Shape 6"/>
-          <p:cNvSpPr/>
-          <p:nvPr/>
-        </p:nvSpPr>
-        <p:spPr>
-          <a:xfrm>
-            <a:off x="1362456" y="2779776"/>
-            <a:ext cx="475488" cy="475488"/>
-          </a:xfrm>
-          <a:prstGeom prst="ellipse">
-            <a:avLst/>
-          </a:prstGeom>
-          <a:solidFill>
-            <a:srgbClr val="2F6B4A"/>
-          </a:solidFill>
-          <a:ln w="31750">
-            <a:solidFill>
-              <a:srgbClr val="2F6B4A"/>
-            </a:solidFill>
-            <a:prstDash val="solid"/>
-          </a:ln>
-        </p:spPr>
-      </p:sp>
-      <p:sp>
-        <p:nvSpPr>
-          <p:cNvPr id="9" name="Text 7"/>
-          <p:cNvSpPr txBox="1"/>
-          <p:nvPr/>
-        </p:nvSpPr>
-        <p:spPr>
-          <a:xfrm>
-            <a:off x="594360" y="2057400"/>
-            <a:ext cx="2011680" cy="365760"/>
-          </a:xfrm>
-          <a:prstGeom prst="rect">
-            <a:avLst/>
-          </a:prstGeom>
-          <a:noFill/>
-          <a:ln/>
-        </p:spPr>
-        <p:txBody>
-          <a:bodyPr wrap="square" lIns="0" tIns="0" rIns="0" bIns="0" rtlCol="0" anchor="t"/>
-          <a:lstStyle/>
-          <a:p>
-            <a:pPr algn="ctr" indent="0" marL="0">
-              <a:buNone/>
-            </a:pPr>
-            <a:r>
-              <a:rPr lang="en-US" sz="2000" b="1" dirty="0">
-                <a:solidFill>
-                  <a:srgbClr val="2F6B4A"/>
-                </a:solidFill>
-                <a:latin typeface="Calibri" pitchFamily="34" charset="0"/>
-                <a:ea typeface="Calibri" pitchFamily="34" charset="-122"/>
-                <a:cs typeface="Calibri" pitchFamily="34" charset="-120"/>
-              </a:rPr>
-              <a:t>25/09</a:t>
-            </a:r>
-            <a:endParaRPr lang="en-US" sz="2000" dirty="0"/>
-          </a:p>
-        </p:txBody>
-      </p:sp>
-      <p:sp>
-        <p:nvSpPr>
-          <p:cNvPr id="10" name="Text 8"/>
-          <p:cNvSpPr txBox="1"/>
-          <p:nvPr/>
-        </p:nvSpPr>
-        <p:spPr>
-          <a:xfrm>
-            <a:off x="594360" y="2450592"/>
-            <a:ext cx="2011680" cy="274320"/>
-          </a:xfrm>
-          <a:prstGeom prst="rect">
-            <a:avLst/>
-          </a:prstGeom>
-          <a:noFill/>
-          <a:ln/>
-        </p:spPr>
-        <p:txBody>
-          <a:bodyPr wrap="square" lIns="0" tIns="0" rIns="0" bIns="0" rtlCol="0" anchor="t"/>
-          <a:lstStyle/>
-          <a:p>
-            <a:pPr algn="ctr" indent="0" marL="0">
-              <a:buNone/>
-            </a:pPr>
-            <a:r>
-              <a:rPr lang="en-US" sz="1250" b="1" dirty="0">
-                <a:solidFill>
-                  <a:srgbClr val="2F6B4A"/>
-                </a:solidFill>
-                <a:latin typeface="Calibri" pitchFamily="34" charset="0"/>
-                <a:ea typeface="Calibri" pitchFamily="34" charset="-122"/>
-                <a:cs typeface="Calibri" pitchFamily="34" charset="-120"/>
-              </a:rPr>
-              <a:t>Fase 0 concluída</a:t>
-            </a:r>
-            <a:endParaRPr lang="en-US" sz="1250" dirty="0"/>
-          </a:p>
-        </p:txBody>
-      </p:sp>
-      <p:sp>
-        <p:nvSpPr>
-          <p:cNvPr id="11" name="Shape 9"/>
-          <p:cNvSpPr/>
-          <p:nvPr/>
-        </p:nvSpPr>
-        <p:spPr>
-          <a:xfrm>
-            <a:off x="594360" y="3520440"/>
-            <a:ext cx="2011680" cy="2148840"/>
-          </a:xfrm>
-          <a:prstGeom prst="roundRect">
-            <a:avLst>
-              <a:gd name="adj" fmla="val 5455"/>
-            </a:avLst>
-          </a:prstGeom>
-          <a:solidFill>
-            <a:srgbClr val="E3EEE7"/>
-          </a:solidFill>
-          <a:ln w="9525">
-            <a:solidFill>
-              <a:srgbClr val="E3EEE7"/>
-            </a:solidFill>
-            <a:prstDash val="solid"/>
-          </a:ln>
-        </p:spPr>
-      </p:sp>
-      <p:sp>
-        <p:nvSpPr>
-          <p:cNvPr id="12" name="Text 10"/>
-          <p:cNvSpPr txBox="1"/>
-          <p:nvPr/>
-        </p:nvSpPr>
-        <p:spPr>
-          <a:xfrm>
-            <a:off x="731520" y="3675888"/>
-            <a:ext cx="1737360" cy="1874520"/>
-          </a:xfrm>
-          <a:prstGeom prst="rect">
-            <a:avLst/>
-          </a:prstGeom>
-          <a:noFill/>
-          <a:ln/>
-        </p:spPr>
-        <p:txBody>
-          <a:bodyPr wrap="square" lIns="0" tIns="0" rIns="0" bIns="0" rtlCol="0" anchor="t"/>
-          <a:lstStyle/>
-          <a:p>
-            <a:pPr indent="0" marL="0">
-              <a:buNone/>
-            </a:pPr>
-            <a:r>
-              <a:rPr lang="en-US" sz="1200" dirty="0">
-                <a:solidFill>
-                  <a:srgbClr val="0F1E18"/>
-                </a:solidFill>
-                <a:latin typeface="Calibri" pitchFamily="34" charset="0"/>
-                <a:ea typeface="Calibri" pitchFamily="34" charset="-122"/>
-                <a:cs typeface="Calibri" pitchFamily="34" charset="-120"/>
-              </a:rPr>
-              <a:t>Contrato OpenAPI, migration V1, esqueleto do front e da API, Compose local.</a:t>
-            </a:r>
-            <a:endParaRPr lang="en-US" sz="1200" dirty="0"/>
-          </a:p>
-        </p:txBody>
-      </p:sp>
-      <p:sp>
-        <p:nvSpPr>
-          <p:cNvPr id="13" name="Shape 11"/>
-          <p:cNvSpPr/>
-          <p:nvPr/>
-        </p:nvSpPr>
-        <p:spPr>
-          <a:xfrm>
-            <a:off x="3609594" y="2779776"/>
-            <a:ext cx="475488" cy="475488"/>
-          </a:xfrm>
-          <a:prstGeom prst="ellipse">
-            <a:avLst/>
-          </a:prstGeom>
-          <a:solidFill>
-            <a:srgbClr val="FFFFFF"/>
-          </a:solidFill>
-          <a:ln w="31750">
-            <a:solidFill>
-              <a:srgbClr val="2F6B4A"/>
-            </a:solidFill>
-            <a:prstDash val="solid"/>
-          </a:ln>
-        </p:spPr>
-      </p:sp>
-      <p:sp>
-        <p:nvSpPr>
-          <p:cNvPr id="14" name="Text 12"/>
-          <p:cNvSpPr txBox="1"/>
-          <p:nvPr/>
-        </p:nvSpPr>
-        <p:spPr>
-          <a:xfrm>
-            <a:off x="2841498" y="2057400"/>
-            <a:ext cx="2011680" cy="365760"/>
-          </a:xfrm>
-          <a:prstGeom prst="rect">
-            <a:avLst/>
-          </a:prstGeom>
-          <a:noFill/>
-          <a:ln/>
-        </p:spPr>
-        <p:txBody>
-          <a:bodyPr wrap="square" lIns="0" tIns="0" rIns="0" bIns="0" rtlCol="0" anchor="t"/>
-          <a:lstStyle/>
-          <a:p>
-            <a:pPr algn="ctr" indent="0" marL="0">
-              <a:buNone/>
-            </a:pPr>
-            <a:r>
-              <a:rPr lang="en-US" sz="2000" b="1" dirty="0">
-                <a:solidFill>
-                  <a:srgbClr val="0F1E18"/>
-                </a:solidFill>
-                <a:latin typeface="Calibri" pitchFamily="34" charset="0"/>
-                <a:ea typeface="Calibri" pitchFamily="34" charset="-122"/>
-                <a:cs typeface="Calibri" pitchFamily="34" charset="-120"/>
-              </a:rPr>
-              <a:t>19/10</a:t>
-            </a:r>
-            <a:endParaRPr lang="en-US" sz="2000" dirty="0"/>
-          </a:p>
-        </p:txBody>
-      </p:sp>
-      <p:sp>
-        <p:nvSpPr>
-          <p:cNvPr id="15" name="Text 13"/>
-          <p:cNvSpPr txBox="1"/>
-          <p:nvPr/>
-        </p:nvSpPr>
-        <p:spPr>
-          <a:xfrm>
-            <a:off x="2841498" y="2450592"/>
-            <a:ext cx="2011680" cy="274320"/>
-          </a:xfrm>
-          <a:prstGeom prst="rect">
-            <a:avLst/>
-          </a:prstGeom>
-          <a:noFill/>
-          <a:ln/>
-        </p:spPr>
-        <p:txBody>
-          <a:bodyPr wrap="square" lIns="0" tIns="0" rIns="0" bIns="0" rtlCol="0" anchor="t"/>
-          <a:lstStyle/>
-          <a:p>
-            <a:pPr algn="ctr" indent="0" marL="0">
-              <a:buNone/>
-            </a:pPr>
-            <a:r>
-              <a:rPr lang="en-US" sz="1250" b="1" dirty="0">
-                <a:solidFill>
-                  <a:srgbClr val="2F6B4A"/>
-                </a:solidFill>
-                <a:latin typeface="Calibri" pitchFamily="34" charset="0"/>
-                <a:ea typeface="Calibri" pitchFamily="34" charset="-122"/>
-                <a:cs typeface="Calibri" pitchFamily="34" charset="-120"/>
-              </a:rPr>
-              <a:t>Status Report 2</a:t>
-            </a:r>
-            <a:endParaRPr lang="en-US" sz="1250" dirty="0"/>
-          </a:p>
-        </p:txBody>
-      </p:sp>
-      <p:sp>
-        <p:nvSpPr>
-          <p:cNvPr id="16" name="Shape 14"/>
-          <p:cNvSpPr/>
-          <p:nvPr/>
-        </p:nvSpPr>
-        <p:spPr>
-          <a:xfrm>
-            <a:off x="2841498" y="3520440"/>
-            <a:ext cx="2011680" cy="2148840"/>
-          </a:xfrm>
-          <a:prstGeom prst="roundRect">
-            <a:avLst>
-              <a:gd name="adj" fmla="val 5455"/>
-            </a:avLst>
-          </a:prstGeom>
-          <a:solidFill>
-            <a:srgbClr val="FFFFFF"/>
-          </a:solidFill>
-          <a:ln w="9525">
-            <a:solidFill>
-              <a:srgbClr val="C9D8CE"/>
-            </a:solidFill>
-            <a:prstDash val="solid"/>
-          </a:ln>
-        </p:spPr>
-      </p:sp>
-      <p:sp>
-        <p:nvSpPr>
-          <p:cNvPr id="17" name="Text 15"/>
-          <p:cNvSpPr txBox="1"/>
-          <p:nvPr/>
-        </p:nvSpPr>
-        <p:spPr>
-          <a:xfrm>
-            <a:off x="2978658" y="3675888"/>
-            <a:ext cx="1737360" cy="1874520"/>
-          </a:xfrm>
-          <a:prstGeom prst="rect">
-            <a:avLst/>
-          </a:prstGeom>
-          <a:noFill/>
-          <a:ln/>
-        </p:spPr>
-        <p:txBody>
-          <a:bodyPr wrap="square" lIns="0" tIns="0" rIns="0" bIns="0" rtlCol="0" anchor="t"/>
-          <a:lstStyle/>
-          <a:p>
-            <a:pPr indent="0" marL="0">
-              <a:buNone/>
-            </a:pPr>
-            <a:r>
-              <a:rPr lang="en-US" sz="1200" dirty="0">
-                <a:solidFill>
-                  <a:srgbClr val="0F1E18"/>
-                </a:solidFill>
-                <a:latin typeface="Calibri" pitchFamily="34" charset="0"/>
-                <a:ea typeface="Calibri" pitchFamily="34" charset="-122"/>
-                <a:cs typeface="Calibri" pitchFamily="34" charset="-120"/>
-              </a:rPr>
-              <a:t>Protótipo visual e 2 histórias implementadas: RF01 a RF03 e o painel Hoje (RF10).</a:t>
-            </a:r>
-            <a:endParaRPr lang="en-US" sz="1200" dirty="0"/>
-          </a:p>
-        </p:txBody>
-      </p:sp>
-      <p:sp>
-        <p:nvSpPr>
-          <p:cNvPr id="18" name="Shape 16"/>
-          <p:cNvSpPr/>
-          <p:nvPr/>
-        </p:nvSpPr>
-        <p:spPr>
-          <a:xfrm>
-            <a:off x="5856732" y="2779776"/>
-            <a:ext cx="475488" cy="475488"/>
-          </a:xfrm>
-          <a:prstGeom prst="ellipse">
-            <a:avLst/>
-          </a:prstGeom>
-          <a:solidFill>
-            <a:srgbClr val="FFFFFF"/>
-          </a:solidFill>
-          <a:ln w="31750">
-            <a:solidFill>
-              <a:srgbClr val="2F6B4A"/>
-            </a:solidFill>
-            <a:prstDash val="solid"/>
-          </a:ln>
-        </p:spPr>
-      </p:sp>
-      <p:sp>
-        <p:nvSpPr>
-          <p:cNvPr id="19" name="Text 17"/>
-          <p:cNvSpPr txBox="1"/>
-          <p:nvPr/>
-        </p:nvSpPr>
-        <p:spPr>
-          <a:xfrm>
-            <a:off x="5088636" y="2057400"/>
-            <a:ext cx="2011680" cy="365760"/>
-          </a:xfrm>
-          <a:prstGeom prst="rect">
-            <a:avLst/>
-          </a:prstGeom>
-          <a:noFill/>
-          <a:ln/>
-        </p:spPr>
-        <p:txBody>
-          <a:bodyPr wrap="square" lIns="0" tIns="0" rIns="0" bIns="0" rtlCol="0" anchor="t"/>
-          <a:lstStyle/>
-          <a:p>
-            <a:pPr algn="ctr" indent="0" marL="0">
-              <a:buNone/>
-            </a:pPr>
-            <a:r>
-              <a:rPr lang="en-US" sz="2000" b="1" dirty="0">
-                <a:solidFill>
-                  <a:srgbClr val="0F1E18"/>
-                </a:solidFill>
-                <a:latin typeface="Calibri" pitchFamily="34" charset="0"/>
-                <a:ea typeface="Calibri" pitchFamily="34" charset="-122"/>
-                <a:cs typeface="Calibri" pitchFamily="34" charset="-120"/>
-              </a:rPr>
-              <a:t>28/10</a:t>
-            </a:r>
-            <a:endParaRPr lang="en-US" sz="2000" dirty="0"/>
-          </a:p>
-        </p:txBody>
-      </p:sp>
-      <p:sp>
-        <p:nvSpPr>
-          <p:cNvPr id="20" name="Text 18"/>
-          <p:cNvSpPr txBox="1"/>
-          <p:nvPr/>
-        </p:nvSpPr>
-        <p:spPr>
-          <a:xfrm>
-            <a:off x="5088636" y="2450592"/>
-            <a:ext cx="2011680" cy="274320"/>
-          </a:xfrm>
-          <a:prstGeom prst="rect">
-            <a:avLst/>
-          </a:prstGeom>
-          <a:noFill/>
-          <a:ln/>
-        </p:spPr>
-        <p:txBody>
-          <a:bodyPr wrap="square" lIns="0" tIns="0" rIns="0" bIns="0" rtlCol="0" anchor="t"/>
-          <a:lstStyle/>
-          <a:p>
-            <a:pPr algn="ctr" indent="0" marL="0">
-              <a:buNone/>
-            </a:pPr>
-            <a:r>
-              <a:rPr lang="en-US" sz="1250" b="1" dirty="0">
-                <a:solidFill>
-                  <a:srgbClr val="2F6B4A"/>
-                </a:solidFill>
-                <a:latin typeface="Calibri" pitchFamily="34" charset="0"/>
-                <a:ea typeface="Calibri" pitchFamily="34" charset="-122"/>
-                <a:cs typeface="Calibri" pitchFamily="34" charset="-120"/>
-              </a:rPr>
-              <a:t>Status Report 3</a:t>
-            </a:r>
-            <a:endParaRPr lang="en-US" sz="1250" dirty="0"/>
-          </a:p>
-        </p:txBody>
-      </p:sp>
-      <p:sp>
-        <p:nvSpPr>
-          <p:cNvPr id="21" name="Shape 19"/>
-          <p:cNvSpPr/>
-          <p:nvPr/>
-        </p:nvSpPr>
-        <p:spPr>
-          <a:xfrm>
-            <a:off x="5088636" y="3520440"/>
-            <a:ext cx="2011680" cy="2148840"/>
-          </a:xfrm>
-          <a:prstGeom prst="roundRect">
-            <a:avLst>
-              <a:gd name="adj" fmla="val 5455"/>
-            </a:avLst>
-          </a:prstGeom>
-          <a:solidFill>
-            <a:srgbClr val="FFFFFF"/>
-          </a:solidFill>
-          <a:ln w="9525">
-            <a:solidFill>
-              <a:srgbClr val="C9D8CE"/>
-            </a:solidFill>
-            <a:prstDash val="solid"/>
-          </a:ln>
-        </p:spPr>
-      </p:sp>
-      <p:sp>
-        <p:nvSpPr>
-          <p:cNvPr id="22" name="Text 20"/>
-          <p:cNvSpPr txBox="1"/>
-          <p:nvPr/>
-        </p:nvSpPr>
-        <p:spPr>
-          <a:xfrm>
-            <a:off x="5225796" y="3675888"/>
-            <a:ext cx="1737360" cy="1874520"/>
-          </a:xfrm>
-          <a:prstGeom prst="rect">
-            <a:avLst/>
-          </a:prstGeom>
-          <a:noFill/>
-          <a:ln/>
-        </p:spPr>
-        <p:txBody>
-          <a:bodyPr wrap="square" lIns="0" tIns="0" rIns="0" bIns="0" rtlCol="0" anchor="t"/>
-          <a:lstStyle/>
-          <a:p>
-            <a:pPr indent="0" marL="0">
-              <a:buNone/>
-            </a:pPr>
-            <a:r>
-              <a:rPr lang="en-US" sz="1200" dirty="0">
-                <a:solidFill>
-                  <a:srgbClr val="0F1E18"/>
-                </a:solidFill>
-                <a:latin typeface="Calibri" pitchFamily="34" charset="0"/>
-                <a:ea typeface="Calibri" pitchFamily="34" charset="-122"/>
-                <a:cs typeface="Calibri" pitchFamily="34" charset="-120"/>
-              </a:rPr>
-              <a:t>Lições aprendidas e ações corretivas; P2 em andamento (provas e grade).</a:t>
-            </a:r>
-            <a:endParaRPr lang="en-US" sz="1200" dirty="0"/>
-          </a:p>
-        </p:txBody>
-      </p:sp>
-      <p:sp>
-        <p:nvSpPr>
-          <p:cNvPr id="23" name="Shape 21"/>
-          <p:cNvSpPr/>
-          <p:nvPr/>
-        </p:nvSpPr>
-        <p:spPr>
-          <a:xfrm>
-            <a:off x="8103870" y="2779776"/>
-            <a:ext cx="475488" cy="475488"/>
-          </a:xfrm>
-          <a:prstGeom prst="ellipse">
-            <a:avLst/>
-          </a:prstGeom>
-          <a:solidFill>
-            <a:srgbClr val="FFFFFF"/>
-          </a:solidFill>
-          <a:ln w="31750">
-            <a:solidFill>
-              <a:srgbClr val="2F6B4A"/>
-            </a:solidFill>
-            <a:prstDash val="solid"/>
-          </a:ln>
-        </p:spPr>
-      </p:sp>
-      <p:sp>
-        <p:nvSpPr>
-          <p:cNvPr id="24" name="Text 22"/>
-          <p:cNvSpPr txBox="1"/>
-          <p:nvPr/>
-        </p:nvSpPr>
-        <p:spPr>
-          <a:xfrm>
-            <a:off x="7335774" y="2057400"/>
-            <a:ext cx="2011680" cy="365760"/>
-          </a:xfrm>
-          <a:prstGeom prst="rect">
-            <a:avLst/>
-          </a:prstGeom>
-          <a:noFill/>
-          <a:ln/>
-        </p:spPr>
-        <p:txBody>
-          <a:bodyPr wrap="square" lIns="0" tIns="0" rIns="0" bIns="0" rtlCol="0" anchor="t"/>
-          <a:lstStyle/>
-          <a:p>
-            <a:pPr algn="ctr" indent="0" marL="0">
-              <a:buNone/>
-            </a:pPr>
-            <a:r>
-              <a:rPr lang="en-US" sz="2000" b="1" dirty="0">
-                <a:solidFill>
-                  <a:srgbClr val="0F1E18"/>
-                </a:solidFill>
-                <a:latin typeface="Calibri" pitchFamily="34" charset="0"/>
-                <a:ea typeface="Calibri" pitchFamily="34" charset="-122"/>
-                <a:cs typeface="Calibri" pitchFamily="34" charset="-120"/>
-              </a:rPr>
-              <a:t>16/11</a:t>
-            </a:r>
-            <a:endParaRPr lang="en-US" sz="2000" dirty="0"/>
-          </a:p>
-        </p:txBody>
-      </p:sp>
-      <p:sp>
-        <p:nvSpPr>
-          <p:cNvPr id="25" name="Text 23"/>
-          <p:cNvSpPr txBox="1"/>
-          <p:nvPr/>
-        </p:nvSpPr>
-        <p:spPr>
-          <a:xfrm>
-            <a:off x="7335774" y="2450592"/>
-            <a:ext cx="2011680" cy="274320"/>
-          </a:xfrm>
-          <a:prstGeom prst="rect">
-            <a:avLst/>
-          </a:prstGeom>
-          <a:noFill/>
-          <a:ln/>
-        </p:spPr>
-        <p:txBody>
-          <a:bodyPr wrap="square" lIns="0" tIns="0" rIns="0" bIns="0" rtlCol="0" anchor="t"/>
-          <a:lstStyle/>
-          <a:p>
-            <a:pPr algn="ctr" indent="0" marL="0">
-              <a:buNone/>
-            </a:pPr>
-            <a:r>
-              <a:rPr lang="en-US" sz="1250" b="1" dirty="0">
-                <a:solidFill>
-                  <a:srgbClr val="2F6B4A"/>
-                </a:solidFill>
-                <a:latin typeface="Calibri" pitchFamily="34" charset="0"/>
-                <a:ea typeface="Calibri" pitchFamily="34" charset="-122"/>
-                <a:cs typeface="Calibri" pitchFamily="34" charset="-120"/>
-              </a:rPr>
-              <a:t>2ª VA</a:t>
-            </a:r>
-            <a:endParaRPr lang="en-US" sz="1250" dirty="0"/>
-          </a:p>
-        </p:txBody>
-      </p:sp>
-      <p:sp>
-        <p:nvSpPr>
-          <p:cNvPr id="26" name="Shape 24"/>
-          <p:cNvSpPr/>
-          <p:nvPr/>
-        </p:nvSpPr>
-        <p:spPr>
-          <a:xfrm>
-            <a:off x="7335774" y="3520440"/>
-            <a:ext cx="2011680" cy="2148840"/>
-          </a:xfrm>
-          <a:prstGeom prst="roundRect">
-            <a:avLst>
-              <a:gd name="adj" fmla="val 5455"/>
-            </a:avLst>
-          </a:prstGeom>
-          <a:solidFill>
-            <a:srgbClr val="FFFFFF"/>
-          </a:solidFill>
-          <a:ln w="9525">
-            <a:solidFill>
-              <a:srgbClr val="C9D8CE"/>
-            </a:solidFill>
-            <a:prstDash val="solid"/>
-          </a:ln>
-        </p:spPr>
-      </p:sp>
-      <p:sp>
-        <p:nvSpPr>
-          <p:cNvPr id="27" name="Text 25"/>
-          <p:cNvSpPr txBox="1"/>
-          <p:nvPr/>
-        </p:nvSpPr>
-        <p:spPr>
-          <a:xfrm>
-            <a:off x="7472934" y="3675888"/>
-            <a:ext cx="1737360" cy="1874520"/>
-          </a:xfrm>
-          <a:prstGeom prst="rect">
-            <a:avLst/>
-          </a:prstGeom>
-          <a:noFill/>
-          <a:ln/>
-        </p:spPr>
-        <p:txBody>
-          <a:bodyPr wrap="square" lIns="0" tIns="0" rIns="0" bIns="0" rtlCol="0" anchor="t"/>
-          <a:lstStyle/>
-          <a:p>
-            <a:pPr indent="0" marL="0">
-              <a:buNone/>
-            </a:pPr>
-            <a:r>
-              <a:rPr lang="en-US" sz="1200" dirty="0">
-                <a:solidFill>
-                  <a:srgbClr val="0F1E18"/>
-                </a:solidFill>
-                <a:latin typeface="Calibri" pitchFamily="34" charset="0"/>
-                <a:ea typeface="Calibri" pitchFamily="34" charset="-122"/>
-                <a:cs typeface="Calibri" pitchFamily="34" charset="-120"/>
-              </a:rPr>
-              <a:t>Agenda completa (P2): cancelamento, Semana/Mês, colisões.</a:t>
-            </a:r>
-            <a:endParaRPr lang="en-US" sz="1200" dirty="0"/>
-          </a:p>
-        </p:txBody>
-      </p:sp>
-      <p:sp>
-        <p:nvSpPr>
-          <p:cNvPr id="28" name="Shape 26"/>
-          <p:cNvSpPr/>
-          <p:nvPr/>
-        </p:nvSpPr>
-        <p:spPr>
-          <a:xfrm>
-            <a:off x="10351008" y="2779776"/>
-            <a:ext cx="475488" cy="475488"/>
-          </a:xfrm>
-          <a:prstGeom prst="ellipse">
-            <a:avLst/>
-          </a:prstGeom>
-          <a:solidFill>
-            <a:srgbClr val="E6B84D"/>
-          </a:solidFill>
-          <a:ln w="31750">
-            <a:solidFill>
-              <a:srgbClr val="2F6B4A"/>
-            </a:solidFill>
-            <a:prstDash val="solid"/>
-          </a:ln>
-        </p:spPr>
-      </p:sp>
-      <p:sp>
-        <p:nvSpPr>
-          <p:cNvPr id="29" name="Text 27"/>
-          <p:cNvSpPr txBox="1"/>
-          <p:nvPr/>
-        </p:nvSpPr>
-        <p:spPr>
-          <a:xfrm>
-            <a:off x="9582912" y="2057400"/>
-            <a:ext cx="2011680" cy="365760"/>
-          </a:xfrm>
-          <a:prstGeom prst="rect">
-            <a:avLst/>
-          </a:prstGeom>
-          <a:noFill/>
-          <a:ln/>
-        </p:spPr>
-        <p:txBody>
-          <a:bodyPr wrap="square" lIns="0" tIns="0" rIns="0" bIns="0" rtlCol="0" anchor="t"/>
-          <a:lstStyle/>
-          <a:p>
-            <a:pPr algn="ctr" indent="0" marL="0">
-              <a:buNone/>
-            </a:pPr>
-            <a:r>
-              <a:rPr lang="en-US" sz="2000" b="1" dirty="0">
-                <a:solidFill>
-                  <a:srgbClr val="0F1E18"/>
-                </a:solidFill>
-                <a:latin typeface="Calibri" pitchFamily="34" charset="0"/>
-                <a:ea typeface="Calibri" pitchFamily="34" charset="-122"/>
-                <a:cs typeface="Calibri" pitchFamily="34" charset="-120"/>
-              </a:rPr>
-              <a:t>30/11</a:t>
-            </a:r>
-            <a:endParaRPr lang="en-US" sz="2000" dirty="0"/>
-          </a:p>
-        </p:txBody>
-      </p:sp>
-      <p:sp>
-        <p:nvSpPr>
-          <p:cNvPr id="30" name="Text 28"/>
-          <p:cNvSpPr txBox="1"/>
-          <p:nvPr/>
-        </p:nvSpPr>
-        <p:spPr>
-          <a:xfrm>
-            <a:off x="9582912" y="2450592"/>
-            <a:ext cx="2011680" cy="274320"/>
-          </a:xfrm>
-          <a:prstGeom prst="rect">
-            <a:avLst/>
-          </a:prstGeom>
-          <a:noFill/>
-          <a:ln/>
-        </p:spPr>
-        <p:txBody>
-          <a:bodyPr wrap="square" lIns="0" tIns="0" rIns="0" bIns="0" rtlCol="0" anchor="t"/>
-          <a:lstStyle/>
-          <a:p>
-            <a:pPr algn="ctr" indent="0" marL="0">
-              <a:buNone/>
-            </a:pPr>
-            <a:r>
-              <a:rPr lang="en-US" sz="1250" b="1" dirty="0">
-                <a:solidFill>
-                  <a:srgbClr val="2F6B4A"/>
-                </a:solidFill>
-                <a:latin typeface="Calibri" pitchFamily="34" charset="0"/>
-                <a:ea typeface="Calibri" pitchFamily="34" charset="-122"/>
-                <a:cs typeface="Calibri" pitchFamily="34" charset="-120"/>
-              </a:rPr>
-              <a:t>3ª VA</a:t>
-            </a:r>
-            <a:endParaRPr lang="en-US" sz="1250" dirty="0"/>
-          </a:p>
-        </p:txBody>
-      </p:sp>
-      <p:sp>
-        <p:nvSpPr>
-          <p:cNvPr id="31" name="Shape 29"/>
-          <p:cNvSpPr/>
-          <p:nvPr/>
-        </p:nvSpPr>
-        <p:spPr>
-          <a:xfrm>
-            <a:off x="9582912" y="3520440"/>
-            <a:ext cx="2011680" cy="2148840"/>
-          </a:xfrm>
-          <a:prstGeom prst="roundRect">
-            <a:avLst>
-              <a:gd name="adj" fmla="val 5455"/>
-            </a:avLst>
-          </a:prstGeom>
-          <a:solidFill>
-            <a:srgbClr val="FFFFFF"/>
-          </a:solidFill>
-          <a:ln w="9525">
-            <a:solidFill>
-              <a:srgbClr val="C9D8CE"/>
-            </a:solidFill>
-            <a:prstDash val="solid"/>
-          </a:ln>
-        </p:spPr>
-      </p:sp>
-      <p:sp>
-        <p:nvSpPr>
-          <p:cNvPr id="32" name="Text 30"/>
-          <p:cNvSpPr txBox="1"/>
-          <p:nvPr/>
-        </p:nvSpPr>
-        <p:spPr>
-          <a:xfrm>
-            <a:off x="9720072" y="3675888"/>
-            <a:ext cx="1737360" cy="1874520"/>
-          </a:xfrm>
-          <a:prstGeom prst="rect">
-            <a:avLst/>
-          </a:prstGeom>
-          <a:noFill/>
-          <a:ln/>
-        </p:spPr>
-        <p:txBody>
-          <a:bodyPr wrap="square" lIns="0" tIns="0" rIns="0" bIns="0" rtlCol="0" anchor="t"/>
-          <a:lstStyle/>
-          <a:p>
-            <a:pPr indent="0" marL="0">
-              <a:buNone/>
-            </a:pPr>
-            <a:r>
-              <a:rPr lang="en-US" sz="1200" dirty="0">
-                <a:solidFill>
-                  <a:srgbClr val="0F1E18"/>
-                </a:solidFill>
-                <a:latin typeface="Calibri" pitchFamily="34" charset="0"/>
-                <a:ea typeface="Calibri" pitchFamily="34" charset="-122"/>
-                <a:cs typeface="Calibri" pitchFamily="34" charset="-120"/>
-              </a:rPr>
-              <a:t>Lembretes push, gamificação e primeiro deploy na VPS (P3).</a:t>
-            </a:r>
-            <a:endParaRPr lang="en-US" sz="1200" dirty="0"/>
-          </a:p>
-        </p:txBody>
-      </p:sp>
-      <p:sp>
-        <p:nvSpPr>
-          <p:cNvPr id="33" name="Text 31"/>
-          <p:cNvSpPr txBox="1"/>
-          <p:nvPr/>
-        </p:nvSpPr>
-        <p:spPr>
-          <a:xfrm>
-            <a:off x="548640" y="5989320"/>
-            <a:ext cx="10972800" cy="274320"/>
-          </a:xfrm>
-          <a:prstGeom prst="rect">
-            <a:avLst/>
-          </a:prstGeom>
-          <a:noFill/>
-          <a:ln/>
-        </p:spPr>
-        <p:txBody>
-          <a:bodyPr wrap="square" lIns="0" tIns="0" rIns="0" bIns="0" rtlCol="0" anchor="t"/>
-          <a:lstStyle/>
-          <a:p>
-            <a:pPr indent="0" marL="0">
-              <a:buNone/>
-            </a:pPr>
-            <a:r>
-              <a:rPr lang="en-US" sz="1150" i="1" dirty="0">
-                <a:solidFill>
-                  <a:srgbClr val="2F6B4A"/>
-                </a:solidFill>
-                <a:latin typeface="Calibri" pitchFamily="34" charset="0"/>
-                <a:ea typeface="Calibri" pitchFamily="34" charset="-122"/>
-                <a:cs typeface="Calibri" pitchFamily="34" charset="-120"/>
-              </a:rPr>
-              <a:t>Datas da disciplina; o escopo de cada marco é proposta da dupla, a revisar a cada status report.</a:t>
-            </a:r>
-            <a:endParaRPr lang="en-US" sz="1150" dirty="0"/>
-          </a:p>
-        </p:txBody>
-      </p:sp>
-    </p:spTree>
-  </p:cSld>
-  <p:clrMapOvr>
-    <a:masterClrMapping/>
-  </p:clrMapOvr>
-</p:sld>
-</file>
-
-<file path=ppt/slides/slide15.xml><?xml version="1.0" encoding="utf-8"?>
-<p:sld xmlns:a="http://schemas.openxmlformats.org/drawingml/2006/main" xmlns:r="http://schemas.openxmlformats.org/officeDocument/2006/relationships" xmlns:p="http://schemas.openxmlformats.org/presentationml/2006/main">
-  <p:cSld name="Slide 15">
-    <p:bg>
-      <p:bgPr>
-        <a:solidFill>
-          <a:srgbClr val="0F1E18"/>
-        </a:solidFill>
-      </p:bgPr>
-    </p:bg>
-    <p:spTree>
-      <p:nvGrpSpPr>
-        <p:cNvPr id="1" name=""/>
-        <p:cNvGrpSpPr/>
-        <p:nvPr/>
-      </p:nvGrpSpPr>
-      <p:grpSpPr>
-        <a:xfrm>
-          <a:off x="0" y="0"/>
-          <a:ext cx="0" cy="0"/>
-          <a:chOff x="0" y="0"/>
-          <a:chExt cx="0" cy="0"/>
-        </a:xfrm>
-      </p:grpSpPr>
-      <p:sp>
-        <p:nvSpPr>
-          <p:cNvPr id="2" name="Shape 0"/>
-          <p:cNvSpPr/>
-          <p:nvPr/>
-        </p:nvSpPr>
-        <p:spPr>
-          <a:xfrm>
-            <a:off x="548640" y="475488"/>
-            <a:ext cx="118872" cy="118872"/>
-          </a:xfrm>
-          <a:prstGeom prst="ellipse">
-            <a:avLst/>
-          </a:prstGeom>
-          <a:solidFill>
-            <a:srgbClr val="E6B84D"/>
-          </a:solidFill>
-          <a:ln w="12700">
-            <a:solidFill>
-              <a:srgbClr val="E6B84D"/>
-            </a:solidFill>
-            <a:prstDash val="solid"/>
-          </a:ln>
-        </p:spPr>
-      </p:sp>
-      <p:sp>
-        <p:nvSpPr>
-          <p:cNvPr id="3" name="Text 1"/>
-          <p:cNvSpPr txBox="1"/>
-          <p:nvPr/>
-        </p:nvSpPr>
-        <p:spPr>
-          <a:xfrm>
-            <a:off x="777240" y="402336"/>
-            <a:ext cx="9144000" cy="274320"/>
-          </a:xfrm>
-          <a:prstGeom prst="rect">
-            <a:avLst/>
-          </a:prstGeom>
-          <a:noFill/>
-          <a:ln/>
-        </p:spPr>
-        <p:txBody>
-          <a:bodyPr wrap="square" lIns="0" tIns="0" rIns="0" bIns="0" rtlCol="0" anchor="t"/>
-          <a:lstStyle/>
-          <a:p>
-            <a:pPr indent="0" marL="0">
-              <a:buNone/>
-            </a:pPr>
-            <a:r>
-              <a:rPr lang="en-US" sz="1100" b="1" spc="200" kern="0" dirty="0">
-                <a:solidFill>
-                  <a:srgbClr val="93C7A6"/>
-                </a:solidFill>
-                <a:latin typeface="Calibri" pitchFamily="34" charset="0"/>
-                <a:ea typeface="Calibri" pitchFamily="34" charset="-122"/>
-                <a:cs typeface="Calibri" pitchFamily="34" charset="-120"/>
-              </a:rPr>
-              <a:t>ESTADO ATUAL</a:t>
-            </a:r>
-            <a:endParaRPr lang="en-US" sz="1100" dirty="0"/>
-          </a:p>
-        </p:txBody>
-      </p:sp>
-      <p:sp>
-        <p:nvSpPr>
-          <p:cNvPr id="4" name="Text 2"/>
-          <p:cNvSpPr txBox="1"/>
-          <p:nvPr/>
-        </p:nvSpPr>
-        <p:spPr>
-          <a:xfrm>
-            <a:off x="548640" y="713232"/>
-            <a:ext cx="10972800" cy="685800"/>
-          </a:xfrm>
-          <a:prstGeom prst="rect">
-            <a:avLst/>
-          </a:prstGeom>
-          <a:noFill/>
-          <a:ln/>
-        </p:spPr>
-        <p:txBody>
-          <a:bodyPr wrap="square" lIns="0" tIns="0" rIns="0" bIns="0" rtlCol="0" anchor="t"/>
-          <a:lstStyle/>
-          <a:p>
-            <a:pPr indent="0" marL="0">
-              <a:buNone/>
-            </a:pPr>
-            <a:r>
-              <a:rPr lang="en-US" sz="3200" b="1" dirty="0">
-                <a:solidFill>
-                  <a:srgbClr val="FFFFFF"/>
-                </a:solidFill>
-                <a:latin typeface="Calibri" pitchFamily="34" charset="0"/>
-                <a:ea typeface="Calibri" pitchFamily="34" charset="-122"/>
-                <a:cs typeface="Calibri" pitchFamily="34" charset="-120"/>
-              </a:rPr>
-              <a:t>A base já está no repositório</a:t>
-            </a:r>
-            <a:endParaRPr lang="en-US" sz="3200" dirty="0"/>
-          </a:p>
-        </p:txBody>
-      </p:sp>
-      <p:sp>
-        <p:nvSpPr>
-          <p:cNvPr id="5" name="Shape 3"/>
-          <p:cNvSpPr/>
-          <p:nvPr/>
-        </p:nvSpPr>
-        <p:spPr>
-          <a:xfrm>
-            <a:off x="548640" y="1691640"/>
-            <a:ext cx="2567864" cy="1828800"/>
-          </a:xfrm>
-          <a:prstGeom prst="roundRect">
-            <a:avLst>
-              <a:gd name="adj" fmla="val 6000"/>
-            </a:avLst>
-          </a:prstGeom>
-          <a:solidFill>
-            <a:srgbClr val="162720"/>
-          </a:solidFill>
-          <a:ln w="12700">
-            <a:solidFill>
-              <a:srgbClr val="293D35"/>
-            </a:solidFill>
-            <a:prstDash val="solid"/>
-          </a:ln>
-        </p:spPr>
-      </p:sp>
-      <p:sp>
-        <p:nvSpPr>
-          <p:cNvPr id="6" name="Text 4"/>
-          <p:cNvSpPr txBox="1"/>
-          <p:nvPr/>
-        </p:nvSpPr>
-        <p:spPr>
-          <a:xfrm>
-            <a:off x="822960" y="1828800"/>
-            <a:ext cx="2019224" cy="1005840"/>
-          </a:xfrm>
-          <a:prstGeom prst="rect">
-            <a:avLst/>
-          </a:prstGeom>
-          <a:noFill/>
-          <a:ln/>
-        </p:spPr>
-        <p:txBody>
-          <a:bodyPr wrap="square" lIns="0" tIns="0" rIns="0" bIns="0" rtlCol="0" anchor="t"/>
-          <a:lstStyle/>
-          <a:p>
-            <a:pPr indent="0" marL="0">
-              <a:buNone/>
-            </a:pPr>
-            <a:r>
-              <a:rPr lang="en-US" sz="6000" b="1" dirty="0">
-                <a:solidFill>
-                  <a:srgbClr val="E6B84D"/>
-                </a:solidFill>
-                <a:latin typeface="Calibri" pitchFamily="34" charset="0"/>
-                <a:ea typeface="Calibri" pitchFamily="34" charset="-122"/>
-                <a:cs typeface="Calibri" pitchFamily="34" charset="-120"/>
-              </a:rPr>
-              <a:t>18</a:t>
-            </a:r>
-            <a:endParaRPr lang="en-US" sz="6000" dirty="0"/>
-          </a:p>
-        </p:txBody>
-      </p:sp>
-      <p:sp>
-        <p:nvSpPr>
-          <p:cNvPr id="7" name="Text 5"/>
-          <p:cNvSpPr txBox="1"/>
-          <p:nvPr/>
-        </p:nvSpPr>
-        <p:spPr>
-          <a:xfrm>
-            <a:off x="822960" y="2880360"/>
-            <a:ext cx="2019224" cy="502920"/>
-          </a:xfrm>
-          <a:prstGeom prst="rect">
-            <a:avLst/>
-          </a:prstGeom>
-          <a:noFill/>
-          <a:ln/>
-        </p:spPr>
-        <p:txBody>
-          <a:bodyPr wrap="square" lIns="0" tIns="0" rIns="0" bIns="0" rtlCol="0" anchor="t"/>
-          <a:lstStyle/>
-          <a:p>
-            <a:pPr indent="0" marL="0">
-              <a:buNone/>
-            </a:pPr>
-            <a:r>
-              <a:rPr lang="en-US" sz="1400" dirty="0">
-                <a:solidFill>
-                  <a:srgbClr val="A9BBAF"/>
-                </a:solidFill>
-                <a:latin typeface="Calibri" pitchFamily="34" charset="0"/>
-                <a:ea typeface="Calibri" pitchFamily="34" charset="-122"/>
-                <a:cs typeface="Calibri" pitchFamily="34" charset="-120"/>
-              </a:rPr>
-              <a:t>caminhos no contrato OpenAPI</a:t>
-            </a:r>
-            <a:endParaRPr lang="en-US" sz="1400" dirty="0"/>
-          </a:p>
-        </p:txBody>
-      </p:sp>
-      <p:sp>
-        <p:nvSpPr>
-          <p:cNvPr id="8" name="Shape 6"/>
-          <p:cNvSpPr/>
-          <p:nvPr/>
-        </p:nvSpPr>
-        <p:spPr>
-          <a:xfrm>
-            <a:off x="3390824" y="1691640"/>
-            <a:ext cx="2567864" cy="1828800"/>
-          </a:xfrm>
-          <a:prstGeom prst="roundRect">
-            <a:avLst>
-              <a:gd name="adj" fmla="val 6000"/>
-            </a:avLst>
-          </a:prstGeom>
-          <a:solidFill>
-            <a:srgbClr val="162720"/>
-          </a:solidFill>
-          <a:ln w="12700">
-            <a:solidFill>
-              <a:srgbClr val="293D35"/>
-            </a:solidFill>
-            <a:prstDash val="solid"/>
-          </a:ln>
-        </p:spPr>
-      </p:sp>
-      <p:sp>
-        <p:nvSpPr>
-          <p:cNvPr id="9" name="Text 7"/>
-          <p:cNvSpPr txBox="1"/>
-          <p:nvPr/>
-        </p:nvSpPr>
-        <p:spPr>
-          <a:xfrm>
-            <a:off x="3665144" y="1828800"/>
-            <a:ext cx="2019224" cy="1005840"/>
-          </a:xfrm>
-          <a:prstGeom prst="rect">
-            <a:avLst/>
-          </a:prstGeom>
-          <a:noFill/>
-          <a:ln/>
-        </p:spPr>
-        <p:txBody>
-          <a:bodyPr wrap="square" lIns="0" tIns="0" rIns="0" bIns="0" rtlCol="0" anchor="t"/>
-          <a:lstStyle/>
-          <a:p>
-            <a:pPr indent="0" marL="0">
-              <a:buNone/>
-            </a:pPr>
-            <a:r>
-              <a:rPr lang="en-US" sz="6000" b="1" dirty="0">
-                <a:solidFill>
-                  <a:srgbClr val="E6B84D"/>
-                </a:solidFill>
-                <a:latin typeface="Calibri" pitchFamily="34" charset="0"/>
-                <a:ea typeface="Calibri" pitchFamily="34" charset="-122"/>
-                <a:cs typeface="Calibri" pitchFamily="34" charset="-120"/>
-              </a:rPr>
-              <a:t>8</a:t>
-            </a:r>
-            <a:endParaRPr lang="en-US" sz="6000" dirty="0"/>
-          </a:p>
-        </p:txBody>
-      </p:sp>
-      <p:sp>
-        <p:nvSpPr>
-          <p:cNvPr id="10" name="Text 8"/>
-          <p:cNvSpPr txBox="1"/>
-          <p:nvPr/>
-        </p:nvSpPr>
-        <p:spPr>
-          <a:xfrm>
-            <a:off x="3665144" y="2880360"/>
-            <a:ext cx="2019224" cy="502920"/>
-          </a:xfrm>
-          <a:prstGeom prst="rect">
-            <a:avLst/>
-          </a:prstGeom>
-          <a:noFill/>
-          <a:ln/>
-        </p:spPr>
-        <p:txBody>
-          <a:bodyPr wrap="square" lIns="0" tIns="0" rIns="0" bIns="0" rtlCol="0" anchor="t"/>
-          <a:lstStyle/>
-          <a:p>
-            <a:pPr indent="0" marL="0">
-              <a:buNone/>
-            </a:pPr>
-            <a:r>
-              <a:rPr lang="en-US" sz="1400" dirty="0">
-                <a:solidFill>
-                  <a:srgbClr val="A9BBAF"/>
-                </a:solidFill>
-                <a:latin typeface="Calibri" pitchFamily="34" charset="0"/>
-                <a:ea typeface="Calibri" pitchFamily="34" charset="-122"/>
-                <a:cs typeface="Calibri" pitchFamily="34" charset="-120"/>
-              </a:rPr>
-              <a:t>tabelas na migration V1</a:t>
-            </a:r>
-            <a:endParaRPr lang="en-US" sz="1400" dirty="0"/>
-          </a:p>
-        </p:txBody>
-      </p:sp>
-      <p:sp>
-        <p:nvSpPr>
-          <p:cNvPr id="11" name="Shape 9"/>
-          <p:cNvSpPr/>
-          <p:nvPr/>
-        </p:nvSpPr>
-        <p:spPr>
-          <a:xfrm>
-            <a:off x="6233008" y="1691640"/>
-            <a:ext cx="2567864" cy="1828800"/>
-          </a:xfrm>
-          <a:prstGeom prst="roundRect">
-            <a:avLst>
-              <a:gd name="adj" fmla="val 6000"/>
-            </a:avLst>
-          </a:prstGeom>
-          <a:solidFill>
-            <a:srgbClr val="162720"/>
-          </a:solidFill>
-          <a:ln w="12700">
-            <a:solidFill>
-              <a:srgbClr val="293D35"/>
-            </a:solidFill>
-            <a:prstDash val="solid"/>
-          </a:ln>
-        </p:spPr>
-      </p:sp>
-      <p:sp>
-        <p:nvSpPr>
-          <p:cNvPr id="12" name="Text 10"/>
-          <p:cNvSpPr txBox="1"/>
-          <p:nvPr/>
-        </p:nvSpPr>
-        <p:spPr>
-          <a:xfrm>
-            <a:off x="6507328" y="1828800"/>
-            <a:ext cx="2019224" cy="1005840"/>
-          </a:xfrm>
-          <a:prstGeom prst="rect">
-            <a:avLst/>
-          </a:prstGeom>
-          <a:noFill/>
-          <a:ln/>
-        </p:spPr>
-        <p:txBody>
-          <a:bodyPr wrap="square" lIns="0" tIns="0" rIns="0" bIns="0" rtlCol="0" anchor="t"/>
-          <a:lstStyle/>
-          <a:p>
-            <a:pPr indent="0" marL="0">
-              <a:buNone/>
-            </a:pPr>
-            <a:r>
-              <a:rPr lang="en-US" sz="6000" b="1" dirty="0">
-                <a:solidFill>
-                  <a:srgbClr val="E6B84D"/>
-                </a:solidFill>
-                <a:latin typeface="Calibri" pitchFamily="34" charset="0"/>
-                <a:ea typeface="Calibri" pitchFamily="34" charset="-122"/>
-                <a:cs typeface="Calibri" pitchFamily="34" charset="-120"/>
-              </a:rPr>
-              <a:t>5</a:t>
-            </a:r>
-            <a:endParaRPr lang="en-US" sz="6000" dirty="0"/>
-          </a:p>
-        </p:txBody>
-      </p:sp>
-      <p:sp>
-        <p:nvSpPr>
-          <p:cNvPr id="13" name="Text 11"/>
-          <p:cNvSpPr txBox="1"/>
-          <p:nvPr/>
-        </p:nvSpPr>
-        <p:spPr>
-          <a:xfrm>
-            <a:off x="6507328" y="2880360"/>
-            <a:ext cx="2019224" cy="502920"/>
-          </a:xfrm>
-          <a:prstGeom prst="rect">
-            <a:avLst/>
-          </a:prstGeom>
-          <a:noFill/>
-          <a:ln/>
-        </p:spPr>
-        <p:txBody>
-          <a:bodyPr wrap="square" lIns="0" tIns="0" rIns="0" bIns="0" rtlCol="0" anchor="t"/>
-          <a:lstStyle/>
-          <a:p>
-            <a:pPr indent="0" marL="0">
-              <a:buNone/>
-            </a:pPr>
-            <a:r>
-              <a:rPr lang="en-US" sz="1400" dirty="0">
-                <a:solidFill>
-                  <a:srgbClr val="A9BBAF"/>
-                </a:solidFill>
-                <a:latin typeface="Calibri" pitchFamily="34" charset="0"/>
-                <a:ea typeface="Calibri" pitchFamily="34" charset="-122"/>
-                <a:cs typeface="Calibri" pitchFamily="34" charset="-120"/>
-              </a:rPr>
-              <a:t>decisões registradas em ADR</a:t>
-            </a:r>
-            <a:endParaRPr lang="en-US" sz="1400" dirty="0"/>
-          </a:p>
-        </p:txBody>
-      </p:sp>
-      <p:sp>
-        <p:nvSpPr>
-          <p:cNvPr id="14" name="Shape 12"/>
-          <p:cNvSpPr/>
-          <p:nvPr/>
-        </p:nvSpPr>
-        <p:spPr>
-          <a:xfrm>
-            <a:off x="9075191" y="1691640"/>
-            <a:ext cx="2567864" cy="1828800"/>
-          </a:xfrm>
-          <a:prstGeom prst="roundRect">
-            <a:avLst>
-              <a:gd name="adj" fmla="val 6000"/>
-            </a:avLst>
-          </a:prstGeom>
-          <a:solidFill>
-            <a:srgbClr val="162720"/>
-          </a:solidFill>
-          <a:ln w="12700">
-            <a:solidFill>
-              <a:srgbClr val="293D35"/>
-            </a:solidFill>
-            <a:prstDash val="solid"/>
-          </a:ln>
-        </p:spPr>
-      </p:sp>
-      <p:sp>
-        <p:nvSpPr>
-          <p:cNvPr id="15" name="Text 13"/>
-          <p:cNvSpPr txBox="1"/>
-          <p:nvPr/>
-        </p:nvSpPr>
-        <p:spPr>
-          <a:xfrm>
-            <a:off x="9349511" y="1828800"/>
-            <a:ext cx="2019224" cy="1005840"/>
-          </a:xfrm>
-          <a:prstGeom prst="rect">
-            <a:avLst/>
-          </a:prstGeom>
-          <a:noFill/>
-          <a:ln/>
-        </p:spPr>
-        <p:txBody>
-          <a:bodyPr wrap="square" lIns="0" tIns="0" rIns="0" bIns="0" rtlCol="0" anchor="t"/>
-          <a:lstStyle/>
-          <a:p>
-            <a:pPr indent="0" marL="0">
-              <a:buNone/>
-            </a:pPr>
-            <a:r>
-              <a:rPr lang="en-US" sz="6000" b="1" dirty="0">
-                <a:solidFill>
-                  <a:srgbClr val="E6B84D"/>
-                </a:solidFill>
-                <a:latin typeface="Calibri" pitchFamily="34" charset="0"/>
-                <a:ea typeface="Calibri" pitchFamily="34" charset="-122"/>
-                <a:cs typeface="Calibri" pitchFamily="34" charset="-120"/>
-              </a:rPr>
-              <a:t>2</a:t>
-            </a:r>
-            <a:endParaRPr lang="en-US" sz="6000" dirty="0"/>
-          </a:p>
-        </p:txBody>
-      </p:sp>
-      <p:sp>
-        <p:nvSpPr>
-          <p:cNvPr id="16" name="Text 14"/>
-          <p:cNvSpPr txBox="1"/>
-          <p:nvPr/>
-        </p:nvSpPr>
-        <p:spPr>
-          <a:xfrm>
-            <a:off x="9349511" y="2880360"/>
-            <a:ext cx="2019224" cy="502920"/>
-          </a:xfrm>
-          <a:prstGeom prst="rect">
-            <a:avLst/>
-          </a:prstGeom>
-          <a:noFill/>
-          <a:ln/>
-        </p:spPr>
-        <p:txBody>
-          <a:bodyPr wrap="square" lIns="0" tIns="0" rIns="0" bIns="0" rtlCol="0" anchor="t"/>
-          <a:lstStyle/>
-          <a:p>
-            <a:pPr indent="0" marL="0">
-              <a:buNone/>
-            </a:pPr>
-            <a:r>
-              <a:rPr lang="en-US" sz="1400" dirty="0">
-                <a:solidFill>
-                  <a:srgbClr val="A9BBAF"/>
-                </a:solidFill>
-                <a:latin typeface="Calibri" pitchFamily="34" charset="0"/>
-                <a:ea typeface="Calibri" pitchFamily="34" charset="-122"/>
-                <a:cs typeface="Calibri" pitchFamily="34" charset="-120"/>
-              </a:rPr>
-              <a:t>idiomas no dicionário</a:t>
-            </a:r>
-            <a:endParaRPr lang="en-US" sz="1400" dirty="0"/>
-          </a:p>
-        </p:txBody>
-      </p:sp>
-      <p:sp>
-        <p:nvSpPr>
-          <p:cNvPr id="17" name="Shape 15"/>
-          <p:cNvSpPr/>
-          <p:nvPr/>
-        </p:nvSpPr>
-        <p:spPr>
-          <a:xfrm>
-            <a:off x="548640" y="4023360"/>
-            <a:ext cx="502920" cy="502920"/>
-          </a:xfrm>
-          <a:prstGeom prst="ellipse">
-            <a:avLst/>
-          </a:prstGeom>
-          <a:solidFill>
-            <a:srgbClr val="293D35"/>
-          </a:solidFill>
-          <a:ln w="12700">
-            <a:solidFill>
-              <a:srgbClr val="293D35"/>
-            </a:solidFill>
-            <a:prstDash val="solid"/>
-          </a:ln>
-        </p:spPr>
-      </p:sp>
-      <p:pic>
-        <p:nvPicPr>
-          <p:cNvPr id="18" name="Image 0" descr="preencoded.png">    </p:cNvPr>
-          <p:cNvPicPr>
-            <a:picLocks noChangeAspect="1"/>
-          </p:cNvPicPr>
-          <p:nvPr/>
-        </p:nvPicPr>
-        <p:blipFill>
-          <a:blip r:embed="rId1"/>
-          <a:stretch>
-            <a:fillRect/>
-          </a:stretch>
-        </p:blipFill>
-        <p:spPr>
-          <a:xfrm>
-            <a:off x="699516" y="4174236"/>
-            <a:ext cx="201168" cy="201168"/>
-          </a:xfrm>
-          <a:prstGeom prst="rect">
-            <a:avLst/>
-          </a:prstGeom>
-        </p:spPr>
-      </p:pic>
-      <p:sp>
-        <p:nvSpPr>
-          <p:cNvPr id="19" name="Text 16"/>
-          <p:cNvSpPr txBox="1"/>
-          <p:nvPr/>
-        </p:nvSpPr>
-        <p:spPr>
-          <a:xfrm>
-            <a:off x="1234440" y="4096512"/>
-            <a:ext cx="4572000" cy="365760"/>
-          </a:xfrm>
-          <a:prstGeom prst="rect">
-            <a:avLst/>
-          </a:prstGeom>
-          <a:noFill/>
-          <a:ln/>
-        </p:spPr>
-        <p:txBody>
-          <a:bodyPr wrap="square" lIns="0" tIns="0" rIns="0" bIns="0" rtlCol="0" anchor="t"/>
-          <a:lstStyle/>
-          <a:p>
-            <a:pPr indent="0" marL="0">
-              <a:buNone/>
-            </a:pPr>
-            <a:r>
-              <a:rPr lang="en-US" sz="1700" b="1" dirty="0">
-                <a:solidFill>
-                  <a:srgbClr val="FFFFFF"/>
-                </a:solidFill>
-                <a:latin typeface="Calibri" pitchFamily="34" charset="0"/>
-                <a:ea typeface="Calibri" pitchFamily="34" charset="-122"/>
-                <a:cs typeface="Calibri" pitchFamily="34" charset="-120"/>
-              </a:rPr>
-              <a:t>Pronto (Fase 0)</a:t>
-            </a:r>
-            <a:endParaRPr lang="en-US" sz="1700" dirty="0"/>
-          </a:p>
-        </p:txBody>
-      </p:sp>
-      <p:sp>
-        <p:nvSpPr>
-          <p:cNvPr id="20" name="Text 17"/>
-          <p:cNvSpPr txBox="1"/>
-          <p:nvPr/>
-        </p:nvSpPr>
-        <p:spPr>
-          <a:xfrm>
-            <a:off x="640080" y="4709160"/>
-            <a:ext cx="5120640" cy="1737360"/>
-          </a:xfrm>
-          <a:prstGeom prst="rect">
-            <a:avLst/>
-          </a:prstGeom>
-          <a:noFill/>
-          <a:ln/>
-        </p:spPr>
-        <p:txBody>
-          <a:bodyPr wrap="square" lIns="0" tIns="0" rIns="0" bIns="0" rtlCol="0" anchor="t"/>
-          <a:lstStyle/>
-          <a:p>
-            <a:pPr marL="342900" indent="-342900">
-              <a:spcAft>
-                <a:spcPts val="600"/>
-              </a:spcAft>
-              <a:buSzPct val="100000"/>
-              <a:buChar char="•"/>
-            </a:pPr>
-            <a:r>
-              <a:rPr lang="en-US" sz="1500" dirty="0">
-                <a:solidFill>
-                  <a:srgbClr val="A9BBAF"/>
-                </a:solidFill>
-                <a:latin typeface="Calibri" pitchFamily="34" charset="0"/>
-                <a:ea typeface="Calibri" pitchFamily="34" charset="-122"/>
-                <a:cs typeface="Calibri" pitchFamily="34" charset="-120"/>
-              </a:rPr>
-              <a:t>Contrato e tipos TypeScript gerados</a:t>
-            </a:r>
-            <a:endParaRPr lang="en-US" sz="1500" dirty="0"/>
-          </a:p>
-          <a:p>
-            <a:pPr marL="342900" indent="-342900">
-              <a:spcAft>
-                <a:spcPts val="600"/>
-              </a:spcAft>
-              <a:buSzPct val="100000"/>
-              <a:buChar char="•"/>
-            </a:pPr>
-            <a:r>
-              <a:rPr lang="en-US" sz="1500" dirty="0">
-                <a:solidFill>
-                  <a:srgbClr val="A9BBAF"/>
-                </a:solidFill>
-                <a:latin typeface="Calibri" pitchFamily="34" charset="0"/>
-                <a:ea typeface="Calibri" pitchFamily="34" charset="-122"/>
-                <a:cs typeface="Calibri" pitchFamily="34" charset="-120"/>
-              </a:rPr>
-              <a:t>Health check da API com checagem do banco</a:t>
-            </a:r>
-            <a:endParaRPr lang="en-US" sz="1500" dirty="0"/>
-          </a:p>
-          <a:p>
-            <a:pPr marL="342900" indent="-342900">
-              <a:spcAft>
-                <a:spcPts val="600"/>
-              </a:spcAft>
-              <a:buSzPct val="100000"/>
-              <a:buChar char="•"/>
-            </a:pPr>
-            <a:r>
-              <a:rPr lang="en-US" sz="1500" dirty="0">
-                <a:solidFill>
-                  <a:srgbClr val="A9BBAF"/>
-                </a:solidFill>
-                <a:latin typeface="Calibri" pitchFamily="34" charset="0"/>
-                <a:ea typeface="Calibri" pitchFamily="34" charset="-122"/>
-                <a:cs typeface="Calibri" pitchFamily="34" charset="-120"/>
-              </a:rPr>
-              <a:t>Shell mobile-first com rotas Hoje, Semana e Mês</a:t>
-            </a:r>
-            <a:endParaRPr lang="en-US" sz="1500" dirty="0"/>
-          </a:p>
-          <a:p>
-            <a:pPr marL="342900" indent="-342900">
-              <a:spcAft>
-                <a:spcPts val="600"/>
-              </a:spcAft>
-              <a:buSzPct val="100000"/>
-              <a:buChar char="•"/>
-            </a:pPr>
-            <a:r>
-              <a:rPr lang="en-US" sz="1500" dirty="0">
-                <a:solidFill>
-                  <a:srgbClr val="A9BBAF"/>
-                </a:solidFill>
-                <a:latin typeface="Calibri" pitchFamily="34" charset="0"/>
-                <a:ea typeface="Calibri" pitchFamily="34" charset="-122"/>
-                <a:cs typeface="Calibri" pitchFamily="34" charset="-120"/>
-              </a:rPr>
-              <a:t>Scripts de preflight e verificação completa</a:t>
-            </a:r>
-            <a:endParaRPr lang="en-US" sz="1500" dirty="0"/>
-          </a:p>
-        </p:txBody>
-      </p:sp>
-      <p:sp>
-        <p:nvSpPr>
-          <p:cNvPr id="21" name="Shape 18"/>
-          <p:cNvSpPr/>
-          <p:nvPr/>
-        </p:nvSpPr>
-        <p:spPr>
-          <a:xfrm>
-            <a:off x="6309360" y="4023360"/>
-            <a:ext cx="502920" cy="502920"/>
-          </a:xfrm>
-          <a:prstGeom prst="ellipse">
-            <a:avLst/>
-          </a:prstGeom>
-          <a:solidFill>
-            <a:srgbClr val="293D35"/>
-          </a:solidFill>
-          <a:ln w="12700">
-            <a:solidFill>
-              <a:srgbClr val="293D35"/>
-            </a:solidFill>
-            <a:prstDash val="solid"/>
-          </a:ln>
-        </p:spPr>
-      </p:sp>
-      <p:pic>
-        <p:nvPicPr>
-          <p:cNvPr id="22" name="Image 1" descr="preencoded.png">    </p:cNvPr>
-          <p:cNvPicPr>
-            <a:picLocks noChangeAspect="1"/>
-          </p:cNvPicPr>
-          <p:nvPr/>
-        </p:nvPicPr>
-        <p:blipFill>
-          <a:blip r:embed="rId2"/>
-          <a:stretch>
-            <a:fillRect/>
-          </a:stretch>
-        </p:blipFill>
-        <p:spPr>
-          <a:xfrm>
-            <a:off x="6460236" y="4174236"/>
-            <a:ext cx="201168" cy="201168"/>
-          </a:xfrm>
-          <a:prstGeom prst="rect">
-            <a:avLst/>
-          </a:prstGeom>
-        </p:spPr>
-      </p:pic>
-      <p:sp>
-        <p:nvSpPr>
-          <p:cNvPr id="23" name="Text 19"/>
-          <p:cNvSpPr txBox="1"/>
-          <p:nvPr/>
-        </p:nvSpPr>
-        <p:spPr>
-          <a:xfrm>
-            <a:off x="6995160" y="4096512"/>
-            <a:ext cx="4572000" cy="365760"/>
-          </a:xfrm>
-          <a:prstGeom prst="rect">
-            <a:avLst/>
-          </a:prstGeom>
-          <a:noFill/>
-          <a:ln/>
-        </p:spPr>
-        <p:txBody>
-          <a:bodyPr wrap="square" lIns="0" tIns="0" rIns="0" bIns="0" rtlCol="0" anchor="t"/>
-          <a:lstStyle/>
-          <a:p>
-            <a:pPr indent="0" marL="0">
-              <a:buNone/>
-            </a:pPr>
-            <a:r>
-              <a:rPr lang="en-US" sz="1700" b="1" dirty="0">
-                <a:solidFill>
-                  <a:srgbClr val="FFFFFF"/>
-                </a:solidFill>
-                <a:latin typeface="Calibri" pitchFamily="34" charset="0"/>
-                <a:ea typeface="Calibri" pitchFamily="34" charset="-122"/>
-                <a:cs typeface="Calibri" pitchFamily="34" charset="-120"/>
-              </a:rPr>
-              <a:t>Ainda não existe</a:t>
-            </a:r>
-            <a:endParaRPr lang="en-US" sz="1700" dirty="0"/>
-          </a:p>
-        </p:txBody>
-      </p:sp>
-      <p:sp>
-        <p:nvSpPr>
-          <p:cNvPr id="24" name="Text 20"/>
-          <p:cNvSpPr txBox="1"/>
-          <p:nvPr/>
-        </p:nvSpPr>
-        <p:spPr>
-          <a:xfrm>
-            <a:off x="6400800" y="4709160"/>
-            <a:ext cx="5120640" cy="1737360"/>
-          </a:xfrm>
-          <a:prstGeom prst="rect">
-            <a:avLst/>
-          </a:prstGeom>
-          <a:noFill/>
-          <a:ln/>
-        </p:spPr>
-        <p:txBody>
-          <a:bodyPr wrap="square" lIns="0" tIns="0" rIns="0" bIns="0" rtlCol="0" anchor="t"/>
-          <a:lstStyle/>
-          <a:p>
-            <a:pPr marL="342900" indent="-342900">
-              <a:spcAft>
-                <a:spcPts val="600"/>
-              </a:spcAft>
-              <a:buSzPct val="100000"/>
-              <a:buChar char="•"/>
-            </a:pPr>
-            <a:r>
-              <a:rPr lang="en-US" sz="1500" dirty="0">
-                <a:solidFill>
-                  <a:srgbClr val="A9BBAF"/>
-                </a:solidFill>
-                <a:latin typeface="Calibri" pitchFamily="34" charset="0"/>
-                <a:ea typeface="Calibri" pitchFamily="34" charset="-122"/>
-                <a:cs typeface="Calibri" pitchFamily="34" charset="-120"/>
-              </a:rPr>
-              <a:t>Autenticação e CRUD (Fase 1)</a:t>
-            </a:r>
-            <a:endParaRPr lang="en-US" sz="1500" dirty="0"/>
-          </a:p>
-          <a:p>
-            <a:pPr marL="342900" indent="-342900">
-              <a:spcAft>
-                <a:spcPts val="600"/>
-              </a:spcAft>
-              <a:buSzPct val="100000"/>
-              <a:buChar char="•"/>
-            </a:pPr>
-            <a:r>
-              <a:rPr lang="en-US" sz="1500" dirty="0">
-                <a:solidFill>
-                  <a:srgbClr val="A9BBAF"/>
-                </a:solidFill>
-                <a:latin typeface="Calibri" pitchFamily="34" charset="0"/>
-                <a:ea typeface="Calibri" pitchFamily="34" charset="-122"/>
-                <a:cs typeface="Calibri" pitchFamily="34" charset="-120"/>
-              </a:rPr>
-              <a:t>Push, PWA e gamificação</a:t>
-            </a:r>
-            <a:endParaRPr lang="en-US" sz="1500" dirty="0"/>
-          </a:p>
-          <a:p>
-            <a:pPr marL="342900" indent="-342900">
-              <a:spcAft>
-                <a:spcPts val="600"/>
-              </a:spcAft>
-              <a:buSzPct val="100000"/>
-              <a:buChar char="•"/>
-            </a:pPr>
-            <a:r>
-              <a:rPr lang="en-US" sz="1500" dirty="0">
-                <a:solidFill>
-                  <a:srgbClr val="A9BBAF"/>
-                </a:solidFill>
-                <a:latin typeface="Calibri" pitchFamily="34" charset="0"/>
-                <a:ea typeface="Calibri" pitchFamily="34" charset="-122"/>
-                <a:cs typeface="Calibri" pitchFamily="34" charset="-120"/>
-              </a:rPr>
-              <a:t>Deploy, domínio, backup e monitoramento</a:t>
-            </a:r>
-            <a:endParaRPr lang="en-US" sz="1500" dirty="0"/>
-          </a:p>
-          <a:p>
-            <a:pPr marL="342900" indent="-342900">
-              <a:spcAft>
-                <a:spcPts val="600"/>
-              </a:spcAft>
-              <a:buSzPct val="100000"/>
-              <a:buChar char="•"/>
-            </a:pPr>
-            <a:r>
-              <a:rPr lang="en-US" sz="1500" dirty="0">
-                <a:solidFill>
-                  <a:srgbClr val="A9BBAF"/>
-                </a:solidFill>
-                <a:latin typeface="Calibri" pitchFamily="34" charset="0"/>
-                <a:ea typeface="Calibri" pitchFamily="34" charset="-122"/>
-                <a:cs typeface="Calibri" pitchFamily="34" charset="-120"/>
-              </a:rPr>
-              <a:t>Divisão de frentes entre a dupla</a:t>
-            </a:r>
-            <a:endParaRPr lang="en-US" sz="1500" dirty="0"/>
-          </a:p>
-        </p:txBody>
-      </p:sp>
-    </p:spTree>
-  </p:cSld>
-  <p:clrMapOvr>
-    <a:masterClrMapping/>
-  </p:clrMapOvr>
-</p:sld>
-</file>
-
-<file path=ppt/slides/slide16.xml><?xml version="1.0" encoding="utf-8"?>
-<p:sld xmlns:a="http://schemas.openxmlformats.org/drawingml/2006/main" xmlns:r="http://schemas.openxmlformats.org/officeDocument/2006/relationships" xmlns:p="http://schemas.openxmlformats.org/presentationml/2006/main">
-  <p:cSld name="Slide 16">
-    <p:bg>
-      <p:bgPr>
-        <a:solidFill>
-          <a:srgbClr val="F4F7F5"/>
-        </a:solidFill>
-      </p:bgPr>
-    </p:bg>
-    <p:spTree>
-      <p:nvGrpSpPr>
-        <p:cNvPr id="1" name=""/>
-        <p:cNvGrpSpPr/>
-        <p:nvPr/>
-      </p:nvGrpSpPr>
-      <p:grpSpPr>
-        <a:xfrm>
-          <a:off x="0" y="0"/>
-          <a:ext cx="0" cy="0"/>
-          <a:chOff x="0" y="0"/>
-          <a:chExt cx="0" cy="0"/>
-        </a:xfrm>
-      </p:grpSpPr>
-      <p:sp>
-        <p:nvSpPr>
-          <p:cNvPr id="2" name="Shape 0"/>
-          <p:cNvSpPr/>
-          <p:nvPr/>
-        </p:nvSpPr>
-        <p:spPr>
-          <a:xfrm>
-            <a:off x="548640" y="475488"/>
-            <a:ext cx="118872" cy="118872"/>
-          </a:xfrm>
-          <a:prstGeom prst="ellipse">
-            <a:avLst/>
-          </a:prstGeom>
-          <a:solidFill>
-            <a:srgbClr val="E6B84D"/>
-          </a:solidFill>
-          <a:ln w="12700">
-            <a:solidFill>
-              <a:srgbClr val="E6B84D"/>
-            </a:solidFill>
-            <a:prstDash val="solid"/>
-          </a:ln>
-        </p:spPr>
-      </p:sp>
-      <p:sp>
-        <p:nvSpPr>
-          <p:cNvPr id="3" name="Text 1"/>
-          <p:cNvSpPr txBox="1"/>
-          <p:nvPr/>
-        </p:nvSpPr>
-        <p:spPr>
-          <a:xfrm>
-            <a:off x="777240" y="402336"/>
-            <a:ext cx="9144000" cy="274320"/>
-          </a:xfrm>
-          <a:prstGeom prst="rect">
-            <a:avLst/>
-          </a:prstGeom>
-          <a:noFill/>
-          <a:ln/>
-        </p:spPr>
-        <p:txBody>
-          <a:bodyPr wrap="square" lIns="0" tIns="0" rIns="0" bIns="0" rtlCol="0" anchor="t"/>
-          <a:lstStyle/>
-          <a:p>
-            <a:pPr indent="0" marL="0">
-              <a:buNone/>
-            </a:pPr>
-            <a:r>
-              <a:rPr lang="en-US" sz="1100" b="1" spc="200" kern="0" dirty="0">
-                <a:solidFill>
-                  <a:srgbClr val="2F6B4A"/>
-                </a:solidFill>
-                <a:latin typeface="Calibri" pitchFamily="34" charset="0"/>
-                <a:ea typeface="Calibri" pitchFamily="34" charset="-122"/>
-                <a:cs typeface="Calibri" pitchFamily="34" charset="-120"/>
-              </a:rPr>
-              <a:t>RISCOS E LIMITES</a:t>
-            </a:r>
-            <a:endParaRPr lang="en-US" sz="1100" dirty="0"/>
-          </a:p>
-        </p:txBody>
-      </p:sp>
-      <p:sp>
-        <p:nvSpPr>
-          <p:cNvPr id="4" name="Text 2"/>
-          <p:cNvSpPr txBox="1"/>
-          <p:nvPr/>
-        </p:nvSpPr>
-        <p:spPr>
-          <a:xfrm>
-            <a:off x="548640" y="713232"/>
-            <a:ext cx="11094415" cy="685800"/>
-          </a:xfrm>
-          <a:prstGeom prst="rect">
-            <a:avLst/>
-          </a:prstGeom>
-          <a:noFill/>
-          <a:ln/>
-        </p:spPr>
-        <p:txBody>
-          <a:bodyPr wrap="square" lIns="0" tIns="0" rIns="0" bIns="0" rtlCol="0" anchor="t"/>
-          <a:lstStyle/>
-          <a:p>
-            <a:pPr indent="0" marL="0">
-              <a:buNone/>
-            </a:pPr>
-            <a:r>
-              <a:rPr lang="en-US" sz="3200" b="1" dirty="0">
-                <a:solidFill>
-                  <a:srgbClr val="0F1E18"/>
-                </a:solidFill>
-                <a:latin typeface="Calibri" pitchFamily="34" charset="0"/>
-                <a:ea typeface="Calibri" pitchFamily="34" charset="-122"/>
-                <a:cs typeface="Calibri" pitchFamily="34" charset="-120"/>
-              </a:rPr>
-              <a:t>O que pode dar errado e o que fica de fora</a:t>
-            </a:r>
-            <a:endParaRPr lang="en-US" sz="3200" dirty="0"/>
-          </a:p>
-        </p:txBody>
-      </p:sp>
-      <p:sp>
-        <p:nvSpPr>
-          <p:cNvPr id="5" name="Text 3"/>
-          <p:cNvSpPr txBox="1"/>
-          <p:nvPr/>
-        </p:nvSpPr>
-        <p:spPr>
-          <a:xfrm>
-            <a:off x="548640" y="6473952"/>
-            <a:ext cx="5486400" cy="228600"/>
-          </a:xfrm>
-          <a:prstGeom prst="rect">
-            <a:avLst/>
-          </a:prstGeom>
-          <a:noFill/>
-          <a:ln/>
-        </p:spPr>
-        <p:txBody>
-          <a:bodyPr wrap="square" lIns="0" tIns="0" rIns="0" bIns="0" rtlCol="0" anchor="t"/>
-          <a:lstStyle/>
-          <a:p>
-            <a:pPr indent="0" marL="0">
-              <a:buNone/>
-            </a:pPr>
-            <a:r>
-              <a:rPr lang="en-US" sz="900" dirty="0">
-                <a:solidFill>
-                  <a:srgbClr val="7B8C82"/>
-                </a:solidFill>
-                <a:latin typeface="Calibri" pitchFamily="34" charset="0"/>
-                <a:ea typeface="Calibri" pitchFamily="34" charset="-122"/>
-                <a:cs typeface="Calibri" pitchFamily="34" charset="-120"/>
-              </a:rPr>
-              <a:t>Rota de Estudo · Documento de Visão</a:t>
-            </a:r>
-            <a:endParaRPr lang="en-US" sz="900" dirty="0"/>
-          </a:p>
-        </p:txBody>
-      </p:sp>
-      <p:sp>
-        <p:nvSpPr>
-          <p:cNvPr id="6" name="Text 4"/>
-          <p:cNvSpPr txBox="1"/>
-          <p:nvPr/>
-        </p:nvSpPr>
-        <p:spPr>
-          <a:xfrm>
-            <a:off x="10271455" y="6473952"/>
-            <a:ext cx="1371600" cy="228600"/>
-          </a:xfrm>
-          <a:prstGeom prst="rect">
-            <a:avLst/>
-          </a:prstGeom>
-          <a:noFill/>
-          <a:ln/>
-        </p:spPr>
-        <p:txBody>
-          <a:bodyPr wrap="square" lIns="0" tIns="0" rIns="0" bIns="0" rtlCol="0" anchor="t"/>
-          <a:lstStyle/>
-          <a:p>
-            <a:pPr algn="r" indent="0" marL="0">
-              <a:buNone/>
-            </a:pPr>
-            <a:r>
-              <a:rPr lang="en-US" sz="900" dirty="0">
-                <a:solidFill>
-                  <a:srgbClr val="7B8C82"/>
-                </a:solidFill>
-                <a:latin typeface="Calibri" pitchFamily="34" charset="0"/>
-                <a:ea typeface="Calibri" pitchFamily="34" charset="-122"/>
-                <a:cs typeface="Calibri" pitchFamily="34" charset="-120"/>
-              </a:rPr>
-              <a:t>16 / 17</a:t>
-            </a:r>
-            <a:endParaRPr lang="en-US" sz="900" dirty="0"/>
-          </a:p>
-        </p:txBody>
-      </p:sp>
-      <p:sp>
-        <p:nvSpPr>
-          <p:cNvPr id="7" name="Shape 5"/>
-          <p:cNvSpPr/>
-          <p:nvPr/>
-        </p:nvSpPr>
-        <p:spPr>
-          <a:xfrm>
-            <a:off x="548640" y="1600200"/>
-            <a:ext cx="6675120" cy="4572000"/>
-          </a:xfrm>
-          <a:prstGeom prst="roundRect">
-            <a:avLst>
-              <a:gd name="adj" fmla="val 2400"/>
-            </a:avLst>
-          </a:prstGeom>
-          <a:solidFill>
-            <a:srgbClr val="FFFFFF"/>
-          </a:solidFill>
-          <a:ln w="9525">
-            <a:solidFill>
-              <a:srgbClr val="C9D8CE"/>
-            </a:solidFill>
-            <a:prstDash val="solid"/>
-          </a:ln>
-        </p:spPr>
-      </p:sp>
-      <p:sp>
-        <p:nvSpPr>
-          <p:cNvPr id="8" name="Text 6"/>
-          <p:cNvSpPr txBox="1"/>
-          <p:nvPr/>
-        </p:nvSpPr>
-        <p:spPr>
-          <a:xfrm>
-            <a:off x="822960" y="1783080"/>
-            <a:ext cx="5486400" cy="365760"/>
-          </a:xfrm>
-          <a:prstGeom prst="rect">
-            <a:avLst/>
-          </a:prstGeom>
-          <a:noFill/>
-          <a:ln/>
-        </p:spPr>
-        <p:txBody>
-          <a:bodyPr wrap="square" lIns="0" tIns="0" rIns="0" bIns="0" rtlCol="0" anchor="t"/>
-          <a:lstStyle/>
-          <a:p>
-            <a:pPr indent="0" marL="0">
-              <a:buNone/>
-            </a:pPr>
-            <a:r>
-              <a:rPr lang="en-US" sz="1700" b="1" dirty="0">
-                <a:solidFill>
-                  <a:srgbClr val="0F1E18"/>
-                </a:solidFill>
-                <a:latin typeface="Calibri" pitchFamily="34" charset="0"/>
-                <a:ea typeface="Calibri" pitchFamily="34" charset="-122"/>
-                <a:cs typeface="Calibri" pitchFamily="34" charset="-120"/>
-              </a:rPr>
-              <a:t>Riscos e mitigação</a:t>
-            </a:r>
-            <a:endParaRPr lang="en-US" sz="1700" dirty="0"/>
-          </a:p>
-        </p:txBody>
-      </p:sp>
-      <p:pic>
-        <p:nvPicPr>
-          <p:cNvPr id="9" name="Image 0" descr="preencoded.png">    </p:cNvPr>
-          <p:cNvPicPr>
-            <a:picLocks noChangeAspect="1"/>
-          </p:cNvPicPr>
-          <p:nvPr/>
-        </p:nvPicPr>
-        <p:blipFill>
-          <a:blip r:embed="rId1"/>
-          <a:stretch>
-            <a:fillRect/>
-          </a:stretch>
-        </p:blipFill>
-        <p:spPr>
-          <a:xfrm>
-            <a:off x="822960" y="2313432"/>
-            <a:ext cx="292608" cy="292608"/>
-          </a:xfrm>
-          <a:prstGeom prst="rect">
-            <a:avLst/>
-          </a:prstGeom>
-        </p:spPr>
-      </p:pic>
-      <p:sp>
-        <p:nvSpPr>
-          <p:cNvPr id="10" name="Text 7"/>
-          <p:cNvSpPr txBox="1"/>
-          <p:nvPr/>
-        </p:nvSpPr>
-        <p:spPr>
-          <a:xfrm>
-            <a:off x="1280160" y="2286000"/>
-            <a:ext cx="5760720" cy="320040"/>
-          </a:xfrm>
-          <a:prstGeom prst="rect">
-            <a:avLst/>
-          </a:prstGeom>
-          <a:noFill/>
-          <a:ln/>
-        </p:spPr>
-        <p:txBody>
-          <a:bodyPr wrap="square" lIns="0" tIns="0" rIns="0" bIns="0" rtlCol="0" anchor="t"/>
-          <a:lstStyle/>
-          <a:p>
-            <a:pPr indent="0" marL="0">
-              <a:buNone/>
-            </a:pPr>
-            <a:r>
-              <a:rPr lang="en-US" sz="1350" b="1" dirty="0">
-                <a:solidFill>
-                  <a:srgbClr val="0F1E18"/>
-                </a:solidFill>
-                <a:latin typeface="Calibri" pitchFamily="34" charset="0"/>
-                <a:ea typeface="Calibri" pitchFamily="34" charset="-122"/>
-                <a:cs typeface="Calibri" pitchFamily="34" charset="-120"/>
-              </a:rPr>
-              <a:t>Curva de aprendizado do Spring</a:t>
-            </a:r>
-            <a:endParaRPr lang="en-US" sz="1350" dirty="0"/>
-          </a:p>
-        </p:txBody>
-      </p:sp>
-      <p:sp>
-        <p:nvSpPr>
-          <p:cNvPr id="11" name="Text 8"/>
-          <p:cNvSpPr txBox="1"/>
-          <p:nvPr/>
-        </p:nvSpPr>
-        <p:spPr>
-          <a:xfrm>
-            <a:off x="1280160" y="2615184"/>
-            <a:ext cx="5760720" cy="457200"/>
-          </a:xfrm>
-          <a:prstGeom prst="rect">
-            <a:avLst/>
-          </a:prstGeom>
-          <a:noFill/>
-          <a:ln/>
-        </p:spPr>
-        <p:txBody>
-          <a:bodyPr wrap="square" lIns="0" tIns="0" rIns="0" bIns="0" rtlCol="0" anchor="t"/>
-          <a:lstStyle/>
-          <a:p>
-            <a:pPr indent="0" marL="0">
-              <a:buNone/>
-            </a:pPr>
-            <a:r>
-              <a:rPr lang="en-US" sz="1250" dirty="0">
-                <a:solidFill>
-                  <a:srgbClr val="3A4A42"/>
-                </a:solidFill>
-                <a:latin typeface="Calibri" pitchFamily="34" charset="0"/>
-                <a:ea typeface="Calibri" pitchFamily="34" charset="-122"/>
-                <a:cs typeface="Calibri" pitchFamily="34" charset="-120"/>
-              </a:rPr>
-              <a:t>Contrato definido antes do código; primeira fatia pequena.</a:t>
-            </a:r>
-            <a:endParaRPr lang="en-US" sz="1250" dirty="0"/>
-          </a:p>
-        </p:txBody>
-      </p:sp>
-      <p:pic>
-        <p:nvPicPr>
-          <p:cNvPr id="12" name="Image 1" descr="preencoded.png">    </p:cNvPr>
-          <p:cNvPicPr>
-            <a:picLocks noChangeAspect="1"/>
-          </p:cNvPicPr>
-          <p:nvPr/>
-        </p:nvPicPr>
-        <p:blipFill>
-          <a:blip r:embed="rId2"/>
-          <a:stretch>
-            <a:fillRect/>
-          </a:stretch>
-        </p:blipFill>
-        <p:spPr>
-          <a:xfrm>
-            <a:off x="822960" y="3246120"/>
-            <a:ext cx="292608" cy="292608"/>
-          </a:xfrm>
-          <a:prstGeom prst="rect">
-            <a:avLst/>
-          </a:prstGeom>
-        </p:spPr>
-      </p:pic>
-      <p:sp>
-        <p:nvSpPr>
-          <p:cNvPr id="13" name="Text 9"/>
-          <p:cNvSpPr txBox="1"/>
-          <p:nvPr/>
-        </p:nvSpPr>
-        <p:spPr>
-          <a:xfrm>
-            <a:off x="1280160" y="3218688"/>
-            <a:ext cx="5760720" cy="320040"/>
-          </a:xfrm>
-          <a:prstGeom prst="rect">
-            <a:avLst/>
-          </a:prstGeom>
-          <a:noFill/>
-          <a:ln/>
-        </p:spPr>
-        <p:txBody>
-          <a:bodyPr wrap="square" lIns="0" tIns="0" rIns="0" bIns="0" rtlCol="0" anchor="t"/>
-          <a:lstStyle/>
-          <a:p>
-            <a:pPr indent="0" marL="0">
-              <a:buNone/>
-            </a:pPr>
-            <a:r>
-              <a:rPr lang="en-US" sz="1350" b="1" dirty="0">
-                <a:solidFill>
-                  <a:srgbClr val="0F1E18"/>
-                </a:solidFill>
-                <a:latin typeface="Calibri" pitchFamily="34" charset="0"/>
-                <a:ea typeface="Calibri" pitchFamily="34" charset="-122"/>
-                <a:cs typeface="Calibri" pitchFamily="34" charset="-120"/>
-              </a:rPr>
-              <a:t>Dupla pequena, prazos da disciplina</a:t>
-            </a:r>
-            <a:endParaRPr lang="en-US" sz="1350" dirty="0"/>
-          </a:p>
-        </p:txBody>
-      </p:sp>
-      <p:sp>
-        <p:nvSpPr>
-          <p:cNvPr id="14" name="Text 10"/>
-          <p:cNvSpPr txBox="1"/>
-          <p:nvPr/>
-        </p:nvSpPr>
-        <p:spPr>
-          <a:xfrm>
-            <a:off x="1280160" y="3547872"/>
-            <a:ext cx="5760720" cy="457200"/>
-          </a:xfrm>
-          <a:prstGeom prst="rect">
-            <a:avLst/>
-          </a:prstGeom>
-          <a:noFill/>
-          <a:ln/>
-        </p:spPr>
-        <p:txBody>
-          <a:bodyPr wrap="square" lIns="0" tIns="0" rIns="0" bIns="0" rtlCol="0" anchor="t"/>
-          <a:lstStyle/>
-          <a:p>
-            <a:pPr indent="0" marL="0">
-              <a:buNone/>
-            </a:pPr>
-            <a:r>
-              <a:rPr lang="en-US" sz="1250" dirty="0">
-                <a:solidFill>
-                  <a:srgbClr val="3A4A42"/>
-                </a:solidFill>
-                <a:latin typeface="Calibri" pitchFamily="34" charset="0"/>
-                <a:ea typeface="Calibri" pitchFamily="34" charset="-122"/>
-                <a:cs typeface="Calibri" pitchFamily="34" charset="-120"/>
-              </a:rPr>
-              <a:t>Prioridades P1–P3 e escopo que não cresce na empolgação.</a:t>
-            </a:r>
-            <a:endParaRPr lang="en-US" sz="1250" dirty="0"/>
-          </a:p>
-        </p:txBody>
-      </p:sp>
-      <p:pic>
-        <p:nvPicPr>
-          <p:cNvPr id="15" name="Image 2" descr="preencoded.png">    </p:cNvPr>
-          <p:cNvPicPr>
-            <a:picLocks noChangeAspect="1"/>
-          </p:cNvPicPr>
-          <p:nvPr/>
-        </p:nvPicPr>
-        <p:blipFill>
-          <a:blip r:embed="rId3"/>
-          <a:stretch>
-            <a:fillRect/>
-          </a:stretch>
-        </p:blipFill>
-        <p:spPr>
-          <a:xfrm>
-            <a:off x="822960" y="4178808"/>
-            <a:ext cx="292608" cy="292608"/>
-          </a:xfrm>
-          <a:prstGeom prst="rect">
-            <a:avLst/>
-          </a:prstGeom>
-        </p:spPr>
-      </p:pic>
-      <p:sp>
-        <p:nvSpPr>
-          <p:cNvPr id="16" name="Text 11"/>
-          <p:cNvSpPr txBox="1"/>
-          <p:nvPr/>
-        </p:nvSpPr>
-        <p:spPr>
-          <a:xfrm>
-            <a:off x="1280160" y="4151376"/>
-            <a:ext cx="5760720" cy="320040"/>
-          </a:xfrm>
-          <a:prstGeom prst="rect">
-            <a:avLst/>
-          </a:prstGeom>
-          <a:noFill/>
-          <a:ln/>
-        </p:spPr>
-        <p:txBody>
-          <a:bodyPr wrap="square" lIns="0" tIns="0" rIns="0" bIns="0" rtlCol="0" anchor="t"/>
-          <a:lstStyle/>
-          <a:p>
-            <a:pPr indent="0" marL="0">
-              <a:buNone/>
-            </a:pPr>
-            <a:r>
-              <a:rPr lang="en-US" sz="1350" b="1" dirty="0">
-                <a:solidFill>
-                  <a:srgbClr val="0F1E18"/>
-                </a:solidFill>
-                <a:latin typeface="Calibri" pitchFamily="34" charset="0"/>
-                <a:ea typeface="Calibri" pitchFamily="34" charset="-122"/>
-                <a:cs typeface="Calibri" pitchFamily="34" charset="-120"/>
-              </a:rPr>
-              <a:t>Web Push no iPhone só com o app instalado na tela inicial</a:t>
-            </a:r>
-            <a:endParaRPr lang="en-US" sz="1350" dirty="0"/>
-          </a:p>
-        </p:txBody>
-      </p:sp>
-      <p:sp>
-        <p:nvSpPr>
-          <p:cNvPr id="17" name="Text 12"/>
-          <p:cNvSpPr txBox="1"/>
-          <p:nvPr/>
-        </p:nvSpPr>
-        <p:spPr>
-          <a:xfrm>
-            <a:off x="1280160" y="4480560"/>
-            <a:ext cx="5760720" cy="457200"/>
-          </a:xfrm>
-          <a:prstGeom prst="rect">
-            <a:avLst/>
-          </a:prstGeom>
-          <a:noFill/>
-          <a:ln/>
-        </p:spPr>
-        <p:txBody>
-          <a:bodyPr wrap="square" lIns="0" tIns="0" rIns="0" bIns="0" rtlCol="0" anchor="t"/>
-          <a:lstStyle/>
-          <a:p>
-            <a:pPr indent="0" marL="0">
-              <a:buNone/>
-            </a:pPr>
-            <a:r>
-              <a:rPr lang="en-US" sz="1250" dirty="0">
-                <a:solidFill>
-                  <a:srgbClr val="3A4A42"/>
-                </a:solidFill>
-                <a:latin typeface="Calibri" pitchFamily="34" charset="0"/>
-                <a:ea typeface="Calibri" pitchFamily="34" charset="-122"/>
-                <a:cs typeface="Calibri" pitchFamily="34" charset="-120"/>
-              </a:rPr>
-              <a:t>PWA instalável e o painel Hoje como fonte principal.</a:t>
-            </a:r>
-            <a:endParaRPr lang="en-US" sz="1250" dirty="0"/>
-          </a:p>
-        </p:txBody>
-      </p:sp>
-      <p:pic>
-        <p:nvPicPr>
-          <p:cNvPr id="18" name="Image 3" descr="preencoded.png">    </p:cNvPr>
-          <p:cNvPicPr>
-            <a:picLocks noChangeAspect="1"/>
-          </p:cNvPicPr>
-          <p:nvPr/>
-        </p:nvPicPr>
-        <p:blipFill>
-          <a:blip r:embed="rId4"/>
-          <a:stretch>
-            <a:fillRect/>
-          </a:stretch>
-        </p:blipFill>
-        <p:spPr>
-          <a:xfrm>
-            <a:off x="822960" y="5111496"/>
-            <a:ext cx="292608" cy="292608"/>
-          </a:xfrm>
-          <a:prstGeom prst="rect">
-            <a:avLst/>
-          </a:prstGeom>
-        </p:spPr>
-      </p:pic>
-      <p:sp>
-        <p:nvSpPr>
-          <p:cNvPr id="19" name="Text 13"/>
-          <p:cNvSpPr txBox="1"/>
-          <p:nvPr/>
-        </p:nvSpPr>
-        <p:spPr>
-          <a:xfrm>
-            <a:off x="1280160" y="5084064"/>
-            <a:ext cx="5760720" cy="320040"/>
-          </a:xfrm>
-          <a:prstGeom prst="rect">
-            <a:avLst/>
-          </a:prstGeom>
-          <a:noFill/>
-          <a:ln/>
-        </p:spPr>
-        <p:txBody>
-          <a:bodyPr wrap="square" lIns="0" tIns="0" rIns="0" bIns="0" rtlCol="0" anchor="t"/>
-          <a:lstStyle/>
-          <a:p>
-            <a:pPr indent="0" marL="0">
-              <a:buNone/>
-            </a:pPr>
-            <a:r>
-              <a:rPr lang="en-US" sz="1350" b="1" dirty="0">
-                <a:solidFill>
-                  <a:srgbClr val="0F1E18"/>
-                </a:solidFill>
-                <a:latin typeface="Calibri" pitchFamily="34" charset="0"/>
-                <a:ea typeface="Calibri" pitchFamily="34" charset="-122"/>
-                <a:cs typeface="Calibri" pitchFamily="34" charset="-120"/>
-              </a:rPr>
-              <a:t>VPS única não é alta disponibilidade</a:t>
-            </a:r>
-            <a:endParaRPr lang="en-US" sz="1350" dirty="0"/>
-          </a:p>
-        </p:txBody>
-      </p:sp>
-      <p:sp>
-        <p:nvSpPr>
-          <p:cNvPr id="20" name="Text 14"/>
-          <p:cNvSpPr txBox="1"/>
-          <p:nvPr/>
-        </p:nvSpPr>
-        <p:spPr>
-          <a:xfrm>
-            <a:off x="1280160" y="5413248"/>
-            <a:ext cx="5760720" cy="457200"/>
-          </a:xfrm>
-          <a:prstGeom prst="rect">
-            <a:avLst/>
-          </a:prstGeom>
-          <a:noFill/>
-          <a:ln/>
-        </p:spPr>
-        <p:txBody>
-          <a:bodyPr wrap="square" lIns="0" tIns="0" rIns="0" bIns="0" rtlCol="0" anchor="t"/>
-          <a:lstStyle/>
-          <a:p>
-            <a:pPr indent="0" marL="0">
-              <a:buNone/>
-            </a:pPr>
-            <a:r>
-              <a:rPr lang="en-US" sz="1250" dirty="0">
-                <a:solidFill>
-                  <a:srgbClr val="3A4A42"/>
-                </a:solidFill>
-                <a:latin typeface="Calibri" pitchFamily="34" charset="0"/>
-                <a:ea typeface="Calibri" pitchFamily="34" charset="-122"/>
-                <a:cs typeface="Calibri" pitchFamily="34" charset="-120"/>
-              </a:rPr>
-              <a:t>Backup com restauração testada, health checks e monitor.</a:t>
-            </a:r>
-            <a:endParaRPr lang="en-US" sz="1250" dirty="0"/>
-          </a:p>
-        </p:txBody>
-      </p:sp>
-      <p:sp>
-        <p:nvSpPr>
-          <p:cNvPr id="21" name="Shape 15"/>
-          <p:cNvSpPr/>
-          <p:nvPr/>
-        </p:nvSpPr>
-        <p:spPr>
-          <a:xfrm>
-            <a:off x="7498080" y="1600200"/>
-            <a:ext cx="4142232" cy="4572000"/>
-          </a:xfrm>
-          <a:prstGeom prst="roundRect">
-            <a:avLst>
-              <a:gd name="adj" fmla="val 2649"/>
-            </a:avLst>
-          </a:prstGeom>
-          <a:solidFill>
-            <a:srgbClr val="0F1E18"/>
-          </a:solidFill>
-          <a:ln w="9525">
-            <a:solidFill>
-              <a:srgbClr val="0F1E18"/>
-            </a:solidFill>
-            <a:prstDash val="solid"/>
-          </a:ln>
-        </p:spPr>
-      </p:sp>
-      <p:sp>
-        <p:nvSpPr>
-          <p:cNvPr id="22" name="Text 16"/>
-          <p:cNvSpPr txBox="1"/>
-          <p:nvPr/>
-        </p:nvSpPr>
-        <p:spPr>
-          <a:xfrm>
-            <a:off x="7772400" y="1783080"/>
-            <a:ext cx="3657600" cy="365760"/>
-          </a:xfrm>
-          <a:prstGeom prst="rect">
-            <a:avLst/>
-          </a:prstGeom>
-          <a:noFill/>
-          <a:ln/>
-        </p:spPr>
-        <p:txBody>
-          <a:bodyPr wrap="square" lIns="0" tIns="0" rIns="0" bIns="0" rtlCol="0" anchor="t"/>
-          <a:lstStyle/>
-          <a:p>
-            <a:pPr indent="0" marL="0">
-              <a:buNone/>
-            </a:pPr>
-            <a:r>
-              <a:rPr lang="en-US" sz="1700" b="1" dirty="0">
-                <a:solidFill>
-                  <a:srgbClr val="FFFFFF"/>
-                </a:solidFill>
-                <a:latin typeface="Calibri" pitchFamily="34" charset="0"/>
-                <a:ea typeface="Calibri" pitchFamily="34" charset="-122"/>
-                <a:cs typeface="Calibri" pitchFamily="34" charset="-120"/>
-              </a:rPr>
-              <a:t>Fora do MVP</a:t>
-            </a:r>
-            <a:endParaRPr lang="en-US" sz="1700" dirty="0"/>
-          </a:p>
-        </p:txBody>
-      </p:sp>
-      <p:sp>
-        <p:nvSpPr>
-          <p:cNvPr id="23" name="Text 17"/>
-          <p:cNvSpPr txBox="1"/>
-          <p:nvPr/>
-        </p:nvSpPr>
-        <p:spPr>
-          <a:xfrm>
-            <a:off x="7772400" y="2286000"/>
-            <a:ext cx="3657600" cy="3749040"/>
-          </a:xfrm>
-          <a:prstGeom prst="rect">
-            <a:avLst/>
-          </a:prstGeom>
-          <a:noFill/>
-          <a:ln/>
-        </p:spPr>
-        <p:txBody>
-          <a:bodyPr wrap="square" lIns="0" tIns="0" rIns="0" bIns="0" rtlCol="0" anchor="t"/>
-          <a:lstStyle/>
-          <a:p>
-            <a:pPr marL="342900" indent="-342900">
-              <a:spcAft>
-                <a:spcPts val="700"/>
-              </a:spcAft>
-              <a:buSzPct val="100000"/>
-              <a:buChar char="•"/>
-            </a:pPr>
-            <a:r>
-              <a:rPr lang="en-US" sz="1350" dirty="0">
-                <a:solidFill>
-                  <a:srgbClr val="A9BBAF"/>
-                </a:solidFill>
-                <a:latin typeface="Calibri" pitchFamily="34" charset="0"/>
-                <a:ea typeface="Calibri" pitchFamily="34" charset="-122"/>
-                <a:cs typeface="Calibri" pitchFamily="34" charset="-120"/>
-              </a:rPr>
-              <a:t>Edição offline com sincronização</a:t>
-            </a:r>
-            <a:endParaRPr lang="en-US" sz="1350" dirty="0"/>
-          </a:p>
-          <a:p>
-            <a:pPr marL="342900" indent="-342900">
-              <a:spcAft>
-                <a:spcPts val="700"/>
-              </a:spcAft>
-              <a:buSzPct val="100000"/>
-              <a:buChar char="•"/>
-            </a:pPr>
-            <a:r>
-              <a:rPr lang="en-US" sz="1350" dirty="0">
-                <a:solidFill>
-                  <a:srgbClr val="A9BBAF"/>
-                </a:solidFill>
-                <a:latin typeface="Calibri" pitchFamily="34" charset="0"/>
-                <a:ea typeface="Calibri" pitchFamily="34" charset="-122"/>
-                <a:cs typeface="Calibri" pitchFamily="34" charset="-120"/>
-              </a:rPr>
-              <a:t>Arrastar e soltar no calendário</a:t>
-            </a:r>
-            <a:endParaRPr lang="en-US" sz="1350" dirty="0"/>
-          </a:p>
-          <a:p>
-            <a:pPr marL="342900" indent="-342900">
-              <a:spcAft>
-                <a:spcPts val="700"/>
-              </a:spcAft>
-              <a:buSzPct val="100000"/>
-              <a:buChar char="•"/>
-            </a:pPr>
-            <a:r>
-              <a:rPr lang="en-US" sz="1350" dirty="0">
-                <a:solidFill>
-                  <a:srgbClr val="A9BBAF"/>
-                </a:solidFill>
-                <a:latin typeface="Calibri" pitchFamily="34" charset="0"/>
-                <a:ea typeface="Calibri" pitchFamily="34" charset="-122"/>
-                <a:cs typeface="Calibri" pitchFamily="34" charset="-120"/>
-              </a:rPr>
-              <a:t>Recorrência genérica (RRULE)</a:t>
-            </a:r>
-            <a:endParaRPr lang="en-US" sz="1350" dirty="0"/>
-          </a:p>
-          <a:p>
-            <a:pPr marL="342900" indent="-342900">
-              <a:spcAft>
-                <a:spcPts val="700"/>
-              </a:spcAft>
-              <a:buSzPct val="100000"/>
-              <a:buChar char="•"/>
-            </a:pPr>
-            <a:r>
-              <a:rPr lang="en-US" sz="1350" dirty="0">
-                <a:solidFill>
-                  <a:srgbClr val="A9BBAF"/>
-                </a:solidFill>
-                <a:latin typeface="Calibri" pitchFamily="34" charset="0"/>
-                <a:ea typeface="Calibri" pitchFamily="34" charset="-122"/>
-                <a:cs typeface="Calibri" pitchFamily="34" charset="-120"/>
-              </a:rPr>
-              <a:t>Troca de horário e aula extra</a:t>
-            </a:r>
-            <a:endParaRPr lang="en-US" sz="1350" dirty="0"/>
-          </a:p>
-          <a:p>
-            <a:pPr marL="342900" indent="-342900">
-              <a:spcAft>
-                <a:spcPts val="700"/>
-              </a:spcAft>
-              <a:buSzPct val="100000"/>
-              <a:buChar char="•"/>
-            </a:pPr>
-            <a:r>
-              <a:rPr lang="en-US" sz="1350" dirty="0">
-                <a:solidFill>
-                  <a:srgbClr val="A9BBAF"/>
-                </a:solidFill>
-                <a:latin typeface="Calibri" pitchFamily="34" charset="0"/>
-                <a:ea typeface="Calibri" pitchFamily="34" charset="-122"/>
-                <a:cs typeface="Calibri" pitchFamily="34" charset="-120"/>
-              </a:rPr>
-              <a:t>App nativo (Expo, mesma API)</a:t>
-            </a:r>
-            <a:endParaRPr lang="en-US" sz="1350" dirty="0"/>
-          </a:p>
-          <a:p>
-            <a:pPr marL="342900" indent="-342900">
-              <a:spcAft>
-                <a:spcPts val="700"/>
-              </a:spcAft>
-              <a:buSzPct val="100000"/>
-              <a:buChar char="•"/>
-            </a:pPr>
-            <a:r>
-              <a:rPr lang="en-US" sz="1350" dirty="0">
-                <a:solidFill>
-                  <a:srgbClr val="A9BBAF"/>
-                </a:solidFill>
-                <a:latin typeface="Calibri" pitchFamily="34" charset="0"/>
-                <a:ea typeface="Calibri" pitchFamily="34" charset="-122"/>
-                <a:cs typeface="Calibri" pitchFamily="34" charset="-120"/>
-              </a:rPr>
-              <a:t>Punições na gamificação</a:t>
-            </a:r>
-            <a:endParaRPr lang="en-US" sz="1350" dirty="0"/>
-          </a:p>
-          <a:p>
-            <a:pPr marL="342900" indent="-342900">
-              <a:spcAft>
-                <a:spcPts val="700"/>
-              </a:spcAft>
-              <a:buSzPct val="100000"/>
-              <a:buChar char="•"/>
-            </a:pPr>
-            <a:r>
-              <a:rPr lang="en-US" sz="1350" dirty="0">
-                <a:solidFill>
-                  <a:srgbClr val="A9BBAF"/>
-                </a:solidFill>
-                <a:latin typeface="Calibri" pitchFamily="34" charset="0"/>
-                <a:ea typeface="Calibri" pitchFamily="34" charset="-122"/>
-                <a:cs typeface="Calibri" pitchFamily="34" charset="-120"/>
-              </a:rPr>
-              <a:t>Grade compartilhada em grupo</a:t>
-            </a:r>
-            <a:endParaRPr lang="en-US" sz="1350" dirty="0"/>
-          </a:p>
-          <a:p>
-            <a:pPr marL="342900" indent="-342900">
-              <a:spcAft>
-                <a:spcPts val="700"/>
-              </a:spcAft>
-              <a:buSzPct val="100000"/>
-              <a:buChar char="•"/>
-            </a:pPr>
-            <a:r>
-              <a:rPr lang="en-US" sz="1350" dirty="0">
-                <a:solidFill>
-                  <a:srgbClr val="A9BBAF"/>
-                </a:solidFill>
-                <a:latin typeface="Calibri" pitchFamily="34" charset="0"/>
-                <a:ea typeface="Calibri" pitchFamily="34" charset="-122"/>
-                <a:cs typeface="Calibri" pitchFamily="34" charset="-120"/>
-              </a:rPr>
-              <a:t>Plano pago</a:t>
-            </a:r>
-            <a:endParaRPr lang="en-US" sz="1350" dirty="0"/>
-          </a:p>
-        </p:txBody>
-      </p:sp>
-    </p:spTree>
-  </p:cSld>
-  <p:clrMapOvr>
-    <a:masterClrMapping/>
-  </p:clrMapOvr>
-</p:sld>
-</file>
-
-<file path=ppt/slides/slide17.xml><?xml version="1.0" encoding="utf-8"?>
-<p:sld xmlns:a="http://schemas.openxmlformats.org/drawingml/2006/main" xmlns:r="http://schemas.openxmlformats.org/officeDocument/2006/relationships" xmlns:p="http://schemas.openxmlformats.org/presentationml/2006/main">
-  <p:cSld name="Slide 17">
-    <p:bg>
-      <p:bgPr>
-        <a:solidFill>
-          <a:srgbClr val="0F1E18"/>
-        </a:solidFill>
-      </p:bgPr>
-    </p:bg>
-    <p:spTree>
-      <p:nvGrpSpPr>
-        <p:cNvPr id="1" name=""/>
-        <p:cNvGrpSpPr/>
-        <p:nvPr/>
-      </p:nvGrpSpPr>
-      <p:grpSpPr>
-        <a:xfrm>
-          <a:off x="0" y="0"/>
-          <a:ext cx="0" cy="0"/>
-          <a:chOff x="0" y="0"/>
-          <a:chExt cx="0" cy="0"/>
-        </a:xfrm>
-      </p:grpSpPr>
-      <p:sp>
-        <p:nvSpPr>
-          <p:cNvPr id="2" name="Shape 0"/>
-          <p:cNvSpPr/>
-          <p:nvPr/>
-        </p:nvSpPr>
-        <p:spPr>
-          <a:xfrm>
-            <a:off x="548640" y="475488"/>
-            <a:ext cx="118872" cy="118872"/>
-          </a:xfrm>
-          <a:prstGeom prst="ellipse">
-            <a:avLst/>
-          </a:prstGeom>
-          <a:solidFill>
-            <a:srgbClr val="E6B84D"/>
-          </a:solidFill>
-          <a:ln w="12700">
-            <a:solidFill>
-              <a:srgbClr val="E6B84D"/>
-            </a:solidFill>
-            <a:prstDash val="solid"/>
-          </a:ln>
-        </p:spPr>
-      </p:sp>
-      <p:sp>
-        <p:nvSpPr>
-          <p:cNvPr id="3" name="Text 1"/>
-          <p:cNvSpPr txBox="1"/>
-          <p:nvPr/>
-        </p:nvSpPr>
-        <p:spPr>
-          <a:xfrm>
-            <a:off x="777240" y="402336"/>
-            <a:ext cx="9144000" cy="274320"/>
-          </a:xfrm>
-          <a:prstGeom prst="rect">
-            <a:avLst/>
-          </a:prstGeom>
-          <a:noFill/>
-          <a:ln/>
-        </p:spPr>
-        <p:txBody>
-          <a:bodyPr wrap="square" lIns="0" tIns="0" rIns="0" bIns="0" rtlCol="0" anchor="t"/>
-          <a:lstStyle/>
-          <a:p>
-            <a:pPr indent="0" marL="0">
-              <a:buNone/>
-            </a:pPr>
-            <a:r>
-              <a:rPr lang="en-US" sz="1100" b="1" spc="200" kern="0" dirty="0">
-                <a:solidFill>
-                  <a:srgbClr val="93C7A6"/>
-                </a:solidFill>
-                <a:latin typeface="Calibri" pitchFamily="34" charset="0"/>
-                <a:ea typeface="Calibri" pitchFamily="34" charset="-122"/>
-                <a:cs typeface="Calibri" pitchFamily="34" charset="-120"/>
-              </a:rPr>
-              <a:t>CRITÉRIO DE SUCESSO</a:t>
-            </a:r>
-            <a:endParaRPr lang="en-US" sz="1100" dirty="0"/>
-          </a:p>
-        </p:txBody>
-      </p:sp>
-      <p:sp>
-        <p:nvSpPr>
-          <p:cNvPr id="4" name="Text 2"/>
-          <p:cNvSpPr txBox="1"/>
-          <p:nvPr/>
-        </p:nvSpPr>
-        <p:spPr>
-          <a:xfrm>
-            <a:off x="548640" y="713232"/>
-            <a:ext cx="11064240" cy="685800"/>
-          </a:xfrm>
-          <a:prstGeom prst="rect">
-            <a:avLst/>
-          </a:prstGeom>
-          <a:noFill/>
-          <a:ln/>
-        </p:spPr>
-        <p:txBody>
-          <a:bodyPr wrap="square" lIns="0" tIns="0" rIns="0" bIns="0" rtlCol="0" anchor="t"/>
-          <a:lstStyle/>
-          <a:p>
-            <a:pPr indent="0" marL="0">
-              <a:buNone/>
-            </a:pPr>
-            <a:r>
-              <a:rPr lang="en-US" sz="3000" b="1" dirty="0">
-                <a:solidFill>
-                  <a:srgbClr val="FFFFFF"/>
-                </a:solidFill>
-                <a:latin typeface="Calibri" pitchFamily="34" charset="0"/>
-                <a:ea typeface="Calibri" pitchFamily="34" charset="-122"/>
-                <a:cs typeface="Calibri" pitchFamily="34" charset="-120"/>
-              </a:rPr>
-              <a:t>O MVP está pronto quando esta rota funciona de ponta a ponta</a:t>
-            </a:r>
-            <a:endParaRPr lang="en-US" sz="3000" dirty="0"/>
-          </a:p>
-        </p:txBody>
-      </p:sp>
-      <p:sp>
-        <p:nvSpPr>
-          <p:cNvPr id="5" name="Shape 3"/>
-          <p:cNvSpPr/>
-          <p:nvPr/>
-        </p:nvSpPr>
-        <p:spPr>
-          <a:xfrm>
-            <a:off x="1188720" y="2331720"/>
-            <a:ext cx="9784080" cy="91"/>
-          </a:xfrm>
-          <a:prstGeom prst="line">
-            <a:avLst/>
-          </a:prstGeom>
-          <a:noFill/>
-          <a:ln w="38100">
-            <a:solidFill>
-              <a:srgbClr val="93C7A6"/>
-            </a:solidFill>
-            <a:prstDash val="dash"/>
-          </a:ln>
-        </p:spPr>
-      </p:sp>
-      <p:sp>
-        <p:nvSpPr>
-          <p:cNvPr id="6" name="Shape 4"/>
-          <p:cNvSpPr/>
-          <p:nvPr/>
-        </p:nvSpPr>
-        <p:spPr>
-          <a:xfrm>
-            <a:off x="969264" y="2112264"/>
-            <a:ext cx="438912" cy="438912"/>
-          </a:xfrm>
-          <a:prstGeom prst="ellipse">
-            <a:avLst/>
-          </a:prstGeom>
-          <a:solidFill>
-            <a:srgbClr val="0F1E18"/>
-          </a:solidFill>
-          <a:ln w="31750">
-            <a:solidFill>
-              <a:srgbClr val="93C7A6"/>
-            </a:solidFill>
-            <a:prstDash val="solid"/>
-          </a:ln>
-        </p:spPr>
-      </p:sp>
-      <p:sp>
-        <p:nvSpPr>
-          <p:cNvPr id="7" name="Text 5"/>
-          <p:cNvSpPr txBox="1"/>
-          <p:nvPr/>
-        </p:nvSpPr>
-        <p:spPr>
-          <a:xfrm>
-            <a:off x="182880" y="2743200"/>
-            <a:ext cx="2011680" cy="731520"/>
-          </a:xfrm>
-          <a:prstGeom prst="rect">
-            <a:avLst/>
-          </a:prstGeom>
-          <a:noFill/>
-          <a:ln/>
-        </p:spPr>
-        <p:txBody>
-          <a:bodyPr wrap="square" lIns="0" tIns="0" rIns="0" bIns="0" rtlCol="0" anchor="t"/>
-          <a:lstStyle/>
-          <a:p>
-            <a:pPr algn="ctr" indent="0" marL="0">
-              <a:buNone/>
-            </a:pPr>
-            <a:r>
-              <a:rPr lang="en-US" sz="1350" b="1" dirty="0">
-                <a:solidFill>
-                  <a:srgbClr val="FFFFFF"/>
-                </a:solidFill>
-                <a:latin typeface="Calibri" pitchFamily="34" charset="0"/>
-                <a:ea typeface="Calibri" pitchFamily="34" charset="-122"/>
-                <a:cs typeface="Calibri" pitchFamily="34" charset="-120"/>
-              </a:rPr>
-              <a:t>Cria a conta e entra</a:t>
-            </a:r>
-            <a:endParaRPr lang="en-US" sz="1350" dirty="0"/>
-          </a:p>
-        </p:txBody>
-      </p:sp>
-      <p:sp>
-        <p:nvSpPr>
-          <p:cNvPr id="8" name="Shape 6"/>
-          <p:cNvSpPr/>
-          <p:nvPr/>
-        </p:nvSpPr>
-        <p:spPr>
-          <a:xfrm>
-            <a:off x="3415284" y="2112264"/>
-            <a:ext cx="438912" cy="438912"/>
-          </a:xfrm>
-          <a:prstGeom prst="ellipse">
-            <a:avLst/>
-          </a:prstGeom>
-          <a:solidFill>
-            <a:srgbClr val="0F1E18"/>
-          </a:solidFill>
-          <a:ln w="31750">
-            <a:solidFill>
-              <a:srgbClr val="93C7A6"/>
-            </a:solidFill>
-            <a:prstDash val="solid"/>
-          </a:ln>
-        </p:spPr>
-      </p:sp>
-      <p:sp>
-        <p:nvSpPr>
-          <p:cNvPr id="9" name="Text 7"/>
-          <p:cNvSpPr txBox="1"/>
-          <p:nvPr/>
-        </p:nvSpPr>
-        <p:spPr>
-          <a:xfrm>
-            <a:off x="2628900" y="2743200"/>
-            <a:ext cx="2011680" cy="731520"/>
-          </a:xfrm>
-          <a:prstGeom prst="rect">
-            <a:avLst/>
-          </a:prstGeom>
-          <a:noFill/>
-          <a:ln/>
-        </p:spPr>
-        <p:txBody>
-          <a:bodyPr wrap="square" lIns="0" tIns="0" rIns="0" bIns="0" rtlCol="0" anchor="t"/>
-          <a:lstStyle/>
-          <a:p>
-            <a:pPr algn="ctr" indent="0" marL="0">
-              <a:buNone/>
-            </a:pPr>
-            <a:r>
-              <a:rPr lang="en-US" sz="1350" b="1" dirty="0">
-                <a:solidFill>
-                  <a:srgbClr val="FFFFFF"/>
-                </a:solidFill>
-                <a:latin typeface="Calibri" pitchFamily="34" charset="0"/>
-                <a:ea typeface="Calibri" pitchFamily="34" charset="-122"/>
-                <a:cs typeface="Calibri" pitchFamily="34" charset="-120"/>
-              </a:rPr>
-              <a:t>Abre o período e cadastra disciplinas</a:t>
-            </a:r>
-            <a:endParaRPr lang="en-US" sz="1350" dirty="0"/>
-          </a:p>
-        </p:txBody>
-      </p:sp>
-      <p:sp>
-        <p:nvSpPr>
-          <p:cNvPr id="10" name="Shape 8"/>
-          <p:cNvSpPr/>
-          <p:nvPr/>
-        </p:nvSpPr>
-        <p:spPr>
-          <a:xfrm>
-            <a:off x="5861304" y="2112264"/>
-            <a:ext cx="438912" cy="438912"/>
-          </a:xfrm>
-          <a:prstGeom prst="ellipse">
-            <a:avLst/>
-          </a:prstGeom>
-          <a:solidFill>
-            <a:srgbClr val="0F1E18"/>
-          </a:solidFill>
-          <a:ln w="31750">
-            <a:solidFill>
-              <a:srgbClr val="93C7A6"/>
-            </a:solidFill>
-            <a:prstDash val="solid"/>
-          </a:ln>
-        </p:spPr>
-      </p:sp>
-      <p:sp>
-        <p:nvSpPr>
-          <p:cNvPr id="11" name="Text 9"/>
-          <p:cNvSpPr txBox="1"/>
-          <p:nvPr/>
-        </p:nvSpPr>
-        <p:spPr>
-          <a:xfrm>
-            <a:off x="5074920" y="2743200"/>
-            <a:ext cx="2011680" cy="731520"/>
-          </a:xfrm>
-          <a:prstGeom prst="rect">
-            <a:avLst/>
-          </a:prstGeom>
-          <a:noFill/>
-          <a:ln/>
-        </p:spPr>
-        <p:txBody>
-          <a:bodyPr wrap="square" lIns="0" tIns="0" rIns="0" bIns="0" rtlCol="0" anchor="t"/>
-          <a:lstStyle/>
-          <a:p>
-            <a:pPr algn="ctr" indent="0" marL="0">
-              <a:buNone/>
-            </a:pPr>
-            <a:r>
-              <a:rPr lang="en-US" sz="1350" b="1" dirty="0">
-                <a:solidFill>
-                  <a:srgbClr val="FFFFFF"/>
-                </a:solidFill>
-                <a:latin typeface="Calibri" pitchFamily="34" charset="0"/>
-                <a:ea typeface="Calibri" pitchFamily="34" charset="-122"/>
-                <a:cs typeface="Calibri" pitchFamily="34" charset="-120"/>
-              </a:rPr>
-              <a:t>Lança tarefa e prova</a:t>
-            </a:r>
-            <a:endParaRPr lang="en-US" sz="1350" dirty="0"/>
-          </a:p>
-        </p:txBody>
-      </p:sp>
-      <p:sp>
-        <p:nvSpPr>
-          <p:cNvPr id="12" name="Shape 10"/>
-          <p:cNvSpPr/>
-          <p:nvPr/>
-        </p:nvSpPr>
-        <p:spPr>
-          <a:xfrm>
-            <a:off x="8307324" y="2112264"/>
-            <a:ext cx="438912" cy="438912"/>
-          </a:xfrm>
-          <a:prstGeom prst="ellipse">
-            <a:avLst/>
-          </a:prstGeom>
-          <a:solidFill>
-            <a:srgbClr val="0F1E18"/>
-          </a:solidFill>
-          <a:ln w="31750">
-            <a:solidFill>
-              <a:srgbClr val="93C7A6"/>
-            </a:solidFill>
-            <a:prstDash val="solid"/>
-          </a:ln>
-        </p:spPr>
-      </p:sp>
-      <p:sp>
-        <p:nvSpPr>
-          <p:cNvPr id="13" name="Text 11"/>
-          <p:cNvSpPr txBox="1"/>
-          <p:nvPr/>
-        </p:nvSpPr>
-        <p:spPr>
-          <a:xfrm>
-            <a:off x="7520940" y="2743200"/>
-            <a:ext cx="2011680" cy="731520"/>
-          </a:xfrm>
-          <a:prstGeom prst="rect">
-            <a:avLst/>
-          </a:prstGeom>
-          <a:noFill/>
-          <a:ln/>
-        </p:spPr>
-        <p:txBody>
-          <a:bodyPr wrap="square" lIns="0" tIns="0" rIns="0" bIns="0" rtlCol="0" anchor="t"/>
-          <a:lstStyle/>
-          <a:p>
-            <a:pPr algn="ctr" indent="0" marL="0">
-              <a:buNone/>
-            </a:pPr>
-            <a:r>
-              <a:rPr lang="en-US" sz="1350" b="1" dirty="0">
-                <a:solidFill>
-                  <a:srgbClr val="FFFFFF"/>
-                </a:solidFill>
-                <a:latin typeface="Calibri" pitchFamily="34" charset="0"/>
-                <a:ea typeface="Calibri" pitchFamily="34" charset="-122"/>
-                <a:cs typeface="Calibri" pitchFamily="34" charset="-120"/>
-              </a:rPr>
-              <a:t>Vê tudo no painel Hoje</a:t>
-            </a:r>
-            <a:endParaRPr lang="en-US" sz="1350" dirty="0"/>
-          </a:p>
-        </p:txBody>
-      </p:sp>
-      <p:sp>
-        <p:nvSpPr>
-          <p:cNvPr id="14" name="Shape 12"/>
-          <p:cNvSpPr/>
-          <p:nvPr/>
-        </p:nvSpPr>
-        <p:spPr>
-          <a:xfrm>
-            <a:off x="10753344" y="2112264"/>
-            <a:ext cx="438912" cy="438912"/>
-          </a:xfrm>
-          <a:prstGeom prst="ellipse">
-            <a:avLst/>
-          </a:prstGeom>
-          <a:solidFill>
-            <a:srgbClr val="E6B84D"/>
-          </a:solidFill>
-          <a:ln w="31750">
-            <a:solidFill>
-              <a:srgbClr val="93C7A6"/>
-            </a:solidFill>
-            <a:prstDash val="solid"/>
-          </a:ln>
-        </p:spPr>
-      </p:sp>
-      <p:sp>
-        <p:nvSpPr>
-          <p:cNvPr id="15" name="Text 13"/>
-          <p:cNvSpPr txBox="1"/>
-          <p:nvPr/>
-        </p:nvSpPr>
-        <p:spPr>
-          <a:xfrm>
-            <a:off x="9966960" y="2743200"/>
-            <a:ext cx="2011680" cy="731520"/>
-          </a:xfrm>
-          <a:prstGeom prst="rect">
-            <a:avLst/>
-          </a:prstGeom>
-          <a:noFill/>
-          <a:ln/>
-        </p:spPr>
-        <p:txBody>
-          <a:bodyPr wrap="square" lIns="0" tIns="0" rIns="0" bIns="0" rtlCol="0" anchor="t"/>
-          <a:lstStyle/>
-          <a:p>
-            <a:pPr algn="ctr" indent="0" marL="0">
-              <a:buNone/>
-            </a:pPr>
-            <a:r>
-              <a:rPr lang="en-US" sz="1350" b="1" dirty="0">
-                <a:solidFill>
-                  <a:srgbClr val="FFFFFF"/>
-                </a:solidFill>
-                <a:latin typeface="Calibri" pitchFamily="34" charset="0"/>
-                <a:ea typeface="Calibri" pitchFamily="34" charset="-122"/>
-                <a:cs typeface="Calibri" pitchFamily="34" charset="-120"/>
-              </a:rPr>
-              <a:t>Conclui a tarefa e o histórico atualiza</a:t>
-            </a:r>
-            <a:endParaRPr lang="en-US" sz="1350" dirty="0"/>
-          </a:p>
-        </p:txBody>
-      </p:sp>
-      <p:sp>
-        <p:nvSpPr>
-          <p:cNvPr id="16" name="Text 14"/>
-          <p:cNvSpPr txBox="1"/>
-          <p:nvPr/>
-        </p:nvSpPr>
-        <p:spPr>
-          <a:xfrm>
-            <a:off x="548640" y="3703320"/>
-            <a:ext cx="5486400" cy="274320"/>
-          </a:xfrm>
-          <a:prstGeom prst="rect">
-            <a:avLst/>
-          </a:prstGeom>
-          <a:noFill/>
-          <a:ln/>
-        </p:spPr>
-        <p:txBody>
-          <a:bodyPr wrap="square" lIns="0" tIns="0" rIns="0" bIns="0" rtlCol="0" anchor="t"/>
-          <a:lstStyle/>
-          <a:p>
-            <a:pPr indent="0" marL="0">
-              <a:buNone/>
-            </a:pPr>
-            <a:r>
-              <a:rPr lang="en-US" sz="1100" b="1" spc="200" kern="0" dirty="0">
-                <a:solidFill>
-                  <a:srgbClr val="E6B84D"/>
-                </a:solidFill>
-                <a:latin typeface="Calibri" pitchFamily="34" charset="0"/>
-                <a:ea typeface="Calibri" pitchFamily="34" charset="-122"/>
-                <a:cs typeface="Calibri" pitchFamily="34" charset="-120"/>
-              </a:rPr>
-              <a:t>DEFINIÇÃO DE PRONTO</a:t>
-            </a:r>
-            <a:endParaRPr lang="en-US" sz="1100" dirty="0"/>
-          </a:p>
-        </p:txBody>
-      </p:sp>
-      <p:sp>
-        <p:nvSpPr>
-          <p:cNvPr id="17" name="Shape 15"/>
-          <p:cNvSpPr/>
-          <p:nvPr/>
-        </p:nvSpPr>
-        <p:spPr>
-          <a:xfrm>
-            <a:off x="548640" y="4069080"/>
-            <a:ext cx="3515258" cy="2148840"/>
-          </a:xfrm>
-          <a:prstGeom prst="roundRect">
-            <a:avLst>
-              <a:gd name="adj" fmla="val 5106"/>
-            </a:avLst>
-          </a:prstGeom>
-          <a:solidFill>
-            <a:srgbClr val="162720"/>
-          </a:solidFill>
-          <a:ln w="12700">
-            <a:solidFill>
-              <a:srgbClr val="293D35"/>
-            </a:solidFill>
-            <a:prstDash val="solid"/>
-          </a:ln>
-        </p:spPr>
-      </p:sp>
-      <p:sp>
-        <p:nvSpPr>
-          <p:cNvPr id="18" name="Shape 16"/>
-          <p:cNvSpPr/>
-          <p:nvPr/>
-        </p:nvSpPr>
-        <p:spPr>
-          <a:xfrm>
-            <a:off x="822960" y="4297680"/>
-            <a:ext cx="548640" cy="548640"/>
-          </a:xfrm>
-          <a:prstGeom prst="ellipse">
-            <a:avLst/>
-          </a:prstGeom>
-          <a:solidFill>
-            <a:srgbClr val="293D35"/>
-          </a:solidFill>
-          <a:ln w="12700">
-            <a:solidFill>
-              <a:srgbClr val="293D35"/>
-            </a:solidFill>
-            <a:prstDash val="solid"/>
-          </a:ln>
-        </p:spPr>
-      </p:sp>
-      <p:pic>
-        <p:nvPicPr>
-          <p:cNvPr id="19" name="Image 0" descr="preencoded.png">    </p:cNvPr>
-          <p:cNvPicPr>
-            <a:picLocks noChangeAspect="1"/>
-          </p:cNvPicPr>
-          <p:nvPr/>
-        </p:nvPicPr>
-        <p:blipFill>
-          <a:blip r:embed="rId1"/>
-          <a:stretch>
-            <a:fillRect/>
-          </a:stretch>
-        </p:blipFill>
-        <p:spPr>
-          <a:xfrm>
-            <a:off x="987552" y="4462272"/>
-            <a:ext cx="219456" cy="219456"/>
-          </a:xfrm>
-          <a:prstGeom prst="rect">
-            <a:avLst/>
-          </a:prstGeom>
-        </p:spPr>
-      </p:pic>
-      <p:sp>
-        <p:nvSpPr>
-          <p:cNvPr id="20" name="Text 17"/>
-          <p:cNvSpPr txBox="1"/>
-          <p:nvPr/>
-        </p:nvSpPr>
-        <p:spPr>
-          <a:xfrm>
-            <a:off x="1554480" y="4389120"/>
-            <a:ext cx="2326538" cy="365760"/>
-          </a:xfrm>
-          <a:prstGeom prst="rect">
-            <a:avLst/>
-          </a:prstGeom>
-          <a:noFill/>
-          <a:ln/>
-        </p:spPr>
-        <p:txBody>
-          <a:bodyPr wrap="square" lIns="0" tIns="0" rIns="0" bIns="0" rtlCol="0" anchor="t"/>
-          <a:lstStyle/>
-          <a:p>
-            <a:pPr indent="0" marL="0">
-              <a:buNone/>
-            </a:pPr>
-            <a:r>
-              <a:rPr lang="en-US" sz="1600" b="1" dirty="0">
-                <a:solidFill>
-                  <a:srgbClr val="FFFFFF"/>
-                </a:solidFill>
-                <a:latin typeface="Calibri" pitchFamily="34" charset="0"/>
-                <a:ea typeface="Calibri" pitchFamily="34" charset="-122"/>
-                <a:cs typeface="Calibri" pitchFamily="34" charset="-120"/>
-              </a:rPr>
-              <a:t>Critérios de aceite</a:t>
-            </a:r>
-            <a:endParaRPr lang="en-US" sz="1600" dirty="0"/>
-          </a:p>
-        </p:txBody>
-      </p:sp>
-      <p:sp>
-        <p:nvSpPr>
-          <p:cNvPr id="21" name="Text 18"/>
-          <p:cNvSpPr txBox="1"/>
-          <p:nvPr/>
-        </p:nvSpPr>
-        <p:spPr>
-          <a:xfrm>
-            <a:off x="822960" y="5029200"/>
-            <a:ext cx="2966618" cy="1097280"/>
-          </a:xfrm>
-          <a:prstGeom prst="rect">
-            <a:avLst/>
-          </a:prstGeom>
-          <a:noFill/>
-          <a:ln/>
-        </p:spPr>
-        <p:txBody>
-          <a:bodyPr wrap="square" lIns="0" tIns="0" rIns="0" bIns="0" rtlCol="0" anchor="t"/>
-          <a:lstStyle/>
-          <a:p>
-            <a:pPr indent="0" marL="0">
-              <a:buNone/>
-            </a:pPr>
-            <a:r>
-              <a:rPr lang="en-US" sz="1300" dirty="0">
-                <a:solidFill>
-                  <a:srgbClr val="A9BBAF"/>
-                </a:solidFill>
-                <a:latin typeface="Calibri" pitchFamily="34" charset="0"/>
-                <a:ea typeface="Calibri" pitchFamily="34" charset="-122"/>
-                <a:cs typeface="Calibri" pitchFamily="34" charset="-120"/>
-              </a:rPr>
-              <a:t>A história cumpre o fluxo e os dados persistem e voltam sem erro.</a:t>
-            </a:r>
-            <a:endParaRPr lang="en-US" sz="1300" dirty="0"/>
-          </a:p>
-        </p:txBody>
-      </p:sp>
-      <p:sp>
-        <p:nvSpPr>
-          <p:cNvPr id="22" name="Shape 19"/>
-          <p:cNvSpPr/>
-          <p:nvPr/>
-        </p:nvSpPr>
-        <p:spPr>
-          <a:xfrm>
-            <a:off x="4338218" y="4069080"/>
-            <a:ext cx="3515258" cy="2148840"/>
-          </a:xfrm>
-          <a:prstGeom prst="roundRect">
-            <a:avLst>
-              <a:gd name="adj" fmla="val 5106"/>
-            </a:avLst>
-          </a:prstGeom>
-          <a:solidFill>
-            <a:srgbClr val="162720"/>
-          </a:solidFill>
-          <a:ln w="12700">
-            <a:solidFill>
-              <a:srgbClr val="293D35"/>
-            </a:solidFill>
-            <a:prstDash val="solid"/>
-          </a:ln>
-        </p:spPr>
-      </p:sp>
-      <p:sp>
-        <p:nvSpPr>
-          <p:cNvPr id="23" name="Shape 20"/>
-          <p:cNvSpPr/>
-          <p:nvPr/>
-        </p:nvSpPr>
-        <p:spPr>
-          <a:xfrm>
-            <a:off x="4612538" y="4297680"/>
-            <a:ext cx="548640" cy="548640"/>
-          </a:xfrm>
-          <a:prstGeom prst="ellipse">
-            <a:avLst/>
-          </a:prstGeom>
-          <a:solidFill>
-            <a:srgbClr val="293D35"/>
-          </a:solidFill>
-          <a:ln w="12700">
-            <a:solidFill>
-              <a:srgbClr val="293D35"/>
-            </a:solidFill>
-            <a:prstDash val="solid"/>
-          </a:ln>
-        </p:spPr>
-      </p:sp>
-      <p:pic>
-        <p:nvPicPr>
-          <p:cNvPr id="24" name="Image 1" descr="preencoded.png">    </p:cNvPr>
-          <p:cNvPicPr>
-            <a:picLocks noChangeAspect="1"/>
-          </p:cNvPicPr>
-          <p:nvPr/>
-        </p:nvPicPr>
-        <p:blipFill>
-          <a:blip r:embed="rId2"/>
-          <a:stretch>
-            <a:fillRect/>
-          </a:stretch>
-        </p:blipFill>
-        <p:spPr>
-          <a:xfrm>
-            <a:off x="4777130" y="4462272"/>
-            <a:ext cx="219456" cy="219456"/>
-          </a:xfrm>
-          <a:prstGeom prst="rect">
-            <a:avLst/>
-          </a:prstGeom>
-        </p:spPr>
-      </p:pic>
-      <p:sp>
-        <p:nvSpPr>
-          <p:cNvPr id="25" name="Text 21"/>
-          <p:cNvSpPr txBox="1"/>
-          <p:nvPr/>
-        </p:nvSpPr>
-        <p:spPr>
-          <a:xfrm>
-            <a:off x="5344058" y="4389120"/>
-            <a:ext cx="2326538" cy="365760"/>
-          </a:xfrm>
-          <a:prstGeom prst="rect">
-            <a:avLst/>
-          </a:prstGeom>
-          <a:noFill/>
-          <a:ln/>
-        </p:spPr>
-        <p:txBody>
-          <a:bodyPr wrap="square" lIns="0" tIns="0" rIns="0" bIns="0" rtlCol="0" anchor="t"/>
-          <a:lstStyle/>
-          <a:p>
-            <a:pPr indent="0" marL="0">
-              <a:buNone/>
-            </a:pPr>
-            <a:r>
-              <a:rPr lang="en-US" sz="1600" b="1" dirty="0">
-                <a:solidFill>
-                  <a:srgbClr val="FFFFFF"/>
-                </a:solidFill>
-                <a:latin typeface="Calibri" pitchFamily="34" charset="0"/>
-                <a:ea typeface="Calibri" pitchFamily="34" charset="-122"/>
-                <a:cs typeface="Calibri" pitchFamily="34" charset="-120"/>
-              </a:rPr>
-              <a:t>Mobile-first</a:t>
-            </a:r>
-            <a:endParaRPr lang="en-US" sz="1600" dirty="0"/>
-          </a:p>
-        </p:txBody>
-      </p:sp>
-      <p:sp>
-        <p:nvSpPr>
-          <p:cNvPr id="26" name="Text 22"/>
-          <p:cNvSpPr txBox="1"/>
-          <p:nvPr/>
-        </p:nvSpPr>
-        <p:spPr>
-          <a:xfrm>
-            <a:off x="4612538" y="5029200"/>
-            <a:ext cx="2966618" cy="1097280"/>
-          </a:xfrm>
-          <a:prstGeom prst="rect">
-            <a:avLst/>
-          </a:prstGeom>
-          <a:noFill/>
-          <a:ln/>
-        </p:spPr>
-        <p:txBody>
-          <a:bodyPr wrap="square" lIns="0" tIns="0" rIns="0" bIns="0" rtlCol="0" anchor="t"/>
-          <a:lstStyle/>
-          <a:p>
-            <a:pPr indent="0" marL="0">
-              <a:buNone/>
-            </a:pPr>
-            <a:r>
-              <a:rPr lang="en-US" sz="1300" dirty="0">
-                <a:solidFill>
-                  <a:srgbClr val="A9BBAF"/>
-                </a:solidFill>
-                <a:latin typeface="Calibri" pitchFamily="34" charset="0"/>
-                <a:ea typeface="Calibri" pitchFamily="34" charset="-122"/>
-                <a:cs typeface="Calibri" pitchFamily="34" charset="-120"/>
-              </a:rPr>
-              <a:t>Operável por toque a partir de 360 px e no computador, sem quebra de layout.</a:t>
-            </a:r>
-            <a:endParaRPr lang="en-US" sz="1300" dirty="0"/>
-          </a:p>
-        </p:txBody>
-      </p:sp>
-      <p:sp>
-        <p:nvSpPr>
-          <p:cNvPr id="27" name="Shape 23"/>
-          <p:cNvSpPr/>
-          <p:nvPr/>
-        </p:nvSpPr>
-        <p:spPr>
-          <a:xfrm>
-            <a:off x="8127797" y="4069080"/>
-            <a:ext cx="3515258" cy="2148840"/>
-          </a:xfrm>
-          <a:prstGeom prst="roundRect">
-            <a:avLst>
-              <a:gd name="adj" fmla="val 5106"/>
-            </a:avLst>
-          </a:prstGeom>
-          <a:solidFill>
-            <a:srgbClr val="162720"/>
-          </a:solidFill>
-          <a:ln w="12700">
-            <a:solidFill>
-              <a:srgbClr val="293D35"/>
-            </a:solidFill>
-            <a:prstDash val="solid"/>
-          </a:ln>
-        </p:spPr>
-      </p:sp>
-      <p:sp>
-        <p:nvSpPr>
-          <p:cNvPr id="28" name="Shape 24"/>
-          <p:cNvSpPr/>
-          <p:nvPr/>
-        </p:nvSpPr>
-        <p:spPr>
-          <a:xfrm>
-            <a:off x="8402117" y="4297680"/>
-            <a:ext cx="548640" cy="548640"/>
-          </a:xfrm>
-          <a:prstGeom prst="ellipse">
-            <a:avLst/>
-          </a:prstGeom>
-          <a:solidFill>
-            <a:srgbClr val="293D35"/>
-          </a:solidFill>
-          <a:ln w="12700">
-            <a:solidFill>
-              <a:srgbClr val="293D35"/>
-            </a:solidFill>
-            <a:prstDash val="solid"/>
-          </a:ln>
-        </p:spPr>
-      </p:sp>
-      <p:pic>
-        <p:nvPicPr>
-          <p:cNvPr id="29" name="Image 2" descr="preencoded.png">    </p:cNvPr>
-          <p:cNvPicPr>
-            <a:picLocks noChangeAspect="1"/>
-          </p:cNvPicPr>
-          <p:nvPr/>
-        </p:nvPicPr>
-        <p:blipFill>
-          <a:blip r:embed="rId3"/>
-          <a:stretch>
-            <a:fillRect/>
-          </a:stretch>
-        </p:blipFill>
-        <p:spPr>
-          <a:xfrm>
-            <a:off x="8566709" y="4462272"/>
-            <a:ext cx="219456" cy="219456"/>
-          </a:xfrm>
-          <a:prstGeom prst="rect">
-            <a:avLst/>
-          </a:prstGeom>
-        </p:spPr>
-      </p:pic>
-      <p:sp>
-        <p:nvSpPr>
-          <p:cNvPr id="30" name="Text 25"/>
-          <p:cNvSpPr txBox="1"/>
-          <p:nvPr/>
-        </p:nvSpPr>
-        <p:spPr>
-          <a:xfrm>
-            <a:off x="9133637" y="4389120"/>
-            <a:ext cx="2326538" cy="365760"/>
-          </a:xfrm>
-          <a:prstGeom prst="rect">
-            <a:avLst/>
-          </a:prstGeom>
-          <a:noFill/>
-          <a:ln/>
-        </p:spPr>
-        <p:txBody>
-          <a:bodyPr wrap="square" lIns="0" tIns="0" rIns="0" bIns="0" rtlCol="0" anchor="t"/>
-          <a:lstStyle/>
-          <a:p>
-            <a:pPr indent="0" marL="0">
-              <a:buNone/>
-            </a:pPr>
-            <a:r>
-              <a:rPr lang="en-US" sz="1600" b="1" dirty="0">
-                <a:solidFill>
-                  <a:srgbClr val="FFFFFF"/>
-                </a:solidFill>
-                <a:latin typeface="Calibri" pitchFamily="34" charset="0"/>
-                <a:ea typeface="Calibri" pitchFamily="34" charset="-122"/>
-                <a:cs typeface="Calibri" pitchFamily="34" charset="-120"/>
-              </a:rPr>
-              <a:t>Execução integrada</a:t>
-            </a:r>
-            <a:endParaRPr lang="en-US" sz="1600" dirty="0"/>
-          </a:p>
-        </p:txBody>
-      </p:sp>
-      <p:sp>
-        <p:nvSpPr>
-          <p:cNvPr id="31" name="Text 26"/>
-          <p:cNvSpPr txBox="1"/>
-          <p:nvPr/>
-        </p:nvSpPr>
-        <p:spPr>
-          <a:xfrm>
-            <a:off x="8402117" y="5029200"/>
-            <a:ext cx="2966618" cy="1097280"/>
-          </a:xfrm>
-          <a:prstGeom prst="rect">
-            <a:avLst/>
-          </a:prstGeom>
-          <a:noFill/>
-          <a:ln/>
-        </p:spPr>
-        <p:txBody>
-          <a:bodyPr wrap="square" lIns="0" tIns="0" rIns="0" bIns="0" rtlCol="0" anchor="t"/>
-          <a:lstStyle/>
-          <a:p>
-            <a:pPr indent="0" marL="0">
-              <a:buNone/>
-            </a:pPr>
-            <a:r>
-              <a:rPr lang="en-US" sz="1300" dirty="0">
-                <a:solidFill>
-                  <a:srgbClr val="A9BBAF"/>
-                </a:solidFill>
-                <a:latin typeface="Calibri" pitchFamily="34" charset="0"/>
-                <a:ea typeface="Calibri" pitchFamily="34" charset="-122"/>
-                <a:cs typeface="Calibri" pitchFamily="34" charset="-120"/>
-              </a:rPr>
-              <a:t>Roda com front, API e banco via docker compose up --build, com testes passando.</a:t>
-            </a:r>
-            <a:endParaRPr lang="en-US" sz="1300" dirty="0"/>
           </a:p>
         </p:txBody>
       </p:sp>
@@ -13217,6 +8522,10 @@
             <a:prstDash val="solid"/>
           </a:ln>
         </p:spPr>
+        <p:txBody>
+          <a:bodyPr/>
+          <a:p/>
+        </p:txBody>
       </p:sp>
       <p:sp>
         <p:nvSpPr>
@@ -13368,7 +8677,7 @@
                 <a:ea typeface="Calibri" pitchFamily="34" charset="-122"/>
                 <a:cs typeface="Calibri" pitchFamily="34" charset="-120"/>
               </a:rPr>
-              <a:t>2 / 17</a:t>
+              <a:t>2 / 13</a:t>
             </a:r>
             <a:endParaRPr lang="en-US" sz="900" dirty="0"/>
           </a:p>
@@ -13400,6 +8709,10 @@
             <a:prstDash val="solid"/>
           </a:ln>
         </p:spPr>
+        <p:txBody>
+          <a:bodyPr/>
+          <a:p/>
+        </p:txBody>
       </p:sp>
       <p:sp>
         <p:nvSpPr>
@@ -13542,6 +8855,10 @@
             <a:prstDash val="solid"/>
           </a:ln>
         </p:spPr>
+        <p:txBody>
+          <a:bodyPr/>
+          <a:p/>
+        </p:txBody>
       </p:sp>
       <p:pic>
         <p:nvPicPr>
@@ -13669,6 +8986,10 @@
             <a:prstDash val="solid"/>
           </a:ln>
         </p:spPr>
+        <p:txBody>
+          <a:bodyPr/>
+          <a:p/>
+        </p:txBody>
       </p:sp>
       <p:pic>
         <p:nvPicPr>
@@ -13796,6 +9117,10 @@
             <a:prstDash val="solid"/>
           </a:ln>
         </p:spPr>
+        <p:txBody>
+          <a:bodyPr/>
+          <a:p/>
+        </p:txBody>
       </p:sp>
       <p:pic>
         <p:nvPicPr>
@@ -13923,6 +9248,10 @@
             <a:prstDash val="solid"/>
           </a:ln>
         </p:spPr>
+        <p:txBody>
+          <a:bodyPr/>
+          <a:p/>
+        </p:txBody>
       </p:sp>
       <p:pic>
         <p:nvPicPr>
@@ -14082,6 +9411,10 @@
             <a:prstDash val="solid"/>
           </a:ln>
         </p:spPr>
+        <p:txBody>
+          <a:bodyPr/>
+          <a:p/>
+        </p:txBody>
       </p:sp>
       <p:sp>
         <p:nvSpPr>
@@ -14233,7 +9566,7 @@
                 <a:ea typeface="Calibri" pitchFamily="34" charset="-122"/>
                 <a:cs typeface="Calibri" pitchFamily="34" charset="-120"/>
               </a:rPr>
-              <a:t>3 / 17</a:t>
+              <a:t>3 / 13</a:t>
             </a:r>
             <a:endParaRPr lang="en-US" sz="900" dirty="0"/>
           </a:p>
@@ -14272,7 +9605,7 @@
                 <a:ea typeface="Calibri" pitchFamily="34" charset="-122"/>
                 <a:cs typeface="Calibri" pitchFamily="34" charset="-120"/>
               </a:rPr>
-              <a:t>Aplicação web instalável (PWA), mobile-first, com o semestre do aluno organizado em um só lugar. Nasce em português com o inglês pronto para ligar.</a:t>
+              <a:t>Aplicação web mobile-first, com o semestre do aluno organizado em um só lugar. A versão instalável (PWA) e os avisos no celular chegam **depois** da apresentação.</a:t>
             </a:r>
             <a:endParaRPr lang="en-US" sz="1600" dirty="0"/>
           </a:p>
@@ -14304,6 +9637,10 @@
             <a:prstDash val="solid"/>
           </a:ln>
         </p:spPr>
+        <p:txBody>
+          <a:bodyPr/>
+          <a:p/>
+        </p:txBody>
       </p:sp>
       <p:sp>
         <p:nvSpPr>
@@ -14329,6 +9666,10 @@
             <a:prstDash val="solid"/>
           </a:ln>
         </p:spPr>
+        <p:txBody>
+          <a:bodyPr/>
+          <a:p/>
+        </p:txBody>
       </p:sp>
       <p:pic>
         <p:nvPicPr>
@@ -14490,7 +9831,7 @@
                 <a:ea typeface="Calibri" pitchFamily="34" charset="-122"/>
                 <a:cs typeface="Calibri" pitchFamily="34" charset="-120"/>
               </a:rPr>
-              <a:t>Tarefa com tipo, prioridade, prazo e tags</a:t>
+              <a:t>Tarefa com prazo; concluir é o essencial</a:t>
             </a:r>
             <a:endParaRPr lang="en-US" sz="1300" dirty="0"/>
           </a:p>
@@ -14511,7 +9852,7 @@
                 <a:ea typeface="Calibri" pitchFamily="34" charset="-122"/>
                 <a:cs typeface="Calibri" pitchFamily="34" charset="-120"/>
               </a:rPr>
-              <a:t>Prova com data, peso e nota opcional</a:t>
+              <a:t>Prova com data</a:t>
             </a:r>
             <a:endParaRPr lang="en-US" sz="1300" dirty="0"/>
           </a:p>
@@ -14564,6 +9905,10 @@
             <a:prstDash val="solid"/>
           </a:ln>
         </p:spPr>
+        <p:txBody>
+          <a:bodyPr/>
+          <a:p/>
+        </p:txBody>
       </p:sp>
       <p:sp>
         <p:nvSpPr>
@@ -14589,6 +9934,10 @@
             <a:prstDash val="solid"/>
           </a:ln>
         </p:spPr>
+        <p:txBody>
+          <a:bodyPr/>
+          <a:p/>
+        </p:txBody>
       </p:sp>
       <p:pic>
         <p:nvPicPr>
@@ -14647,7 +9996,7 @@
                 <a:ea typeface="Calibri" pitchFamily="34" charset="-122"/>
                 <a:cs typeface="Calibri" pitchFamily="34" charset="-120"/>
               </a:rPr>
-              <a:t>Lembrar</a:t>
+              <a:t>Lembrar (depois da apresentação)</a:t>
             </a:r>
             <a:endParaRPr lang="en-US" sz="2200" dirty="0"/>
           </a:p>
@@ -14729,7 +10078,7 @@
                 <a:ea typeface="Calibri" pitchFamily="34" charset="-122"/>
                 <a:cs typeface="Calibri" pitchFamily="34" charset="-120"/>
               </a:rPr>
-              <a:t>Tarefa: 24 h antes (configurável)</a:t>
+              <a:t>Tarefa: 24 h antes (antecedência fixa)</a:t>
             </a:r>
             <a:endParaRPr lang="en-US" sz="1300" dirty="0"/>
           </a:p>
@@ -14824,6 +10173,10 @@
             <a:prstDash val="solid"/>
           </a:ln>
         </p:spPr>
+        <p:txBody>
+          <a:bodyPr/>
+          <a:p/>
+        </p:txBody>
       </p:sp>
       <p:sp>
         <p:nvSpPr>
@@ -14849,6 +10202,10 @@
             <a:prstDash val="solid"/>
           </a:ln>
         </p:spPr>
+        <p:txBody>
+          <a:bodyPr/>
+          <a:p/>
+        </p:txBody>
       </p:sp>
       <p:pic>
         <p:nvPicPr>
@@ -14989,7 +10346,7 @@
                 <a:ea typeface="Calibri" pitchFamily="34" charset="-122"/>
                 <a:cs typeface="Calibri" pitchFamily="34" charset="-120"/>
               </a:rPr>
-              <a:t>XP por tarefa, trabalho e nota registrada</a:t>
+              <a:t>20 pontos por tarefa + 50 ao subir de nível</a:t>
             </a:r>
             <a:endParaRPr lang="en-US" sz="1300" dirty="0"/>
           </a:p>
@@ -15010,7 +10367,7 @@
                 <a:ea typeface="Calibri" pitchFamily="34" charset="-122"/>
                 <a:cs typeface="Calibri" pitchFamily="34" charset="-120"/>
               </a:rPr>
-              <a:t>Nível por patamar de XP</a:t>
+              <a:t>Nível a cada 3 tarefas concluídas</a:t>
             </a:r>
             <a:endParaRPr lang="en-US" sz="1300" dirty="0"/>
           </a:p>
@@ -15114,6 +10471,10 @@
             <a:prstDash val="solid"/>
           </a:ln>
         </p:spPr>
+        <p:txBody>
+          <a:bodyPr/>
+          <a:p/>
+        </p:txBody>
       </p:sp>
       <p:sp>
         <p:nvSpPr>
@@ -15265,7 +10626,7 @@
                 <a:ea typeface="Calibri" pitchFamily="34" charset="-122"/>
                 <a:cs typeface="Calibri" pitchFamily="34" charset="-120"/>
               </a:rPr>
-              <a:t>4 / 17</a:t>
+              <a:t>4 / 13</a:t>
             </a:r>
             <a:endParaRPr lang="en-US" sz="900" dirty="0"/>
           </a:p>
@@ -15295,6 +10656,10 @@
             <a:prstDash val="solid"/>
           </a:ln>
         </p:spPr>
+        <p:txBody>
+          <a:bodyPr/>
+          <a:p/>
+        </p:txBody>
       </p:sp>
       <p:sp>
         <p:nvSpPr>
@@ -15320,6 +10685,10 @@
             <a:prstDash val="solid"/>
           </a:ln>
         </p:spPr>
+        <p:txBody>
+          <a:bodyPr/>
+          <a:p/>
+        </p:txBody>
       </p:sp>
       <p:sp>
         <p:nvSpPr>
@@ -15345,6 +10714,10 @@
             <a:prstDash val="solid"/>
           </a:ln>
         </p:spPr>
+        <p:txBody>
+          <a:bodyPr/>
+          <a:p/>
+        </p:txBody>
       </p:sp>
       <p:sp>
         <p:nvSpPr>
@@ -15370,6 +10743,10 @@
             <a:prstDash val="solid"/>
           </a:ln>
         </p:spPr>
+        <p:txBody>
+          <a:bodyPr/>
+          <a:p/>
+        </p:txBody>
       </p:sp>
       <p:sp>
         <p:nvSpPr>
@@ -15568,6 +10945,10 @@
             <a:prstDash val="solid"/>
           </a:ln>
         </p:spPr>
+        <p:txBody>
+          <a:bodyPr/>
+          <a:p/>
+        </p:txBody>
       </p:sp>
       <p:sp>
         <p:nvSpPr>
@@ -15680,7 +11061,7 @@
                 <a:ea typeface="Calibri" pitchFamily="34" charset="-122"/>
                 <a:cs typeface="Calibri" pitchFamily="34" charset="-120"/>
               </a:rPr>
-              <a:t>PWA em React, API em Spring Boot, banco PostgreSQL, publicado atrás do Traefik.</a:t>
+              <a:t>SPA em React, API em Spring Boot, banco PostgreSQL, publicado atrás do Traefik. Instalação como PWA é da Fase 2.</a:t>
             </a:r>
             <a:endParaRPr lang="en-US" sz="1250" dirty="0"/>
           </a:p>
@@ -15710,6 +11091,10 @@
             <a:prstDash val="solid"/>
           </a:ln>
         </p:spPr>
+        <p:txBody>
+          <a:bodyPr/>
+          <a:p/>
+        </p:txBody>
       </p:sp>
       <p:sp>
         <p:nvSpPr>
@@ -15852,6 +11237,10 @@
             <a:prstDash val="solid"/>
           </a:ln>
         </p:spPr>
+        <p:txBody>
+          <a:bodyPr/>
+          <a:p/>
+        </p:txBody>
       </p:sp>
       <p:sp>
         <p:nvSpPr>
@@ -15994,6 +11383,10 @@
             <a:prstDash val="solid"/>
           </a:ln>
         </p:spPr>
+        <p:txBody>
+          <a:bodyPr/>
+          <a:p/>
+        </p:txBody>
       </p:sp>
       <p:sp>
         <p:nvSpPr>
@@ -16168,6 +11561,10 @@
             <a:prstDash val="solid"/>
           </a:ln>
         </p:spPr>
+        <p:txBody>
+          <a:bodyPr/>
+          <a:p/>
+        </p:txBody>
       </p:sp>
       <p:sp>
         <p:nvSpPr>
@@ -16319,7 +11716,7 @@
                 <a:ea typeface="Calibri" pitchFamily="34" charset="-122"/>
                 <a:cs typeface="Calibri" pitchFamily="34" charset="-120"/>
               </a:rPr>
-              <a:t>5 / 17</a:t>
+              <a:t>5 / 13</a:t>
             </a:r>
             <a:endParaRPr lang="en-US" sz="900" dirty="0"/>
           </a:p>
@@ -16351,6 +11748,10 @@
             <a:prstDash val="solid"/>
           </a:ln>
         </p:spPr>
+        <p:txBody>
+          <a:bodyPr/>
+          <a:p/>
+        </p:txBody>
       </p:sp>
       <p:sp>
         <p:nvSpPr>
@@ -16456,6 +11857,10 @@
             <a:prstDash val="solid"/>
           </a:ln>
         </p:spPr>
+        <p:txBody>
+          <a:bodyPr/>
+          <a:p/>
+        </p:txBody>
       </p:sp>
       <p:sp>
         <p:nvSpPr>
@@ -16561,6 +11966,10 @@
             <a:prstDash val="solid"/>
           </a:ln>
         </p:spPr>
+        <p:txBody>
+          <a:bodyPr/>
+          <a:p/>
+        </p:txBody>
       </p:sp>
       <p:sp>
         <p:nvSpPr>
@@ -16666,6 +12075,10 @@
             <a:prstDash val="solid"/>
           </a:ln>
         </p:spPr>
+        <p:txBody>
+          <a:bodyPr/>
+          <a:p/>
+        </p:txBody>
       </p:sp>
       <p:sp>
         <p:nvSpPr>
@@ -16771,6 +12184,10 @@
             <a:prstDash val="solid"/>
           </a:ln>
         </p:spPr>
+        <p:txBody>
+          <a:bodyPr/>
+          <a:p/>
+        </p:txBody>
       </p:sp>
       <p:sp>
         <p:nvSpPr>
@@ -16844,7 +12261,7 @@
                 <a:ea typeface="Calibri" pitchFamily="34" charset="-122"/>
                 <a:cs typeface="Calibri" pitchFamily="34" charset="-120"/>
               </a:rPr>
-              <a:t>Data, peso e nota opcional.</a:t>
+              <a:t>Data.</a:t>
             </a:r>
             <a:endParaRPr lang="en-US" sz="1100" dirty="0"/>
           </a:p>
@@ -16876,6 +12293,10 @@
             <a:prstDash val="solid"/>
           </a:ln>
         </p:spPr>
+        <p:txBody>
+          <a:bodyPr/>
+          <a:p/>
+        </p:txBody>
       </p:sp>
       <p:sp>
         <p:nvSpPr>
@@ -16981,6 +12402,10 @@
             <a:prstDash val="solid"/>
           </a:ln>
         </p:spPr>
+        <p:txBody>
+          <a:bodyPr/>
+          <a:p/>
+        </p:txBody>
       </p:sp>
       <p:sp>
         <p:nvSpPr>
@@ -17086,6 +12511,10 @@
             <a:prstDash val="solid"/>
           </a:ln>
         </p:spPr>
+        <p:txBody>
+          <a:bodyPr/>
+          <a:p/>
+        </p:txBody>
       </p:sp>
       <p:sp>
         <p:nvSpPr>
@@ -17159,7 +12588,7 @@
                 <a:ea typeface="Calibri" pitchFamily="34" charset="-122"/>
                 <a:cs typeface="Calibri" pitchFamily="34" charset="-120"/>
               </a:rPr>
-              <a:t>Antecedências por evento (lista).</a:t>
+              <a:t>Antecedências fixas por evento (lista): 24 h para tarefa, cascata 7-3-1 para prova.</a:t>
             </a:r>
             <a:endParaRPr lang="en-US" sz="1100" dirty="0"/>
           </a:p>
@@ -17188,6 +12617,10 @@
             <a:tailEnd type="triangle"/>
           </a:ln>
         </p:spPr>
+        <p:txBody>
+          <a:bodyPr/>
+          <a:p/>
+        </p:txBody>
       </p:sp>
       <p:sp>
         <p:nvSpPr>
@@ -17212,6 +12645,10 @@
             <a:tailEnd type="triangle"/>
           </a:ln>
         </p:spPr>
+        <p:txBody>
+          <a:bodyPr/>
+          <a:p/>
+        </p:txBody>
       </p:sp>
       <p:sp>
         <p:nvSpPr>
@@ -17236,6 +12673,10 @@
             <a:tailEnd type="triangle"/>
           </a:ln>
         </p:spPr>
+        <p:txBody>
+          <a:bodyPr/>
+          <a:p/>
+        </p:txBody>
       </p:sp>
       <p:sp>
         <p:nvSpPr>
@@ -17260,6 +12701,10 @@
             <a:tailEnd type="triangle"/>
           </a:ln>
         </p:spPr>
+        <p:txBody>
+          <a:bodyPr/>
+          <a:p/>
+        </p:txBody>
       </p:sp>
       <p:sp>
         <p:nvSpPr>
@@ -17284,6 +12729,10 @@
             <a:tailEnd type="triangle"/>
           </a:ln>
         </p:spPr>
+        <p:txBody>
+          <a:bodyPr/>
+          <a:p/>
+        </p:txBody>
       </p:sp>
       <p:sp>
         <p:nvSpPr>
@@ -17308,6 +12757,10 @@
             <a:tailEnd type="triangle"/>
           </a:ln>
         </p:spPr>
+        <p:txBody>
+          <a:bodyPr/>
+          <a:p/>
+        </p:txBody>
       </p:sp>
       <p:sp>
         <p:nvSpPr>
@@ -17332,6 +12785,10 @@
             <a:tailEnd type="triangle"/>
           </a:ln>
         </p:spPr>
+        <p:txBody>
+          <a:bodyPr/>
+          <a:p/>
+        </p:txBody>
       </p:sp>
       <p:sp>
         <p:nvSpPr>
@@ -17359,6 +12816,10 @@
             <a:prstDash val="dash"/>
           </a:ln>
         </p:spPr>
+        <p:txBody>
+          <a:bodyPr/>
+          <a:p/>
+        </p:txBody>
       </p:sp>
       <p:sp>
         <p:nvSpPr>
@@ -17384,6 +12845,10 @@
             <a:prstDash val="solid"/>
           </a:ln>
         </p:spPr>
+        <p:txBody>
+          <a:bodyPr/>
+          <a:p/>
+        </p:txBody>
       </p:sp>
       <p:pic>
         <p:nvPicPr>
@@ -17481,7 +12946,7 @@
                 <a:ea typeface="Calibri" pitchFamily="34" charset="-122"/>
                 <a:cs typeface="Calibri" pitchFamily="34" charset="-120"/>
               </a:rPr>
-              <a:t>Consome eventos de domínio (tarefa concluída, nota registrada) e produz XP, nível, sequência e conquistas. Não se acopla ao CRUD; a punição fica como ponto de extensão para depois do V1.</a:t>
+              <a:t>Consome eventos de domínio (tarefa concluída) e produz XP, nível, sequência e conquistas. Não se acopla ao CRUD; a punição fica como ponto de extensão para depois do V1.</a:t>
             </a:r>
             <a:endParaRPr lang="en-US" sz="1250" dirty="0"/>
           </a:p>
@@ -17543,6 +13008,10 @@
             <a:prstDash val="solid"/>
           </a:ln>
         </p:spPr>
+        <p:txBody>
+          <a:bodyPr/>
+          <a:p/>
+        </p:txBody>
       </p:sp>
       <p:sp>
         <p:nvSpPr>
@@ -17694,7 +13163,7 @@
                 <a:ea typeface="Calibri" pitchFamily="34" charset="-122"/>
                 <a:cs typeface="Calibri" pitchFamily="34" charset="-120"/>
               </a:rPr>
-              <a:t>6 / 17</a:t>
+              <a:t>6 / 13</a:t>
             </a:r>
             <a:endParaRPr lang="en-US" sz="900" dirty="0"/>
           </a:p>
@@ -17726,6 +13195,10 @@
             <a:prstDash val="solid"/>
           </a:ln>
         </p:spPr>
+        <p:txBody>
+          <a:bodyPr/>
+          <a:p/>
+        </p:txBody>
       </p:sp>
       <p:sp>
         <p:nvSpPr>
@@ -17753,6 +13226,10 @@
             <a:prstDash val="solid"/>
           </a:ln>
         </p:spPr>
+        <p:txBody>
+          <a:bodyPr/>
+          <a:p/>
+        </p:txBody>
       </p:sp>
       <p:sp>
         <p:nvSpPr>
@@ -17897,6 +13374,10 @@
             <a:prstDash val="solid"/>
           </a:ln>
         </p:spPr>
+        <p:txBody>
+          <a:bodyPr/>
+          <a:p/>
+        </p:txBody>
       </p:sp>
       <p:sp>
         <p:nvSpPr>
@@ -18002,6 +13483,10 @@
             <a:prstDash val="solid"/>
           </a:ln>
         </p:spPr>
+        <p:txBody>
+          <a:bodyPr/>
+          <a:p/>
+        </p:txBody>
       </p:sp>
       <p:sp>
         <p:nvSpPr>
@@ -18107,6 +13592,10 @@
             <a:prstDash val="solid"/>
           </a:ln>
         </p:spPr>
+        <p:txBody>
+          <a:bodyPr/>
+          <a:p/>
+        </p:txBody>
       </p:sp>
       <p:sp>
         <p:nvSpPr>
@@ -18212,6 +13701,10 @@
             <a:prstDash val="solid"/>
           </a:ln>
         </p:spPr>
+        <p:txBody>
+          <a:bodyPr/>
+          <a:p/>
+        </p:txBody>
       </p:sp>
       <p:sp>
         <p:nvSpPr>
@@ -18221,7 +13714,7 @@
         </p:nvSpPr>
         <p:spPr>
           <a:xfrm>
-            <a:off x="822960" y="4773168"/>
+            <a:off x="822960" y="5321808"/>
             <a:ext cx="731520" cy="237744"/>
           </a:xfrm>
           <a:prstGeom prst="rect">
@@ -18260,7 +13753,7 @@
         </p:nvSpPr>
         <p:spPr>
           <a:xfrm>
-            <a:off x="1691640" y="4782312"/>
+            <a:off x="1691640" y="5330952"/>
             <a:ext cx="2235098" cy="274320"/>
           </a:xfrm>
           <a:prstGeom prst="rect">
@@ -18317,6 +13810,10 @@
             <a:prstDash val="solid"/>
           </a:ln>
         </p:spPr>
+        <p:txBody>
+          <a:bodyPr/>
+          <a:p/>
+        </p:txBody>
       </p:sp>
       <p:sp>
         <p:nvSpPr>
@@ -18344,6 +13841,10 @@
             <a:prstDash val="solid"/>
           </a:ln>
         </p:spPr>
+        <p:txBody>
+          <a:bodyPr/>
+          <a:p/>
+        </p:txBody>
       </p:sp>
       <p:sp>
         <p:nvSpPr>
@@ -18488,6 +13989,10 @@
             <a:prstDash val="solid"/>
           </a:ln>
         </p:spPr>
+        <p:txBody>
+          <a:bodyPr/>
+          <a:p/>
+        </p:txBody>
       </p:sp>
       <p:sp>
         <p:nvSpPr>
@@ -18561,7 +14066,7 @@
                 <a:ea typeface="Calibri" pitchFamily="34" charset="-122"/>
                 <a:cs typeface="Calibri" pitchFamily="34" charset="-120"/>
               </a:rPr>
-              <a:t>Registrar provas, pesos e notas</a:t>
+              <a:t>Registrar data de provas</a:t>
             </a:r>
             <a:endParaRPr lang="en-US" sz="1300" dirty="0"/>
           </a:p>
@@ -18593,6 +14098,10 @@
             <a:prstDash val="solid"/>
           </a:ln>
         </p:spPr>
+        <p:txBody>
+          <a:bodyPr/>
+          <a:p/>
+        </p:txBody>
       </p:sp>
       <p:sp>
         <p:nvSpPr>
@@ -18698,6 +14207,10 @@
             <a:prstDash val="solid"/>
           </a:ln>
         </p:spPr>
+        <p:txBody>
+          <a:bodyPr/>
+          <a:p/>
+        </p:txBody>
       </p:sp>
       <p:sp>
         <p:nvSpPr>
@@ -18803,6 +14316,10 @@
             <a:prstDash val="solid"/>
           </a:ln>
         </p:spPr>
+        <p:txBody>
+          <a:bodyPr/>
+          <a:p/>
+        </p:txBody>
       </p:sp>
       <p:sp>
         <p:nvSpPr>
@@ -18876,7 +14393,7 @@
                 <a:ea typeface="Calibri" pitchFamily="34" charset="-122"/>
                 <a:cs typeface="Calibri" pitchFamily="34" charset="-120"/>
               </a:rPr>
-              <a:t>Ver Semana e Mês</a:t>
+              <a:t>Ver a semana (a visão do mês fica para depois)</a:t>
             </a:r>
             <a:endParaRPr lang="en-US" sz="1300" dirty="0"/>
           </a:p>
@@ -18908,6 +14425,10 @@
             <a:prstDash val="solid"/>
           </a:ln>
         </p:spPr>
+        <p:txBody>
+          <a:bodyPr/>
+          <a:p/>
+        </p:txBody>
       </p:sp>
       <p:sp>
         <p:nvSpPr>
@@ -18917,7 +14438,7 @@
         </p:nvSpPr>
         <p:spPr>
           <a:xfrm>
-            <a:off x="4612538" y="5321808"/>
+            <a:off x="8403336" y="3675887"/>
             <a:ext cx="731520" cy="237744"/>
           </a:xfrm>
           <a:prstGeom prst="rect">
@@ -18956,7 +14477,7 @@
         </p:nvSpPr>
         <p:spPr>
           <a:xfrm>
-            <a:off x="5481218" y="5330952"/>
+            <a:off x="9272016" y="3685032"/>
             <a:ext cx="2235098" cy="274320"/>
           </a:xfrm>
           <a:prstGeom prst="rect">
@@ -18981,7 +14502,7 @@
                 <a:ea typeface="Calibri" pitchFamily="34" charset="-122"/>
                 <a:cs typeface="Calibri" pitchFamily="34" charset="-120"/>
               </a:rPr>
-              <a:t>Destacar colisões</a:t>
+              <a:t>Destacar colisões (depois da apresentação)</a:t>
             </a:r>
             <a:endParaRPr lang="en-US" sz="1300" dirty="0"/>
           </a:p>
@@ -19013,6 +14534,10 @@
             <a:prstDash val="solid"/>
           </a:ln>
         </p:spPr>
+        <p:txBody>
+          <a:bodyPr/>
+          <a:p/>
+        </p:txBody>
       </p:sp>
       <p:sp>
         <p:nvSpPr>
@@ -19040,6 +14565,10 @@
             <a:prstDash val="solid"/>
           </a:ln>
         </p:spPr>
+        <p:txBody>
+          <a:bodyPr/>
+          <a:p/>
+        </p:txBody>
       </p:sp>
       <p:sp>
         <p:nvSpPr>
@@ -19113,7 +14642,7 @@
                 <a:ea typeface="Calibri" pitchFamily="34" charset="-122"/>
                 <a:cs typeface="Calibri" pitchFamily="34" charset="-120"/>
               </a:rPr>
-              <a:t>Engajamento</a:t>
+              <a:t>Depois da apresentação</a:t>
             </a:r>
             <a:endParaRPr lang="en-US" sz="2000" dirty="0"/>
           </a:p>
@@ -19152,7 +14681,7 @@
                 <a:ea typeface="Calibri" pitchFamily="34" charset="-122"/>
                 <a:cs typeface="Calibri" pitchFamily="34" charset="-120"/>
               </a:rPr>
-              <a:t>Depende de dados reais no sistema para fazer sentido.</a:t>
+              <a:t>Polimento e integrações externas. Nenhum destes entra na 2ª VA.</a:t>
             </a:r>
             <a:endParaRPr lang="en-US" sz="1200" dirty="0"/>
           </a:p>
@@ -19184,6 +14713,10 @@
             <a:prstDash val="solid"/>
           </a:ln>
         </p:spPr>
+        <p:txBody>
+          <a:bodyPr/>
+          <a:p/>
+        </p:txBody>
       </p:sp>
       <p:sp>
         <p:nvSpPr>
@@ -19289,6 +14822,10 @@
             <a:prstDash val="solid"/>
           </a:ln>
         </p:spPr>
+        <p:txBody>
+          <a:bodyPr/>
+          <a:p/>
+        </p:txBody>
       </p:sp>
       <p:sp>
         <p:nvSpPr>
@@ -19298,7 +14835,7 @@
         </p:nvSpPr>
         <p:spPr>
           <a:xfrm>
-            <a:off x="8402117" y="3675888"/>
+            <a:off x="8403336" y="4224528"/>
             <a:ext cx="731520" cy="237744"/>
           </a:xfrm>
           <a:prstGeom prst="rect">
@@ -19337,7 +14874,7 @@
         </p:nvSpPr>
         <p:spPr>
           <a:xfrm>
-            <a:off x="9270797" y="3685032"/>
+            <a:off x="9272016" y="4233672"/>
             <a:ext cx="2235098" cy="274320"/>
           </a:xfrm>
           <a:prstGeom prst="rect">
@@ -19362,7 +14899,7 @@
                 <a:ea typeface="Calibri" pitchFamily="34" charset="-122"/>
                 <a:cs typeface="Calibri" pitchFamily="34" charset="-120"/>
               </a:rPr>
-              <a:t>Preferências de notificação</a:t>
+              <a:t>Preferências de notificação (adiado)</a:t>
             </a:r>
             <a:endParaRPr lang="en-US" sz="1300" dirty="0"/>
           </a:p>
@@ -19394,6 +14931,10 @@
             <a:prstDash val="solid"/>
           </a:ln>
         </p:spPr>
+        <p:txBody>
+          <a:bodyPr/>
+          <a:p/>
+        </p:txBody>
       </p:sp>
       <p:sp>
         <p:nvSpPr>
@@ -19403,7 +14944,7 @@
         </p:nvSpPr>
         <p:spPr>
           <a:xfrm>
-            <a:off x="8402117" y="4224528"/>
+            <a:off x="822960" y="4773168"/>
             <a:ext cx="731520" cy="237744"/>
           </a:xfrm>
           <a:prstGeom prst="rect">
@@ -19442,7 +14983,7 @@
         </p:nvSpPr>
         <p:spPr>
           <a:xfrm>
-            <a:off x="9270797" y="4233672"/>
+            <a:off x="1691640" y="4782312"/>
             <a:ext cx="2235098" cy="274320"/>
           </a:xfrm>
           <a:prstGeom prst="rect">
@@ -19467,7 +15008,7 @@
                 <a:ea typeface="Calibri" pitchFamily="34" charset="-122"/>
                 <a:cs typeface="Calibri" pitchFamily="34" charset="-120"/>
               </a:rPr>
-              <a:t>XP, nível, sequência e conquistas</a:t>
+              <a:t>XP, nível e sequência (mínimo)</a:t>
             </a:r>
             <a:endParaRPr lang="en-US" sz="1300" dirty="0"/>
           </a:p>
@@ -19499,6 +15040,10 @@
             <a:prstDash val="solid"/>
           </a:ln>
         </p:spPr>
+        <p:txBody>
+          <a:bodyPr/>
+          <a:p/>
+        </p:txBody>
       </p:sp>
       <p:sp>
         <p:nvSpPr>
@@ -19611,7 +15156,46 @@
                 <a:ea typeface="Calibri" pitchFamily="34" charset="-122"/>
                 <a:cs typeface="Calibri" pitchFamily="34" charset="-120"/>
               </a:rPr>
-              <a:t>Ordem de implementação: RF01 → RF02 → RF03 → RF10 → RF04 → RF05 → RF06 → RF11 → RF09 → RF07 → RF12 → RF08 → RF13</a:t>
+              <a:t>Ordem de implementação: RF01 → RF02 → RF03 → RF10 → RF08 → RF04 → RF05 → RF06 → RF11 → RF07 → RF13</a:t>
+            </a:r>
+            <a:endParaRPr lang="en-US" sz="1150" dirty="0"/>
+          </a:p>
+        </p:txBody>
+      </p:sp>
+      <p:sp>
+        <p:nvSpPr>
+          <p:cNvPr id="61" name="Text 59"/>
+          <p:cNvSpPr txBox="1"/>
+          <p:nvPr/>
+        </p:nvSpPr>
+        <p:spPr>
+          <a:xfrm>
+            <a:off x="548640" y="6291072"/>
+            <a:ext cx="11064240" cy="274320"/>
+          </a:xfrm>
+          <a:prstGeom prst="rect">
+            <a:avLst/>
+          </a:prstGeom>
+          <a:noFill/>
+          <a:ln/>
+        </p:spPr>
+        <p:txBody>
+          <a:bodyPr wrap="square" lIns="0" tIns="0" rIns="0" bIns="0" rtlCol="0" anchor="t"/>
+          <a:lstStyle/>
+          <a:p>
+            <a:pPr indent="0" marL="0">
+              <a:buNone/>
+            </a:pPr>
+            <a:r>
+              <a:rPr lang="en-US" sz="1100" b="1" dirty="0">
+                <a:solidFill>
+                  <a:srgbClr val="2F6B4A"/>
+                </a:solidFill>
+                <a:latin typeface="Calibri" pitchFamily="34" charset="0"/>
+                <a:ea typeface="Calibri" pitchFamily="34" charset="-122"/>
+                <a:cs typeface="Calibri" pitchFamily="34" charset="-120"/>
+              </a:rPr>
+              <a:t>Se o prazo apertar, o corte é por ordem combinada: 1º a tela da Semana vira um bloco dentro do Hoje; 2º sai o registro de provas; 3º sai a gamificação, só se a professora abrir mão. Nunca cortar o cancelamento de aula.</a:t>
             </a:r>
             <a:endParaRPr lang="en-US" sz="1150" dirty="0"/>
           </a:p>
@@ -19673,6 +15257,10 @@
             <a:prstDash val="solid"/>
           </a:ln>
         </p:spPr>
+        <p:txBody>
+          <a:bodyPr/>
+          <a:p/>
+        </p:txBody>
       </p:sp>
       <p:sp>
         <p:nvSpPr>
@@ -19824,7 +15412,7 @@
                 <a:ea typeface="Calibri" pitchFamily="34" charset="-122"/>
                 <a:cs typeface="Calibri" pitchFamily="34" charset="-120"/>
               </a:rPr>
-              <a:t>7 / 17</a:t>
+              <a:t>7 / 13</a:t>
             </a:r>
             <a:endParaRPr lang="en-US" sz="900" dirty="0"/>
           </a:p>
@@ -19856,6 +15444,10 @@
             <a:prstDash val="solid"/>
           </a:ln>
         </p:spPr>
+        <p:txBody>
+          <a:bodyPr/>
+          <a:p/>
+        </p:txBody>
       </p:sp>
       <p:sp>
         <p:nvSpPr>
@@ -19883,6 +15475,10 @@
             <a:prstDash val="solid"/>
           </a:ln>
         </p:spPr>
+        <p:txBody>
+          <a:bodyPr/>
+          <a:p/>
+        </p:txBody>
       </p:sp>
       <p:sp>
         <p:nvSpPr>
@@ -20066,6 +15662,10 @@
             <a:prstDash val="solid"/>
           </a:ln>
         </p:spPr>
+        <p:txBody>
+          <a:bodyPr/>
+          <a:p/>
+        </p:txBody>
       </p:sp>
       <p:sp>
         <p:nvSpPr>
@@ -20093,6 +15693,10 @@
             <a:prstDash val="solid"/>
           </a:ln>
         </p:spPr>
+        <p:txBody>
+          <a:bodyPr/>
+          <a:p/>
+        </p:txBody>
       </p:sp>
       <p:sp>
         <p:nvSpPr>
@@ -20276,6 +15880,10 @@
             <a:prstDash val="solid"/>
           </a:ln>
         </p:spPr>
+        <p:txBody>
+          <a:bodyPr/>
+          <a:p/>
+        </p:txBody>
       </p:sp>
       <p:sp>
         <p:nvSpPr>
@@ -20303,6 +15911,10 @@
             <a:prstDash val="solid"/>
           </a:ln>
         </p:spPr>
+        <p:txBody>
+          <a:bodyPr/>
+          <a:p/>
+        </p:txBody>
       </p:sp>
       <p:sp>
         <p:nvSpPr>
@@ -20486,6 +16098,10 @@
             <a:prstDash val="solid"/>
           </a:ln>
         </p:spPr>
+        <p:txBody>
+          <a:bodyPr/>
+          <a:p/>
+        </p:txBody>
       </p:sp>
       <p:sp>
         <p:nvSpPr>
@@ -20513,6 +16129,10 @@
             <a:prstDash val="solid"/>
           </a:ln>
         </p:spPr>
+        <p:txBody>
+          <a:bodyPr/>
+          <a:p/>
+        </p:txBody>
       </p:sp>
       <p:sp>
         <p:nvSpPr>
@@ -20696,207 +16316,9 @@
             <a:prstDash val="solid"/>
           </a:ln>
         </p:spPr>
-      </p:sp>
-      <p:sp>
-        <p:nvSpPr>
-          <p:cNvPr id="32" name="Text 30"/>
-          <p:cNvSpPr txBox="1"/>
-          <p:nvPr/>
-        </p:nvSpPr>
-        <p:spPr>
-          <a:xfrm>
-            <a:off x="8092440" y="1828800"/>
-            <a:ext cx="3291840" cy="274320"/>
-          </a:xfrm>
-          <a:prstGeom prst="rect">
-            <a:avLst/>
-          </a:prstGeom>
-          <a:noFill/>
-          <a:ln/>
-        </p:spPr>
-        <p:txBody>
-          <a:bodyPr wrap="square" lIns="0" tIns="0" rIns="0" bIns="0" rtlCol="0" anchor="t"/>
-          <a:lstStyle/>
-          <a:p>
-            <a:pPr indent="0" marL="0">
-              <a:buNone/>
-            </a:pPr>
-            <a:r>
-              <a:rPr lang="en-US" sz="1100" b="1" spc="200" kern="0" dirty="0">
-                <a:solidFill>
-                  <a:srgbClr val="E6B84D"/>
-                </a:solidFill>
-                <a:latin typeface="Calibri" pitchFamily="34" charset="0"/>
-                <a:ea typeface="Calibri" pitchFamily="34" charset="-122"/>
-                <a:cs typeface="Calibri" pitchFamily="34" charset="-120"/>
-              </a:rPr>
-              <a:t>HISTÓRIA DE USUÁRIO</a:t>
-            </a:r>
-            <a:endParaRPr lang="en-US" sz="1100" dirty="0"/>
-          </a:p>
-        </p:txBody>
-      </p:sp>
-      <p:sp>
-        <p:nvSpPr>
-          <p:cNvPr id="33" name="Text 31"/>
-          <p:cNvSpPr txBox="1"/>
-          <p:nvPr/>
-        </p:nvSpPr>
-        <p:spPr>
-          <a:xfrm>
-            <a:off x="8092440" y="2194560"/>
-            <a:ext cx="3291840" cy="1600200"/>
-          </a:xfrm>
-          <a:prstGeom prst="rect">
-            <a:avLst/>
-          </a:prstGeom>
-          <a:noFill/>
-          <a:ln/>
-        </p:spPr>
-        <p:txBody>
-          <a:bodyPr wrap="square" lIns="0" tIns="0" rIns="0" bIns="0" rtlCol="0" anchor="t"/>
-          <a:lstStyle/>
-          <a:p>
-            <a:pPr indent="0" marL="0">
-              <a:buNone/>
-            </a:pPr>
-            <a:r>
-              <a:rPr lang="en-US" sz="1500" i="1" dirty="0">
-                <a:solidFill>
-                  <a:srgbClr val="FFFFFF"/>
-                </a:solidFill>
-                <a:latin typeface="Calibri" pitchFamily="34" charset="0"/>
-                <a:ea typeface="Calibri" pitchFamily="34" charset="-122"/>
-                <a:cs typeface="Calibri" pitchFamily="34" charset="-120"/>
-              </a:rPr>
-              <a:t>Como estudante, quero ver numa só tela o que vence hoje e nos próximos dias, para decidir o que fazer primeiro.</a:t>
-            </a:r>
-            <a:endParaRPr lang="en-US" sz="1500" dirty="0"/>
-          </a:p>
-        </p:txBody>
-      </p:sp>
-      <p:sp>
-        <p:nvSpPr>
-          <p:cNvPr id="34" name="Text 32"/>
-          <p:cNvSpPr txBox="1"/>
-          <p:nvPr/>
-        </p:nvSpPr>
-        <p:spPr>
-          <a:xfrm>
-            <a:off x="8092440" y="3657600"/>
-            <a:ext cx="3291840" cy="274320"/>
-          </a:xfrm>
-          <a:prstGeom prst="rect">
-            <a:avLst/>
-          </a:prstGeom>
-          <a:noFill/>
-          <a:ln/>
-        </p:spPr>
-        <p:txBody>
-          <a:bodyPr wrap="square" lIns="0" tIns="0" rIns="0" bIns="0" rtlCol="0" anchor="t"/>
-          <a:lstStyle/>
-          <a:p>
-            <a:pPr indent="0" marL="0">
-              <a:buNone/>
-            </a:pPr>
-            <a:r>
-              <a:rPr lang="en-US" sz="1250" b="1" dirty="0">
-                <a:solidFill>
-                  <a:srgbClr val="93C7A6"/>
-                </a:solidFill>
-                <a:latin typeface="Calibri" pitchFamily="34" charset="0"/>
-                <a:ea typeface="Calibri" pitchFamily="34" charset="-122"/>
-                <a:cs typeface="Calibri" pitchFamily="34" charset="-120"/>
-              </a:rPr>
-              <a:t>Critérios de aceite</a:t>
-            </a:r>
-            <a:endParaRPr lang="en-US" sz="1250" dirty="0"/>
-          </a:p>
-        </p:txBody>
-      </p:sp>
-      <p:sp>
-        <p:nvSpPr>
-          <p:cNvPr id="35" name="Text 33"/>
-          <p:cNvSpPr txBox="1"/>
-          <p:nvPr/>
-        </p:nvSpPr>
-        <p:spPr>
-          <a:xfrm>
-            <a:off x="8092440" y="4023360"/>
-            <a:ext cx="3291840" cy="2011680"/>
-          </a:xfrm>
-          <a:prstGeom prst="rect">
-            <a:avLst/>
-          </a:prstGeom>
-          <a:noFill/>
-          <a:ln/>
-        </p:spPr>
-        <p:txBody>
-          <a:bodyPr wrap="square" lIns="0" tIns="0" rIns="0" bIns="0" rtlCol="0" anchor="t"/>
-          <a:lstStyle/>
-          <a:p>
-            <a:pPr marL="342900" indent="-342900">
-              <a:spcAft>
-                <a:spcPts val="600"/>
-              </a:spcAft>
-              <a:buSzPct val="100000"/>
-              <a:buChar char="•"/>
-            </a:pPr>
-            <a:r>
-              <a:rPr lang="en-US" sz="1300" dirty="0">
-                <a:solidFill>
-                  <a:srgbClr val="A9BBAF"/>
-                </a:solidFill>
-                <a:latin typeface="Calibri" pitchFamily="34" charset="0"/>
-                <a:ea typeface="Calibri" pitchFamily="34" charset="-122"/>
-                <a:cs typeface="Calibri" pitchFamily="34" charset="-120"/>
-              </a:rPr>
-              <a:t>Mostra tarefas pendentes do período ativo, da mais próxima para a mais distante</a:t>
-            </a:r>
-            <a:endParaRPr lang="en-US" sz="1300" dirty="0"/>
-          </a:p>
-          <a:p>
-            <a:pPr marL="342900" indent="-342900">
-              <a:spcAft>
-                <a:spcPts val="600"/>
-              </a:spcAft>
-              <a:buSzPct val="100000"/>
-              <a:buChar char="•"/>
-            </a:pPr>
-            <a:r>
-              <a:rPr lang="en-US" sz="1300" dirty="0">
-                <a:solidFill>
-                  <a:srgbClr val="A9BBAF"/>
-                </a:solidFill>
-                <a:latin typeface="Calibri" pitchFamily="34" charset="0"/>
-                <a:ea typeface="Calibri" pitchFamily="34" charset="-122"/>
-                <a:cs typeface="Calibri" pitchFamily="34" charset="-120"/>
-              </a:rPr>
-              <a:t>Concluir uma tarefa tira ela da lista na hora</a:t>
-            </a:r>
-            <a:endParaRPr lang="en-US" sz="1300" dirty="0"/>
-          </a:p>
-          <a:p>
-            <a:pPr marL="342900" indent="-342900">
-              <a:spcAft>
-                <a:spcPts val="600"/>
-              </a:spcAft>
-              <a:buSzPct val="100000"/>
-              <a:buChar char="•"/>
-            </a:pPr>
-            <a:r>
-              <a:rPr lang="en-US" sz="1300" dirty="0">
-                <a:solidFill>
-                  <a:srgbClr val="A9BBAF"/>
-                </a:solidFill>
-                <a:latin typeface="Calibri" pitchFamily="34" charset="0"/>
-                <a:ea typeface="Calibri" pitchFamily="34" charset="-122"/>
-                <a:cs typeface="Calibri" pitchFamily="34" charset="-120"/>
-              </a:rPr>
-              <a:t>Funciona em tela de 360 px, só com toque</a:t>
-            </a:r>
-            <a:endParaRPr lang="en-US" sz="1300" dirty="0"/>
-          </a:p>
+        <p:txBody>
+          <a:bodyPr/>
+          <a:p/>
         </p:txBody>
       </p:sp>
     </p:spTree>
@@ -20955,6 +16377,10 @@
             <a:prstDash val="solid"/>
           </a:ln>
         </p:spPr>
+        <p:txBody>
+          <a:bodyPr/>
+          <a:p/>
+        </p:txBody>
       </p:sp>
       <p:sp>
         <p:nvSpPr>
@@ -21106,7 +16532,7 @@
                 <a:ea typeface="Calibri" pitchFamily="34" charset="-122"/>
                 <a:cs typeface="Calibri" pitchFamily="34" charset="-120"/>
               </a:rPr>
-              <a:t>8 / 17</a:t>
+              <a:t>8 / 13</a:t>
             </a:r>
             <a:endParaRPr lang="en-US" sz="900" dirty="0"/>
           </a:p>
@@ -21138,6 +16564,10 @@
             <a:prstDash val="solid"/>
           </a:ln>
         </p:spPr>
+        <p:txBody>
+          <a:bodyPr/>
+          <a:p/>
+        </p:txBody>
       </p:sp>
       <p:sp>
         <p:nvSpPr>
@@ -21165,6 +16595,10 @@
             <a:prstDash val="solid"/>
           </a:ln>
         </p:spPr>
+        <p:txBody>
+          <a:bodyPr/>
+          <a:p/>
+        </p:txBody>
       </p:sp>
       <p:sp>
         <p:nvSpPr>
@@ -21238,7 +16672,7 @@
                 <a:ea typeface="Calibri" pitchFamily="34" charset="-122"/>
                 <a:cs typeface="Calibri" pitchFamily="34" charset="-120"/>
               </a:rPr>
-              <a:t>Registrar provas, pesos e notas</a:t>
+              <a:t>Registrar data de provas</a:t>
             </a:r>
             <a:endParaRPr lang="en-US" sz="1500" dirty="0"/>
           </a:p>
@@ -21316,7 +16750,7 @@
                 <a:ea typeface="Calibri" pitchFamily="34" charset="-122"/>
                 <a:cs typeface="Calibri" pitchFamily="34" charset="-120"/>
               </a:rPr>
-              <a:t>Prova com data, peso e observações; nota registrada depois, opcional.</a:t>
+              <a:t>Prova com data e título.</a:t>
             </a:r>
             <a:endParaRPr lang="en-US" sz="1200" dirty="0"/>
           </a:p>
@@ -21348,6 +16782,10 @@
             <a:prstDash val="solid"/>
           </a:ln>
         </p:spPr>
+        <p:txBody>
+          <a:bodyPr/>
+          <a:p/>
+        </p:txBody>
       </p:sp>
       <p:sp>
         <p:nvSpPr>
@@ -21375,6 +16813,10 @@
             <a:prstDash val="solid"/>
           </a:ln>
         </p:spPr>
+        <p:txBody>
+          <a:bodyPr/>
+          <a:p/>
+        </p:txBody>
       </p:sp>
       <p:sp>
         <p:nvSpPr>
@@ -21558,6 +17000,10 @@
             <a:prstDash val="solid"/>
           </a:ln>
         </p:spPr>
+        <p:txBody>
+          <a:bodyPr/>
+          <a:p/>
+        </p:txBody>
       </p:sp>
       <p:sp>
         <p:nvSpPr>
@@ -21585,6 +17031,10 @@
             <a:prstDash val="solid"/>
           </a:ln>
         </p:spPr>
+        <p:txBody>
+          <a:bodyPr/>
+          <a:p/>
+        </p:txBody>
       </p:sp>
       <p:sp>
         <p:nvSpPr>
@@ -21768,6 +17218,10 @@
             <a:prstDash val="solid"/>
           </a:ln>
         </p:spPr>
+        <p:txBody>
+          <a:bodyPr/>
+          <a:p/>
+        </p:txBody>
       </p:sp>
       <p:sp>
         <p:nvSpPr>
@@ -21795,6 +17249,10 @@
             <a:prstDash val="solid"/>
           </a:ln>
         </p:spPr>
+        <p:txBody>
+          <a:bodyPr/>
+          <a:p/>
+        </p:txBody>
       </p:sp>
       <p:sp>
         <p:nvSpPr>
@@ -21868,7 +17326,7 @@
                 <a:ea typeface="Calibri" pitchFamily="34" charset="-122"/>
                 <a:cs typeface="Calibri" pitchFamily="34" charset="-120"/>
               </a:rPr>
-              <a:t>Ver Semana e Mês</a:t>
+              <a:t>Ver a semana (a visão do mês fica para depois)</a:t>
             </a:r>
             <a:endParaRPr lang="en-US" sz="1500" dirty="0"/>
           </a:p>
@@ -21946,7 +17404,7 @@
                 <a:ea typeface="Calibri" pitchFamily="34" charset="-122"/>
                 <a:cs typeface="Calibri" pitchFamily="34" charset="-120"/>
               </a:rPr>
-              <a:t>Visões de semana (grade de horários) e de mês, começando na segunda-feira.</a:t>
+              <a:t>Visão de semana (grade de horários), começando na segunda-feira.</a:t>
             </a:r>
             <a:endParaRPr lang="en-US" sz="1200" dirty="0"/>
           </a:p>
@@ -21978,6 +17436,10 @@
             <a:prstDash val="solid"/>
           </a:ln>
         </p:spPr>
+        <p:txBody>
+          <a:bodyPr/>
+          <a:p/>
+        </p:txBody>
       </p:sp>
       <p:sp>
         <p:nvSpPr>
@@ -22005,6 +17467,10 @@
             <a:prstDash val="solid"/>
           </a:ln>
         </p:spPr>
+        <p:txBody>
+          <a:bodyPr/>
+          <a:p/>
+        </p:txBody>
       </p:sp>
       <p:sp>
         <p:nvSpPr>
@@ -22078,7 +17544,7 @@
                 <a:ea typeface="Calibri" pitchFamily="34" charset="-122"/>
                 <a:cs typeface="Calibri" pitchFamily="34" charset="-120"/>
               </a:rPr>
-              <a:t>Destacar colisões</a:t>
+              <a:t>Destacar colisões (depois da apresentação)</a:t>
             </a:r>
             <a:endParaRPr lang="en-US" sz="1500" dirty="0"/>
           </a:p>
@@ -22188,207 +17654,9 @@
             <a:prstDash val="solid"/>
           </a:ln>
         </p:spPr>
-      </p:sp>
-      <p:sp>
-        <p:nvSpPr>
-          <p:cNvPr id="38" name="Text 36"/>
-          <p:cNvSpPr txBox="1"/>
-          <p:nvPr/>
-        </p:nvSpPr>
-        <p:spPr>
-          <a:xfrm>
-            <a:off x="8092440" y="1828800"/>
-            <a:ext cx="3291840" cy="274320"/>
-          </a:xfrm>
-          <a:prstGeom prst="rect">
-            <a:avLst/>
-          </a:prstGeom>
-          <a:noFill/>
-          <a:ln/>
-        </p:spPr>
-        <p:txBody>
-          <a:bodyPr wrap="square" lIns="0" tIns="0" rIns="0" bIns="0" rtlCol="0" anchor="t"/>
-          <a:lstStyle/>
-          <a:p>
-            <a:pPr indent="0" marL="0">
-              <a:buNone/>
-            </a:pPr>
-            <a:r>
-              <a:rPr lang="en-US" sz="1100" b="1" spc="200" kern="0" dirty="0">
-                <a:solidFill>
-                  <a:srgbClr val="E6B84D"/>
-                </a:solidFill>
-                <a:latin typeface="Calibri" pitchFamily="34" charset="0"/>
-                <a:ea typeface="Calibri" pitchFamily="34" charset="-122"/>
-                <a:cs typeface="Calibri" pitchFamily="34" charset="-120"/>
-              </a:rPr>
-              <a:t>HISTÓRIA DE USUÁRIO</a:t>
-            </a:r>
-            <a:endParaRPr lang="en-US" sz="1100" dirty="0"/>
-          </a:p>
-        </p:txBody>
-      </p:sp>
-      <p:sp>
-        <p:nvSpPr>
-          <p:cNvPr id="39" name="Text 37"/>
-          <p:cNvSpPr txBox="1"/>
-          <p:nvPr/>
-        </p:nvSpPr>
-        <p:spPr>
-          <a:xfrm>
-            <a:off x="8092440" y="2194560"/>
-            <a:ext cx="3291840" cy="1600200"/>
-          </a:xfrm>
-          <a:prstGeom prst="rect">
-            <a:avLst/>
-          </a:prstGeom>
-          <a:noFill/>
-          <a:ln/>
-        </p:spPr>
-        <p:txBody>
-          <a:bodyPr wrap="square" lIns="0" tIns="0" rIns="0" bIns="0" rtlCol="0" anchor="t"/>
-          <a:lstStyle/>
-          <a:p>
-            <a:pPr indent="0" marL="0">
-              <a:buNone/>
-            </a:pPr>
-            <a:r>
-              <a:rPr lang="en-US" sz="1500" i="1" dirty="0">
-                <a:solidFill>
-                  <a:srgbClr val="FFFFFF"/>
-                </a:solidFill>
-                <a:latin typeface="Calibri" pitchFamily="34" charset="0"/>
-                <a:ea typeface="Calibri" pitchFamily="34" charset="-122"/>
-                <a:cs typeface="Calibri" pitchFamily="34" charset="-120"/>
-              </a:rPr>
-              <a:t>Como estudante, quero marcar que a aula de amanhã foi cancelada, para não ir à toa nem ser lembrado dela.</a:t>
-            </a:r>
-            <a:endParaRPr lang="en-US" sz="1500" dirty="0"/>
-          </a:p>
-        </p:txBody>
-      </p:sp>
-      <p:sp>
-        <p:nvSpPr>
-          <p:cNvPr id="40" name="Text 38"/>
-          <p:cNvSpPr txBox="1"/>
-          <p:nvPr/>
-        </p:nvSpPr>
-        <p:spPr>
-          <a:xfrm>
-            <a:off x="8092440" y="3657600"/>
-            <a:ext cx="3291840" cy="274320"/>
-          </a:xfrm>
-          <a:prstGeom prst="rect">
-            <a:avLst/>
-          </a:prstGeom>
-          <a:noFill/>
-          <a:ln/>
-        </p:spPr>
-        <p:txBody>
-          <a:bodyPr wrap="square" lIns="0" tIns="0" rIns="0" bIns="0" rtlCol="0" anchor="t"/>
-          <a:lstStyle/>
-          <a:p>
-            <a:pPr indent="0" marL="0">
-              <a:buNone/>
-            </a:pPr>
-            <a:r>
-              <a:rPr lang="en-US" sz="1250" b="1" dirty="0">
-                <a:solidFill>
-                  <a:srgbClr val="93C7A6"/>
-                </a:solidFill>
-                <a:latin typeface="Calibri" pitchFamily="34" charset="0"/>
-                <a:ea typeface="Calibri" pitchFamily="34" charset="-122"/>
-                <a:cs typeface="Calibri" pitchFamily="34" charset="-120"/>
-              </a:rPr>
-              <a:t>Critérios de aceite</a:t>
-            </a:r>
-            <a:endParaRPr lang="en-US" sz="1250" dirty="0"/>
-          </a:p>
-        </p:txBody>
-      </p:sp>
-      <p:sp>
-        <p:nvSpPr>
-          <p:cNvPr id="41" name="Text 39"/>
-          <p:cNvSpPr txBox="1"/>
-          <p:nvPr/>
-        </p:nvSpPr>
-        <p:spPr>
-          <a:xfrm>
-            <a:off x="8092440" y="4023360"/>
-            <a:ext cx="3291840" cy="2011680"/>
-          </a:xfrm>
-          <a:prstGeom prst="rect">
-            <a:avLst/>
-          </a:prstGeom>
-          <a:noFill/>
-          <a:ln/>
-        </p:spPr>
-        <p:txBody>
-          <a:bodyPr wrap="square" lIns="0" tIns="0" rIns="0" bIns="0" rtlCol="0" anchor="t"/>
-          <a:lstStyle/>
-          <a:p>
-            <a:pPr marL="342900" indent="-342900">
-              <a:spcAft>
-                <a:spcPts val="600"/>
-              </a:spcAft>
-              <a:buSzPct val="100000"/>
-              <a:buChar char="•"/>
-            </a:pPr>
-            <a:r>
-              <a:rPr lang="en-US" sz="1300" dirty="0">
-                <a:solidFill>
-                  <a:srgbClr val="A9BBAF"/>
-                </a:solidFill>
-                <a:latin typeface="Calibri" pitchFamily="34" charset="0"/>
-                <a:ea typeface="Calibri" pitchFamily="34" charset="-122"/>
-                <a:cs typeface="Calibri" pitchFamily="34" charset="-120"/>
-              </a:rPr>
-              <a:t>A aula some daquela data e continua nas outras semanas</a:t>
-            </a:r>
-            <a:endParaRPr lang="en-US" sz="1300" dirty="0"/>
-          </a:p>
-          <a:p>
-            <a:pPr marL="342900" indent="-342900">
-              <a:spcAft>
-                <a:spcPts val="600"/>
-              </a:spcAft>
-              <a:buSzPct val="100000"/>
-              <a:buChar char="•"/>
-            </a:pPr>
-            <a:r>
-              <a:rPr lang="en-US" sz="1300" dirty="0">
-                <a:solidFill>
-                  <a:srgbClr val="A9BBAF"/>
-                </a:solidFill>
-                <a:latin typeface="Calibri" pitchFamily="34" charset="0"/>
-                <a:ea typeface="Calibri" pitchFamily="34" charset="-122"/>
-                <a:cs typeface="Calibri" pitchFamily="34" charset="-120"/>
-              </a:rPr>
-              <a:t>Não dá para cancelar duas vezes a mesma aula na mesma data</a:t>
-            </a:r>
-            <a:endParaRPr lang="en-US" sz="1300" dirty="0"/>
-          </a:p>
-          <a:p>
-            <a:pPr marL="342900" indent="-342900">
-              <a:spcAft>
-                <a:spcPts val="600"/>
-              </a:spcAft>
-              <a:buSzPct val="100000"/>
-              <a:buChar char="•"/>
-            </a:pPr>
-            <a:r>
-              <a:rPr lang="en-US" sz="1300" dirty="0">
-                <a:solidFill>
-                  <a:srgbClr val="A9BBAF"/>
-                </a:solidFill>
-                <a:latin typeface="Calibri" pitchFamily="34" charset="0"/>
-                <a:ea typeface="Calibri" pitchFamily="34" charset="-122"/>
-                <a:cs typeface="Calibri" pitchFamily="34" charset="-120"/>
-              </a:rPr>
-              <a:t>Desfazer o cancelamento traz a aula de volta</a:t>
-            </a:r>
-            <a:endParaRPr lang="en-US" sz="1300" dirty="0"/>
-          </a:p>
+        <p:txBody>
+          <a:bodyPr/>
+          <a:p/>
         </p:txBody>
       </p:sp>
     </p:spTree>
@@ -22447,6 +17715,10 @@
             <a:prstDash val="solid"/>
           </a:ln>
         </p:spPr>
+        <p:txBody>
+          <a:bodyPr/>
+          <a:p/>
+        </p:txBody>
       </p:sp>
       <p:sp>
         <p:nvSpPr>
@@ -22598,7 +17870,7 @@
                 <a:ea typeface="Calibri" pitchFamily="34" charset="-122"/>
                 <a:cs typeface="Calibri" pitchFamily="34" charset="-120"/>
               </a:rPr>
-              <a:t>9 / 17</a:t>
+              <a:t>9 / 13</a:t>
             </a:r>
             <a:endParaRPr lang="en-US" sz="900" dirty="0"/>
           </a:p>
@@ -22630,6 +17902,10 @@
             <a:prstDash val="solid"/>
           </a:ln>
         </p:spPr>
+        <p:txBody>
+          <a:bodyPr/>
+          <a:p/>
+        </p:txBody>
       </p:sp>
       <p:sp>
         <p:nvSpPr>
@@ -22657,6 +17933,10 @@
             <a:prstDash val="solid"/>
           </a:ln>
         </p:spPr>
+        <p:txBody>
+          <a:bodyPr/>
+          <a:p/>
+        </p:txBody>
       </p:sp>
       <p:sp>
         <p:nvSpPr>
@@ -22840,6 +18120,10 @@
             <a:prstDash val="solid"/>
           </a:ln>
         </p:spPr>
+        <p:txBody>
+          <a:bodyPr/>
+          <a:p/>
+        </p:txBody>
       </p:sp>
       <p:sp>
         <p:nvSpPr>
@@ -22867,6 +18151,10 @@
             <a:prstDash val="solid"/>
           </a:ln>
         </p:spPr>
+        <p:txBody>
+          <a:bodyPr/>
+          <a:p/>
+        </p:txBody>
       </p:sp>
       <p:sp>
         <p:nvSpPr>
@@ -22940,7 +18228,7 @@
                 <a:ea typeface="Calibri" pitchFamily="34" charset="-122"/>
                 <a:cs typeface="Calibri" pitchFamily="34" charset="-120"/>
               </a:rPr>
-              <a:t>Preferências de notificação</a:t>
+              <a:t>Preferências de notificação (adiado)</a:t>
             </a:r>
             <a:endParaRPr lang="en-US" sz="1500" dirty="0"/>
           </a:p>
@@ -23018,7 +18306,7 @@
                 <a:ea typeface="Calibri" pitchFamily="34" charset="-122"/>
                 <a:cs typeface="Calibri" pitchFamily="34" charset="-120"/>
               </a:rPr>
-              <a:t>Ativar, desativar e ajustar antecedências por tipo de evento.</a:t>
+              <a:t>Ajustar antecedências por tipo de evento. Adiado: no MVP as antecedências são fixas e não há esta tela.</a:t>
             </a:r>
             <a:endParaRPr lang="en-US" sz="1200" dirty="0"/>
           </a:p>
@@ -23050,6 +18338,10 @@
             <a:prstDash val="solid"/>
           </a:ln>
         </p:spPr>
+        <p:txBody>
+          <a:bodyPr/>
+          <a:p/>
+        </p:txBody>
       </p:sp>
       <p:sp>
         <p:nvSpPr>
@@ -23077,6 +18369,10 @@
             <a:prstDash val="solid"/>
           </a:ln>
         </p:spPr>
+        <p:txBody>
+          <a:bodyPr/>
+          <a:p/>
+        </p:txBody>
       </p:sp>
       <p:sp>
         <p:nvSpPr>
@@ -23260,6 +18556,10 @@
             <a:prstDash val="solid"/>
           </a:ln>
         </p:spPr>
+        <p:txBody>
+          <a:bodyPr/>
+          <a:p/>
+        </p:txBody>
       </p:sp>
       <p:sp>
         <p:nvSpPr>
@@ -23287,6 +18587,10 @@
             <a:prstDash val="solid"/>
           </a:ln>
         </p:spPr>
+        <p:txBody>
+          <a:bodyPr/>
+          <a:p/>
+        </p:txBody>
       </p:sp>
       <p:sp>
         <p:nvSpPr>
@@ -23470,207 +18774,9 @@
             <a:prstDash val="solid"/>
           </a:ln>
         </p:spPr>
-      </p:sp>
-      <p:sp>
-        <p:nvSpPr>
-          <p:cNvPr id="32" name="Text 30"/>
-          <p:cNvSpPr txBox="1"/>
-          <p:nvPr/>
-        </p:nvSpPr>
-        <p:spPr>
-          <a:xfrm>
-            <a:off x="8092440" y="1828800"/>
-            <a:ext cx="3291840" cy="274320"/>
-          </a:xfrm>
-          <a:prstGeom prst="rect">
-            <a:avLst/>
-          </a:prstGeom>
-          <a:noFill/>
-          <a:ln/>
-        </p:spPr>
-        <p:txBody>
-          <a:bodyPr wrap="square" lIns="0" tIns="0" rIns="0" bIns="0" rtlCol="0" anchor="t"/>
-          <a:lstStyle/>
-          <a:p>
-            <a:pPr indent="0" marL="0">
-              <a:buNone/>
-            </a:pPr>
-            <a:r>
-              <a:rPr lang="en-US" sz="1100" b="1" spc="200" kern="0" dirty="0">
-                <a:solidFill>
-                  <a:srgbClr val="E6B84D"/>
-                </a:solidFill>
-                <a:latin typeface="Calibri" pitchFamily="34" charset="0"/>
-                <a:ea typeface="Calibri" pitchFamily="34" charset="-122"/>
-                <a:cs typeface="Calibri" pitchFamily="34" charset="-120"/>
-              </a:rPr>
-              <a:t>HISTÓRIA DE USUÁRIO</a:t>
-            </a:r>
-            <a:endParaRPr lang="en-US" sz="1100" dirty="0"/>
-          </a:p>
-        </p:txBody>
-      </p:sp>
-      <p:sp>
-        <p:nvSpPr>
-          <p:cNvPr id="33" name="Text 31"/>
-          <p:cNvSpPr txBox="1"/>
-          <p:nvPr/>
-        </p:nvSpPr>
-        <p:spPr>
-          <a:xfrm>
-            <a:off x="8092440" y="2194560"/>
-            <a:ext cx="3291840" cy="1600200"/>
-          </a:xfrm>
-          <a:prstGeom prst="rect">
-            <a:avLst/>
-          </a:prstGeom>
-          <a:noFill/>
-          <a:ln/>
-        </p:spPr>
-        <p:txBody>
-          <a:bodyPr wrap="square" lIns="0" tIns="0" rIns="0" bIns="0" rtlCol="0" anchor="t"/>
-          <a:lstStyle/>
-          <a:p>
-            <a:pPr indent="0" marL="0">
-              <a:buNone/>
-            </a:pPr>
-            <a:r>
-              <a:rPr lang="en-US" sz="1500" i="1" dirty="0">
-                <a:solidFill>
-                  <a:srgbClr val="FFFFFF"/>
-                </a:solidFill>
-                <a:latin typeface="Calibri" pitchFamily="34" charset="0"/>
-                <a:ea typeface="Calibri" pitchFamily="34" charset="-122"/>
-                <a:cs typeface="Calibri" pitchFamily="34" charset="-120"/>
-              </a:rPr>
-              <a:t>Como estudante, quero ser avisado 7, 3 e 1 dia antes de cada prova, para começar a estudar a tempo.</a:t>
-            </a:r>
-            <a:endParaRPr lang="en-US" sz="1500" dirty="0"/>
-          </a:p>
-        </p:txBody>
-      </p:sp>
-      <p:sp>
-        <p:nvSpPr>
-          <p:cNvPr id="34" name="Text 32"/>
-          <p:cNvSpPr txBox="1"/>
-          <p:nvPr/>
-        </p:nvSpPr>
-        <p:spPr>
-          <a:xfrm>
-            <a:off x="8092440" y="3657600"/>
-            <a:ext cx="3291840" cy="274320"/>
-          </a:xfrm>
-          <a:prstGeom prst="rect">
-            <a:avLst/>
-          </a:prstGeom>
-          <a:noFill/>
-          <a:ln/>
-        </p:spPr>
-        <p:txBody>
-          <a:bodyPr wrap="square" lIns="0" tIns="0" rIns="0" bIns="0" rtlCol="0" anchor="t"/>
-          <a:lstStyle/>
-          <a:p>
-            <a:pPr indent="0" marL="0">
-              <a:buNone/>
-            </a:pPr>
-            <a:r>
-              <a:rPr lang="en-US" sz="1250" b="1" dirty="0">
-                <a:solidFill>
-                  <a:srgbClr val="93C7A6"/>
-                </a:solidFill>
-                <a:latin typeface="Calibri" pitchFamily="34" charset="0"/>
-                <a:ea typeface="Calibri" pitchFamily="34" charset="-122"/>
-                <a:cs typeface="Calibri" pitchFamily="34" charset="-120"/>
-              </a:rPr>
-              <a:t>Critérios de aceite</a:t>
-            </a:r>
-            <a:endParaRPr lang="en-US" sz="1250" dirty="0"/>
-          </a:p>
-        </p:txBody>
-      </p:sp>
-      <p:sp>
-        <p:nvSpPr>
-          <p:cNvPr id="35" name="Text 33"/>
-          <p:cNvSpPr txBox="1"/>
-          <p:nvPr/>
-        </p:nvSpPr>
-        <p:spPr>
-          <a:xfrm>
-            <a:off x="8092440" y="4023360"/>
-            <a:ext cx="3291840" cy="2011680"/>
-          </a:xfrm>
-          <a:prstGeom prst="rect">
-            <a:avLst/>
-          </a:prstGeom>
-          <a:noFill/>
-          <a:ln/>
-        </p:spPr>
-        <p:txBody>
-          <a:bodyPr wrap="square" lIns="0" tIns="0" rIns="0" bIns="0" rtlCol="0" anchor="t"/>
-          <a:lstStyle/>
-          <a:p>
-            <a:pPr marL="342900" indent="-342900">
-              <a:spcAft>
-                <a:spcPts val="600"/>
-              </a:spcAft>
-              <a:buSzPct val="100000"/>
-              <a:buChar char="•"/>
-            </a:pPr>
-            <a:r>
-              <a:rPr lang="en-US" sz="1300" dirty="0">
-                <a:solidFill>
-                  <a:srgbClr val="A9BBAF"/>
-                </a:solidFill>
-                <a:latin typeface="Calibri" pitchFamily="34" charset="0"/>
-                <a:ea typeface="Calibri" pitchFamily="34" charset="-122"/>
-                <a:cs typeface="Calibri" pitchFamily="34" charset="-120"/>
-              </a:rPr>
-              <a:t>Três avisos por prova, nos horários do meu fuso</a:t>
-            </a:r>
-            <a:endParaRPr lang="en-US" sz="1300" dirty="0"/>
-          </a:p>
-          <a:p>
-            <a:pPr marL="342900" indent="-342900">
-              <a:spcAft>
-                <a:spcPts val="600"/>
-              </a:spcAft>
-              <a:buSzPct val="100000"/>
-              <a:buChar char="•"/>
-            </a:pPr>
-            <a:r>
-              <a:rPr lang="en-US" sz="1300" dirty="0">
-                <a:solidFill>
-                  <a:srgbClr val="A9BBAF"/>
-                </a:solidFill>
-                <a:latin typeface="Calibri" pitchFamily="34" charset="0"/>
-                <a:ea typeface="Calibri" pitchFamily="34" charset="-122"/>
-                <a:cs typeface="Calibri" pitchFamily="34" charset="-120"/>
-              </a:rPr>
-              <a:t>Nenhum aviso repetido para o mesmo evento</a:t>
-            </a:r>
-            <a:endParaRPr lang="en-US" sz="1300" dirty="0"/>
-          </a:p>
-          <a:p>
-            <a:pPr marL="342900" indent="-342900">
-              <a:spcAft>
-                <a:spcPts val="600"/>
-              </a:spcAft>
-              <a:buSzPct val="100000"/>
-              <a:buChar char="•"/>
-            </a:pPr>
-            <a:r>
-              <a:rPr lang="en-US" sz="1300" dirty="0">
-                <a:solidFill>
-                  <a:srgbClr val="A9BBAF"/>
-                </a:solidFill>
-                <a:latin typeface="Calibri" pitchFamily="34" charset="0"/>
-                <a:ea typeface="Calibri" pitchFamily="34" charset="-122"/>
-                <a:cs typeface="Calibri" pitchFamily="34" charset="-120"/>
-              </a:rPr>
-              <a:t>Posso desligar os avisos de prova nas preferências</a:t>
-            </a:r>
-            <a:endParaRPr lang="en-US" sz="1300" dirty="0"/>
-          </a:p>
+        <p:txBody>
+          <a:bodyPr/>
+          <a:p/>
         </p:txBody>
       </p:sp>
     </p:spTree>
